--- a/GroupSynchronization/Group Synchronization Analysis.pptx
+++ b/GroupSynchronization/Group Synchronization Analysis.pptx
@@ -16,7 +16,6 @@
     <p:sldId id="271" r:id="rId12"/>
     <p:sldId id="272" r:id="rId13"/>
     <p:sldId id="273" r:id="rId14"/>
-    <p:sldId id="274" r:id="rId15"/>
   </p:sldIdLst>
   <p:sldSz cx="12192000" cy="6858000"/>
   <p:notesSz cx="6858000" cy="12192000"/>
@@ -353,7 +352,7 @@
           <a:p>
             <a:r>
               <a:rPr lang="en-US" dirty="0"/>
-              <a:t>This is the deadlock the program is built to avoid. If the main thread took the mutex and then waited for an instance, it would sleep while holding the mutex once all n instances were busy. The parties in those instances need the same mutex to mark their instance empty before they release it, so they wait for main while main waits for them. That is a circular wait, and nothing can ever clear. A test build that swaps the two lines shows it: with n = 3 and five parties it printed the first three entries and then stopped, and no party ever cleared. The real program waits for a free instance first, while holding nothing, and only then takes the lock.</a:t>
+              <a:t>This is the deadlock the program is built to avoid. If the main thread took the mutex and then waited for an instance, it would sleep while holding the mutex once all n instances were busy. The parties in those instances need the same mutex to mark their instance empty before they release it, so they wait for main while main waits for them. That is a circular wait, and nothing can ever clear. A test build that swaps the two lines shows it: with n = 3 and five parties it printed the first three entries and then stopped, and no party ever cleared. The real program waits for a free instance first, while holding nothing, and only then takes the lock. More generally, a deadlock needs a circular wait: every thread takes an instance before the mutex, never the other way around, and no thread waits for another while it holds the mutex, so no cycle can form.</a:t>
             </a:r>
           </a:p>
         </p:txBody>
@@ -412,7 +411,7 @@
           <a:p>
             <a:r>
               <a:rPr lang="en-US" dirty="0"/>
-              <a:t>Three more ways the program could hang. Building parties one player at a time can deadlock when two half-built parties each hold DPS the other needs; forming only full parties up front, which works because all players arrive at once, means no party ever holds some players while waiting for more. A run that dies without calling release() would leave main waiting in acquire() forever, so release() sits after the try/catch and runs even after an error. A mutex locked by hand stays locked if an exception skips the unlock, so every lock in the program goes through lock_guard. In general, a deadlock needs a circular wait. Here every thread takes an instance before the mutex and never the other way around, and nobody waits for another thread while holding the mutex, so a cycle cannot form.</a:t>
+              <a:t>Starvation is a party or player that can wait without limit while the program keeps running. C++ semaphores and mutexes make no promise about which waiter wakes first, so if every party were its own thread blocked in acquire(), an unlucky party could keep losing to newer ones. Here only the main thread ever waits for an instance, and it sends the parties strictly in order, so a party can only be behind the parties that came before it. Every clear time is at most t2, which the spec caps at 15 seconds, so each group of n parties ahead adds at most t2 seconds to a party's wait. Players who can never be in a full party are reported as leftovers instead of being kept waiting.</a:t>
             </a:r>
           </a:p>
         </p:txBody>
@@ -471,7 +470,7 @@
           <a:p>
             <a:r>
               <a:rPr lang="en-US" dirty="0"/>
-              <a:t>Starvation is a party or player that can wait without limit while the program keeps running. C++ semaphores and mutexes make no promise about which waiter wakes first, so if every party were its own thread blocked in acquire(), an unlucky party could keep losing to newer ones. Here only the main thread ever waits for an instance, and it sends the parties strictly in order, so a party can only be behind the parties that came before it. Each run ends within t2 seconds, at most 15, and frees its instance even after an error. Together that bounds every wait: each group of n parties ahead adds at most t2 seconds. Players who can never be in a full party are reported as leftovers instead of being kept waiting.</a:t>
+              <a:t>Four pieces work together. The counting semaphore enforces the limit of n active instances. One mutex, always taken through lock_guard, protects the shared status, counters and output. Each dungeon run is a thread, and joining the threads is what lets main read the final totals safely. The ordering rules are what keep the combination free of deadlock and starvation: wait for an instance before locking, never sleep or join while holding the lock, and send the parties in from one thread, in order.</a:t>
             </a:r>
           </a:p>
         </p:txBody>
@@ -530,7 +529,7 @@
           <a:p>
             <a:r>
               <a:rPr lang="en-US" dirty="0"/>
-              <a:t>Four pieces work together. The counting semaphore enforces the limit of n active instances. One mutex, always taken through lock_guard, protects the shared status, counters and output. Each dungeon run is a thread, and joining the threads is what lets main read the final totals safely. The ordering rules are what keep the combination free of deadlock and starvation: wait for an instance before locking, never sleep or join while holding the lock, and send the parties in from one thread, in order.</a:t>
+              <a:t>The semaphore's count is the number of free instances. It is a global, so it is created with zero permits; main gives it n permits once n is read and the instance lists are allocated. Before each party enters, main takes a permit, and when all n instances are active, acquire() blocks until a run ends, so there are never more than n parties in dungeons. Each run returns its permit when its party clears, which wakes main if it is waiting, and the next party goes in.</a:t>
             </a:r>
           </a:p>
         </p:txBody>
@@ -589,7 +588,7 @@
           <a:p>
             <a:r>
               <a:rPr lang="en-US" dirty="0"/>
-              <a:t>The semaphore's count is the number of free instances. It is a global, so it is created with zero permits; main gives it n permits once n is read and the instance lists are allocated. Before each party enters, main takes a permit, and when all n instances are active, acquire() blocks until a run ends, so there are never more than n parties in dungeons. Each run returns its permit when its party clears, and also after an error, so the count never drifts. If a party cannot start, for example because the system cannot create another thread, undoEnter() puts the instance back and returns the permit.</a:t>
+              <a:t>All shared data sits behind one mutex, including the console. The status change and the status printout happen under the same lock, so every printed list matches the state at that moment and output from different threads never interleaves. The lock is never held during the clear time: a run sleeps first and only then locks to record its result, so the instances really run at the same time and nobody waits long for the lock. pickInstance() also runs under the lock and picks the empty instance that has served the fewest parties, which spreads the parties across the instances. Every lock goes through lock_guard, which unlocks the mutex automatically at the end of its block.</a:t>
             </a:r>
           </a:p>
         </p:txBody>
@@ -648,66 +647,7 @@
           <a:p>
             <a:r>
               <a:rPr lang="en-US" dirty="0"/>
-              <a:t>All shared data sits behind one mutex, including the console. The status change and the status printout happen under the same lock, so every printed list matches the state at that moment and output from different threads never interleaves. The lock is never held during the clear time: a run sleeps first and only then locks to record its result, so the instances really run at the same time and nobody waits long for the lock. pickInstance() also runs under the lock and picks the empty instance that has served the fewest parties, which spreads the parties across the instances. Every lock goes through lock_guard, which unlocks even if an exception is thrown.</a:t>
-            </a:r>
-          </a:p>
-        </p:txBody>
-      </p:sp>
-    </p:spTree>
-  </p:cSld>
-  <p:clrMapOvr>
-    <a:masterClrMapping/>
-  </p:clrMapOvr>
-</p:notes>
-</file>
-
-<file path=ppt/notesSlides/notesSlide8.xml><?xml version="1.0" encoding="utf-8"?>
-<p:notes xmlns:a="http://schemas.openxmlformats.org/drawingml/2006/main" xmlns:p="http://schemas.openxmlformats.org/presentationml/2006/main" xmlns:r="http://schemas.openxmlformats.org/officeDocument/2006/relationships">
-  <p:cSld>
-    <p:spTree>
-      <p:nvGrpSpPr>
-        <p:cNvPr id="1" name=""/>
-        <p:cNvGrpSpPr/>
-        <p:nvPr/>
-      </p:nvGrpSpPr>
-      <p:grpSpPr>
-        <a:xfrm>
-          <a:off x="0" y="0"/>
-          <a:ext cx="0" cy="0"/>
-          <a:chOff x="0" y="0"/>
-          <a:chExt cx="0" cy="0"/>
-        </a:xfrm>
-      </p:grpSpPr>
-      <p:sp>
-        <p:nvSpPr>
-          <p:cNvPr id="2" name="Slide Image Placeholder 1"/>
-          <p:cNvSpPr>
-            <a:spLocks noGrp="1" noRot="1" noChangeAspect="1"/>
-          </p:cNvSpPr>
-          <p:nvPr>
-            <p:ph type="sldImg"/>
-          </p:nvPr>
-        </p:nvSpPr>
-        <p:spPr/>
-      </p:sp>
-      <p:sp>
-        <p:nvSpPr>
-          <p:cNvPr id="3" name="Notes Placeholder 2"/>
-          <p:cNvSpPr>
-            <a:spLocks noGrp="1"/>
-          </p:cNvSpPr>
-          <p:nvPr>
-            <p:ph type="body" idx="1"/>
-          </p:nvPr>
-        </p:nvSpPr>
-        <p:spPr/>
-        <p:txBody>
-          <a:bodyPr/>
-          <a:lstStyle/>
-          <a:p>
-            <a:r>
-              <a:rPr lang="en-US" dirty="0"/>
-              <a:t>Each requirement maps to one part of the design: the semaphore for the instance limit; matching once at the start for the party makeup and the simultaneous arrival; the lock ordering, full parties, lock_guard and guaranteed releases for deadlock; one ordered dispatcher and bounded clear times for starvation; and a clear time drawn at random from t1 to t2. The status of every instance is printed after each event, and the summary lists the parties served and total time served per instance.</a:t>
+              <a:t>Each requirement maps to one part of the design: the semaphore for the instance limit; matching once at the start for the party makeup and the simultaneous arrival; waiting for an instance before locking for deadlock; one ordered dispatcher and bounded clear times for starvation; and a clear time drawn at random from t1 to t2. The status of every instance is printed after each event, and the summary lists the parties served and total time served per instance.</a:t>
             </a:r>
           </a:p>
         </p:txBody>
@@ -7422,7 +7362,7 @@
                 <a:ea typeface="Arial" pitchFamily="34" charset="-122"/>
                 <a:cs typeface="Arial" pitchFamily="34" charset="-120"/>
               </a:rPr>
-              <a:t>Possible deadlock: other ways to wait forever</a:t>
+              <a:t>Possible starvation: every wait is bounded</a:t>
             </a:r>
             <a:endParaRPr lang="en-US" sz="2800" dirty="0">
               <a:solidFill>
@@ -7445,991 +7385,7 @@
         </p:nvGraphicFramePr>
         <p:xfrm>
           <a:off x="822960" y="1536192"/>
-          <a:ext cx="10556664" cy="2852928"/>
-        </p:xfrm>
-        <a:graphic>
-          <a:graphicData uri="http://schemas.openxmlformats.org/drawingml/2006/table">
-            <a:tbl>
-              <a:tblPr/>
-              <a:tblGrid>
-                <a:gridCol w="2103120"/>
-                <a:gridCol w="4343400"/>
-                <a:gridCol w="4110144"/>
-              </a:tblGrid>
-              <a:tr h="384048">
-                <a:tc>
-                  <a:txBody>
-                    <a:bodyPr/>
-                    <a:lstStyle/>
-                    <a:p>
-                      <a:pPr marL="0" indent="0">
-                        <a:lnSpc>
-                          <a:spcPts val="1700"/>
-                        </a:lnSpc>
-                        <a:buNone/>
-                      </a:pPr>
-                      <a:r>
-                        <a:rPr lang="en-US" sz="1400" b="1" dirty="0">
-                          <a:solidFill>
-                            <a:srgbClr val="2F3A48"/>
-                          </a:solidFill>
-                          <a:latin typeface="Arial" pitchFamily="34" charset="0"/>
-                          <a:ea typeface="Arial" pitchFamily="34" charset="-122"/>
-                          <a:cs typeface="Arial" pitchFamily="34" charset="-120"/>
-                        </a:rPr>
-                        <a:t>Case</a:t>
-                      </a:r>
-                    </a:p>
-                  </a:txBody>
-                  <a:tcPr marL="71120" marR="71120" marT="71120" marB="71120">
-                    <a:lnL w="12700" cap="flat" cmpd="sng" algn="ctr">
-                      <a:solidFill>
-                        <a:srgbClr val="C7C7C5"/>
-                      </a:solidFill>
-                      <a:prstDash val="solid"/>
-                      <a:round/>
-                      <a:headEnd type="none" w="med" len="med"/>
-                      <a:tailEnd type="none" w="med" len="med"/>
-                    </a:lnL>
-                    <a:lnR w="12700" cap="flat" cmpd="sng" algn="ctr">
-                      <a:solidFill>
-                        <a:srgbClr val="C7C7C5"/>
-                      </a:solidFill>
-                      <a:prstDash val="solid"/>
-                      <a:round/>
-                      <a:headEnd type="none" w="med" len="med"/>
-                      <a:tailEnd type="none" w="med" len="med"/>
-                    </a:lnR>
-                    <a:lnT w="12700" cap="flat" cmpd="sng" algn="ctr">
-                      <a:solidFill>
-                        <a:srgbClr val="C7C7C5"/>
-                      </a:solidFill>
-                      <a:prstDash val="solid"/>
-                      <a:round/>
-                      <a:headEnd type="none" w="med" len="med"/>
-                      <a:tailEnd type="none" w="med" len="med"/>
-                    </a:lnT>
-                    <a:lnB w="12700" cap="flat" cmpd="sng" algn="ctr">
-                      <a:solidFill>
-                        <a:srgbClr val="B5BBC3"/>
-                      </a:solidFill>
-                      <a:prstDash val="solid"/>
-                      <a:round/>
-                      <a:headEnd type="none" w="med" len="med"/>
-                      <a:tailEnd type="none" w="med" len="med"/>
-                    </a:lnB>
-                    <a:solidFill>
-                      <a:srgbClr val="E3EAF4"/>
-                    </a:solidFill>
-                  </a:tcPr>
-                </a:tc>
-                <a:tc>
-                  <a:txBody>
-                    <a:bodyPr/>
-                    <a:lstStyle/>
-                    <a:p>
-                      <a:pPr marL="0" indent="0">
-                        <a:lnSpc>
-                          <a:spcPts val="1700"/>
-                        </a:lnSpc>
-                        <a:buNone/>
-                      </a:pPr>
-                      <a:r>
-                        <a:rPr lang="en-US" sz="1400" b="1" dirty="0">
-                          <a:solidFill>
-                            <a:srgbClr val="2F3A48"/>
-                          </a:solidFill>
-                          <a:latin typeface="Arial" pitchFamily="34" charset="0"/>
-                          <a:ea typeface="Arial" pitchFamily="34" charset="-122"/>
-                          <a:cs typeface="Arial" pitchFamily="34" charset="-120"/>
-                        </a:rPr>
-                        <a:t>How it could deadlock</a:t>
-                      </a:r>
-                    </a:p>
-                  </a:txBody>
-                  <a:tcPr marL="71120" marR="71120" marT="71120" marB="71120">
-                    <a:lnL w="12700" cap="flat" cmpd="sng" algn="ctr">
-                      <a:solidFill>
-                        <a:srgbClr val="C7C7C5"/>
-                      </a:solidFill>
-                      <a:prstDash val="solid"/>
-                      <a:round/>
-                      <a:headEnd type="none" w="med" len="med"/>
-                      <a:tailEnd type="none" w="med" len="med"/>
-                    </a:lnL>
-                    <a:lnR w="12700" cap="flat" cmpd="sng" algn="ctr">
-                      <a:solidFill>
-                        <a:srgbClr val="C7C7C5"/>
-                      </a:solidFill>
-                      <a:prstDash val="solid"/>
-                      <a:round/>
-                      <a:headEnd type="none" w="med" len="med"/>
-                      <a:tailEnd type="none" w="med" len="med"/>
-                    </a:lnR>
-                    <a:lnT w="12700" cap="flat" cmpd="sng" algn="ctr">
-                      <a:solidFill>
-                        <a:srgbClr val="C7C7C5"/>
-                      </a:solidFill>
-                      <a:prstDash val="solid"/>
-                      <a:round/>
-                      <a:headEnd type="none" w="med" len="med"/>
-                      <a:tailEnd type="none" w="med" len="med"/>
-                    </a:lnT>
-                    <a:lnB w="12700" cap="flat" cmpd="sng" algn="ctr">
-                      <a:solidFill>
-                        <a:srgbClr val="B5BBC3"/>
-                      </a:solidFill>
-                      <a:prstDash val="solid"/>
-                      <a:round/>
-                      <a:headEnd type="none" w="med" len="med"/>
-                      <a:tailEnd type="none" w="med" len="med"/>
-                    </a:lnB>
-                    <a:solidFill>
-                      <a:srgbClr val="E3EAF4"/>
-                    </a:solidFill>
-                  </a:tcPr>
-                </a:tc>
-                <a:tc>
-                  <a:txBody>
-                    <a:bodyPr/>
-                    <a:lstStyle/>
-                    <a:p>
-                      <a:pPr marL="0" indent="0">
-                        <a:lnSpc>
-                          <a:spcPts val="1700"/>
-                        </a:lnSpc>
-                        <a:buNone/>
-                      </a:pPr>
-                      <a:r>
-                        <a:rPr lang="en-US" sz="1400" b="1" dirty="0">
-                          <a:solidFill>
-                            <a:srgbClr val="2F3A48"/>
-                          </a:solidFill>
-                          <a:latin typeface="Arial" pitchFamily="34" charset="0"/>
-                          <a:ea typeface="Arial" pitchFamily="34" charset="-122"/>
-                          <a:cs typeface="Arial" pitchFamily="34" charset="-120"/>
-                        </a:rPr>
-                        <a:t>How the program avoids it</a:t>
-                      </a:r>
-                    </a:p>
-                  </a:txBody>
-                  <a:tcPr marL="71120" marR="71120" marT="71120" marB="71120">
-                    <a:lnL w="12700" cap="flat" cmpd="sng" algn="ctr">
-                      <a:solidFill>
-                        <a:srgbClr val="C7C7C5"/>
-                      </a:solidFill>
-                      <a:prstDash val="solid"/>
-                      <a:round/>
-                      <a:headEnd type="none" w="med" len="med"/>
-                      <a:tailEnd type="none" w="med" len="med"/>
-                    </a:lnL>
-                    <a:lnR w="12700" cap="flat" cmpd="sng" algn="ctr">
-                      <a:solidFill>
-                        <a:srgbClr val="C7C7C5"/>
-                      </a:solidFill>
-                      <a:prstDash val="solid"/>
-                      <a:round/>
-                      <a:headEnd type="none" w="med" len="med"/>
-                      <a:tailEnd type="none" w="med" len="med"/>
-                    </a:lnR>
-                    <a:lnT w="12700" cap="flat" cmpd="sng" algn="ctr">
-                      <a:solidFill>
-                        <a:srgbClr val="C7C7C5"/>
-                      </a:solidFill>
-                      <a:prstDash val="solid"/>
-                      <a:round/>
-                      <a:headEnd type="none" w="med" len="med"/>
-                      <a:tailEnd type="none" w="med" len="med"/>
-                    </a:lnT>
-                    <a:lnB w="12700" cap="flat" cmpd="sng" algn="ctr">
-                      <a:solidFill>
-                        <a:srgbClr val="B5BBC3"/>
-                      </a:solidFill>
-                      <a:prstDash val="solid"/>
-                      <a:round/>
-                      <a:headEnd type="none" w="med" len="med"/>
-                      <a:tailEnd type="none" w="med" len="med"/>
-                    </a:lnB>
-                    <a:solidFill>
-                      <a:srgbClr val="E3EAF4"/>
-                    </a:solidFill>
-                  </a:tcPr>
-                </a:tc>
-              </a:tr>
-              <a:tr h="822960">
-                <a:tc>
-                  <a:txBody>
-                    <a:bodyPr/>
-                    <a:lstStyle/>
-                    <a:p>
-                      <a:pPr marL="0" indent="0">
-                        <a:lnSpc>
-                          <a:spcPts val="1700"/>
-                        </a:lnSpc>
-                        <a:buNone/>
-                      </a:pPr>
-                      <a:r>
-                        <a:rPr lang="en-US" sz="1400" dirty="0">
-                          <a:solidFill>
-                            <a:srgbClr val="2F3A48"/>
-                          </a:solidFill>
-                          <a:latin typeface="Arial" pitchFamily="34" charset="0"/>
-                          <a:ea typeface="Arial" pitchFamily="34" charset="-122"/>
-                          <a:cs typeface="Arial" pitchFamily="34" charset="-120"/>
-                        </a:rPr>
-                        <a:t>Half-built parties</a:t>
-                      </a:r>
-                    </a:p>
-                  </a:txBody>
-                  <a:tcPr marL="71120" marR="71120" marT="71120" marB="71120">
-                    <a:lnL w="12700" cap="flat" cmpd="sng" algn="ctr">
-                      <a:solidFill>
-                        <a:srgbClr val="C7C7C5"/>
-                      </a:solidFill>
-                      <a:prstDash val="solid"/>
-                      <a:round/>
-                      <a:headEnd type="none" w="med" len="med"/>
-                      <a:tailEnd type="none" w="med" len="med"/>
-                    </a:lnL>
-                    <a:lnR w="12700" cap="flat" cmpd="sng" algn="ctr">
-                      <a:solidFill>
-                        <a:srgbClr val="C7C7C5"/>
-                      </a:solidFill>
-                      <a:prstDash val="solid"/>
-                      <a:round/>
-                      <a:headEnd type="none" w="med" len="med"/>
-                      <a:tailEnd type="none" w="med" len="med"/>
-                    </a:lnR>
-                    <a:lnT w="12700" cap="flat" cmpd="sng" algn="ctr">
-                      <a:solidFill>
-                        <a:srgbClr val="C7C7C5"/>
-                      </a:solidFill>
-                      <a:prstDash val="solid"/>
-                      <a:round/>
-                      <a:headEnd type="none" w="med" len="med"/>
-                      <a:tailEnd type="none" w="med" len="med"/>
-                    </a:lnT>
-                    <a:lnB w="12700" cap="flat" cmpd="sng" algn="ctr">
-                      <a:solidFill>
-                        <a:srgbClr val="C7C7C5"/>
-                      </a:solidFill>
-                      <a:prstDash val="solid"/>
-                      <a:round/>
-                      <a:headEnd type="none" w="med" len="med"/>
-                      <a:tailEnd type="none" w="med" len="med"/>
-                    </a:lnB>
-                  </a:tcPr>
-                </a:tc>
-                <a:tc>
-                  <a:txBody>
-                    <a:bodyPr/>
-                    <a:lstStyle/>
-                    <a:p>
-                      <a:pPr marL="0" indent="0">
-                        <a:lnSpc>
-                          <a:spcPts val="1700"/>
-                        </a:lnSpc>
-                        <a:buNone/>
-                      </a:pPr>
-                      <a:r>
-                        <a:rPr lang="en-US" sz="1400" dirty="0">
-                          <a:solidFill>
-                            <a:srgbClr val="2F3A48"/>
-                          </a:solidFill>
-                          <a:latin typeface="Arial" pitchFamily="34" charset="0"/>
-                          <a:ea typeface="Arial" pitchFamily="34" charset="-122"/>
-                          <a:cs typeface="Arial" pitchFamily="34" charset="-120"/>
-                        </a:rPr>
-                        <a:t>If parties were built one player at a time, two of them could each hold 2 of the 4 DPS and wait for a third that the other one holds</a:t>
-                      </a:r>
-                    </a:p>
-                  </a:txBody>
-                  <a:tcPr marL="71120" marR="71120" marT="71120" marB="71120">
-                    <a:lnL w="12700" cap="flat" cmpd="sng" algn="ctr">
-                      <a:solidFill>
-                        <a:srgbClr val="C7C7C5"/>
-                      </a:solidFill>
-                      <a:prstDash val="solid"/>
-                      <a:round/>
-                      <a:headEnd type="none" w="med" len="med"/>
-                      <a:tailEnd type="none" w="med" len="med"/>
-                    </a:lnL>
-                    <a:lnR w="12700" cap="flat" cmpd="sng" algn="ctr">
-                      <a:solidFill>
-                        <a:srgbClr val="C7C7C5"/>
-                      </a:solidFill>
-                      <a:prstDash val="solid"/>
-                      <a:round/>
-                      <a:headEnd type="none" w="med" len="med"/>
-                      <a:tailEnd type="none" w="med" len="med"/>
-                    </a:lnR>
-                    <a:lnT w="12700" cap="flat" cmpd="sng" algn="ctr">
-                      <a:solidFill>
-                        <a:srgbClr val="C7C7C5"/>
-                      </a:solidFill>
-                      <a:prstDash val="solid"/>
-                      <a:round/>
-                      <a:headEnd type="none" w="med" len="med"/>
-                      <a:tailEnd type="none" w="med" len="med"/>
-                    </a:lnT>
-                    <a:lnB w="12700" cap="flat" cmpd="sng" algn="ctr">
-                      <a:solidFill>
-                        <a:srgbClr val="C7C7C5"/>
-                      </a:solidFill>
-                      <a:prstDash val="solid"/>
-                      <a:round/>
-                      <a:headEnd type="none" w="med" len="med"/>
-                      <a:tailEnd type="none" w="med" len="med"/>
-                    </a:lnB>
-                  </a:tcPr>
-                </a:tc>
-                <a:tc>
-                  <a:txBody>
-                    <a:bodyPr/>
-                    <a:lstStyle/>
-                    <a:p>
-                      <a:pPr marL="0" indent="0">
-                        <a:lnSpc>
-                          <a:spcPts val="1700"/>
-                        </a:lnSpc>
-                        <a:buNone/>
-                      </a:pPr>
-                      <a:r>
-                        <a:rPr lang="en-US" sz="1400" dirty="0">
-                          <a:solidFill>
-                            <a:srgbClr val="2F3A48"/>
-                          </a:solidFill>
-                          <a:latin typeface="Arial" pitchFamily="34" charset="0"/>
-                          <a:ea typeface="Arial" pitchFamily="34" charset="-122"/>
-                          <a:cs typeface="Arial" pitchFamily="34" charset="-120"/>
-                        </a:rPr>
-                        <a:t>Only full parties are formed, all at the start, before any party enters (possible because every player arrives at once)</a:t>
-                      </a:r>
-                    </a:p>
-                  </a:txBody>
-                  <a:tcPr marL="71120" marR="71120" marT="71120" marB="71120">
-                    <a:lnL w="12700" cap="flat" cmpd="sng" algn="ctr">
-                      <a:solidFill>
-                        <a:srgbClr val="C7C7C5"/>
-                      </a:solidFill>
-                      <a:prstDash val="solid"/>
-                      <a:round/>
-                      <a:headEnd type="none" w="med" len="med"/>
-                      <a:tailEnd type="none" w="med" len="med"/>
-                    </a:lnL>
-                    <a:lnR w="12700" cap="flat" cmpd="sng" algn="ctr">
-                      <a:solidFill>
-                        <a:srgbClr val="C7C7C5"/>
-                      </a:solidFill>
-                      <a:prstDash val="solid"/>
-                      <a:round/>
-                      <a:headEnd type="none" w="med" len="med"/>
-                      <a:tailEnd type="none" w="med" len="med"/>
-                    </a:lnR>
-                    <a:lnT w="12700" cap="flat" cmpd="sng" algn="ctr">
-                      <a:solidFill>
-                        <a:srgbClr val="C7C7C5"/>
-                      </a:solidFill>
-                      <a:prstDash val="solid"/>
-                      <a:round/>
-                      <a:headEnd type="none" w="med" len="med"/>
-                      <a:tailEnd type="none" w="med" len="med"/>
-                    </a:lnT>
-                    <a:lnB w="12700" cap="flat" cmpd="sng" algn="ctr">
-                      <a:solidFill>
-                        <a:srgbClr val="C7C7C5"/>
-                      </a:solidFill>
-                      <a:prstDash val="solid"/>
-                      <a:round/>
-                      <a:headEnd type="none" w="med" len="med"/>
-                      <a:tailEnd type="none" w="med" len="med"/>
-                    </a:lnB>
-                  </a:tcPr>
-                </a:tc>
-              </a:tr>
-              <a:tr h="822960">
-                <a:tc>
-                  <a:txBody>
-                    <a:bodyPr/>
-                    <a:lstStyle/>
-                    <a:p>
-                      <a:pPr marL="0" indent="0">
-                        <a:lnSpc>
-                          <a:spcPts val="1700"/>
-                        </a:lnSpc>
-                        <a:buNone/>
-                      </a:pPr>
-                      <a:r>
-                        <a:rPr lang="en-US" sz="1400" dirty="0">
-                          <a:solidFill>
-                            <a:srgbClr val="2F3A48"/>
-                          </a:solidFill>
-                          <a:latin typeface="Arial" pitchFamily="34" charset="0"/>
-                          <a:ea typeface="Arial" pitchFamily="34" charset="-122"/>
-                          <a:cs typeface="Arial" pitchFamily="34" charset="-120"/>
-                        </a:rPr>
-                        <a:t>A permit never returned</a:t>
-                      </a:r>
-                    </a:p>
-                  </a:txBody>
-                  <a:tcPr marL="71120" marR="71120" marT="71120" marB="71120">
-                    <a:lnL w="12700" cap="flat" cmpd="sng" algn="ctr">
-                      <a:solidFill>
-                        <a:srgbClr val="C7C7C5"/>
-                      </a:solidFill>
-                      <a:prstDash val="solid"/>
-                      <a:round/>
-                      <a:headEnd type="none" w="med" len="med"/>
-                      <a:tailEnd type="none" w="med" len="med"/>
-                    </a:lnL>
-                    <a:lnR w="12700" cap="flat" cmpd="sng" algn="ctr">
-                      <a:solidFill>
-                        <a:srgbClr val="C7C7C5"/>
-                      </a:solidFill>
-                      <a:prstDash val="solid"/>
-                      <a:round/>
-                      <a:headEnd type="none" w="med" len="med"/>
-                      <a:tailEnd type="none" w="med" len="med"/>
-                    </a:lnR>
-                    <a:lnT w="12700" cap="flat" cmpd="sng" algn="ctr">
-                      <a:solidFill>
-                        <a:srgbClr val="C7C7C5"/>
-                      </a:solidFill>
-                      <a:prstDash val="solid"/>
-                      <a:round/>
-                      <a:headEnd type="none" w="med" len="med"/>
-                      <a:tailEnd type="none" w="med" len="med"/>
-                    </a:lnT>
-                    <a:lnB w="12700" cap="flat" cmpd="sng" algn="ctr">
-                      <a:solidFill>
-                        <a:srgbClr val="C7C7C5"/>
-                      </a:solidFill>
-                      <a:prstDash val="solid"/>
-                      <a:round/>
-                      <a:headEnd type="none" w="med" len="med"/>
-                      <a:tailEnd type="none" w="med" len="med"/>
-                    </a:lnB>
-                  </a:tcPr>
-                </a:tc>
-                <a:tc>
-                  <a:txBody>
-                    <a:bodyPr/>
-                    <a:lstStyle/>
-                    <a:p>
-                      <a:pPr marL="0" indent="0">
-                        <a:lnSpc>
-                          <a:spcPts val="1700"/>
-                        </a:lnSpc>
-                        <a:buNone/>
-                      </a:pPr>
-                      <a:r>
-                        <a:rPr lang="en-US" sz="1400" dirty="0">
-                          <a:solidFill>
-                            <a:srgbClr val="2F3A48"/>
-                          </a:solidFill>
-                          <a:latin typeface="Arial" pitchFamily="34" charset="0"/>
-                          <a:ea typeface="Arial" pitchFamily="34" charset="-122"/>
-                          <a:cs typeface="Arial" pitchFamily="34" charset="-120"/>
-                        </a:rPr>
-                        <a:t>If a run threw before release(), its instance would stay taken; once every permit is gone, main waits in acquire() forever</a:t>
-                      </a:r>
-                    </a:p>
-                  </a:txBody>
-                  <a:tcPr marL="71120" marR="71120" marT="71120" marB="71120">
-                    <a:lnL w="12700" cap="flat" cmpd="sng" algn="ctr">
-                      <a:solidFill>
-                        <a:srgbClr val="C7C7C5"/>
-                      </a:solidFill>
-                      <a:prstDash val="solid"/>
-                      <a:round/>
-                      <a:headEnd type="none" w="med" len="med"/>
-                      <a:tailEnd type="none" w="med" len="med"/>
-                    </a:lnL>
-                    <a:lnR w="12700" cap="flat" cmpd="sng" algn="ctr">
-                      <a:solidFill>
-                        <a:srgbClr val="C7C7C5"/>
-                      </a:solidFill>
-                      <a:prstDash val="solid"/>
-                      <a:round/>
-                      <a:headEnd type="none" w="med" len="med"/>
-                      <a:tailEnd type="none" w="med" len="med"/>
-                    </a:lnR>
-                    <a:lnT w="12700" cap="flat" cmpd="sng" algn="ctr">
-                      <a:solidFill>
-                        <a:srgbClr val="C7C7C5"/>
-                      </a:solidFill>
-                      <a:prstDash val="solid"/>
-                      <a:round/>
-                      <a:headEnd type="none" w="med" len="med"/>
-                      <a:tailEnd type="none" w="med" len="med"/>
-                    </a:lnT>
-                    <a:lnB w="12700" cap="flat" cmpd="sng" algn="ctr">
-                      <a:solidFill>
-                        <a:srgbClr val="C7C7C5"/>
-                      </a:solidFill>
-                      <a:prstDash val="solid"/>
-                      <a:round/>
-                      <a:headEnd type="none" w="med" len="med"/>
-                      <a:tailEnd type="none" w="med" len="med"/>
-                    </a:lnB>
-                  </a:tcPr>
-                </a:tc>
-                <a:tc>
-                  <a:txBody>
-                    <a:bodyPr/>
-                    <a:lstStyle/>
-                    <a:p>
-                      <a:pPr marL="0" indent="0">
-                        <a:lnSpc>
-                          <a:spcPts val="1700"/>
-                        </a:lnSpc>
-                        <a:buNone/>
-                      </a:pPr>
-                      <a:r>
-                        <a:rPr lang="en-US" sz="1400" dirty="0">
-                          <a:solidFill>
-                            <a:srgbClr val="2F3A48"/>
-                          </a:solidFill>
-                          <a:latin typeface="Arial" pitchFamily="34" charset="0"/>
-                          <a:ea typeface="Arial" pitchFamily="34" charset="-122"/>
-                          <a:cs typeface="Arial" pitchFamily="34" charset="-120"/>
-                        </a:rPr>
-                        <a:t>release() comes after the run's try/catch, so it runs even after an error; undoEnter() returns the permit if a party cannot start</a:t>
-                      </a:r>
-                    </a:p>
-                  </a:txBody>
-                  <a:tcPr marL="71120" marR="71120" marT="71120" marB="71120">
-                    <a:lnL w="12700" cap="flat" cmpd="sng" algn="ctr">
-                      <a:solidFill>
-                        <a:srgbClr val="C7C7C5"/>
-                      </a:solidFill>
-                      <a:prstDash val="solid"/>
-                      <a:round/>
-                      <a:headEnd type="none" w="med" len="med"/>
-                      <a:tailEnd type="none" w="med" len="med"/>
-                    </a:lnL>
-                    <a:lnR w="12700" cap="flat" cmpd="sng" algn="ctr">
-                      <a:solidFill>
-                        <a:srgbClr val="C7C7C5"/>
-                      </a:solidFill>
-                      <a:prstDash val="solid"/>
-                      <a:round/>
-                      <a:headEnd type="none" w="med" len="med"/>
-                      <a:tailEnd type="none" w="med" len="med"/>
-                    </a:lnR>
-                    <a:lnT w="12700" cap="flat" cmpd="sng" algn="ctr">
-                      <a:solidFill>
-                        <a:srgbClr val="C7C7C5"/>
-                      </a:solidFill>
-                      <a:prstDash val="solid"/>
-                      <a:round/>
-                      <a:headEnd type="none" w="med" len="med"/>
-                      <a:tailEnd type="none" w="med" len="med"/>
-                    </a:lnT>
-                    <a:lnB w="12700" cap="flat" cmpd="sng" algn="ctr">
-                      <a:solidFill>
-                        <a:srgbClr val="C7C7C5"/>
-                      </a:solidFill>
-                      <a:prstDash val="solid"/>
-                      <a:round/>
-                      <a:headEnd type="none" w="med" len="med"/>
-                      <a:tailEnd type="none" w="med" len="med"/>
-                    </a:lnB>
-                  </a:tcPr>
-                </a:tc>
-              </a:tr>
-              <a:tr h="822960">
-                <a:tc>
-                  <a:txBody>
-                    <a:bodyPr/>
-                    <a:lstStyle/>
-                    <a:p>
-                      <a:pPr marL="0" indent="0">
-                        <a:lnSpc>
-                          <a:spcPts val="1700"/>
-                        </a:lnSpc>
-                        <a:buNone/>
-                      </a:pPr>
-                      <a:r>
-                        <a:rPr lang="en-US" sz="1400" dirty="0">
-                          <a:solidFill>
-                            <a:srgbClr val="2F3A48"/>
-                          </a:solidFill>
-                          <a:latin typeface="Arial" pitchFamily="34" charset="0"/>
-                          <a:ea typeface="Arial" pitchFamily="34" charset="-122"/>
-                          <a:cs typeface="Arial" pitchFamily="34" charset="-120"/>
-                        </a:rPr>
-                        <a:t>A mutex left locked</a:t>
-                      </a:r>
-                    </a:p>
-                  </a:txBody>
-                  <a:tcPr marL="71120" marR="71120" marT="71120" marB="71120">
-                    <a:lnL w="12700" cap="flat" cmpd="sng" algn="ctr">
-                      <a:solidFill>
-                        <a:srgbClr val="C7C7C5"/>
-                      </a:solidFill>
-                      <a:prstDash val="solid"/>
-                      <a:round/>
-                      <a:headEnd type="none" w="med" len="med"/>
-                      <a:tailEnd type="none" w="med" len="med"/>
-                    </a:lnL>
-                    <a:lnR w="12700" cap="flat" cmpd="sng" algn="ctr">
-                      <a:solidFill>
-                        <a:srgbClr val="C7C7C5"/>
-                      </a:solidFill>
-                      <a:prstDash val="solid"/>
-                      <a:round/>
-                      <a:headEnd type="none" w="med" len="med"/>
-                      <a:tailEnd type="none" w="med" len="med"/>
-                    </a:lnR>
-                    <a:lnT w="12700" cap="flat" cmpd="sng" algn="ctr">
-                      <a:solidFill>
-                        <a:srgbClr val="C7C7C5"/>
-                      </a:solidFill>
-                      <a:prstDash val="solid"/>
-                      <a:round/>
-                      <a:headEnd type="none" w="med" len="med"/>
-                      <a:tailEnd type="none" w="med" len="med"/>
-                    </a:lnT>
-                    <a:lnB w="12700" cap="flat" cmpd="sng" algn="ctr">
-                      <a:solidFill>
-                        <a:srgbClr val="C7C7C5"/>
-                      </a:solidFill>
-                      <a:prstDash val="solid"/>
-                      <a:round/>
-                      <a:headEnd type="none" w="med" len="med"/>
-                      <a:tailEnd type="none" w="med" len="med"/>
-                    </a:lnB>
-                  </a:tcPr>
-                </a:tc>
-                <a:tc>
-                  <a:txBody>
-                    <a:bodyPr/>
-                    <a:lstStyle/>
-                    <a:p>
-                      <a:pPr marL="0" indent="0">
-                        <a:lnSpc>
-                          <a:spcPts val="1700"/>
-                        </a:lnSpc>
-                        <a:buNone/>
-                      </a:pPr>
-                      <a:r>
-                        <a:rPr lang="en-US" sz="1400" dirty="0">
-                          <a:solidFill>
-                            <a:srgbClr val="2F3A48"/>
-                          </a:solidFill>
-                          <a:latin typeface="Arial" pitchFamily="34" charset="0"/>
-                          <a:ea typeface="Arial" pitchFamily="34" charset="-122"/>
-                          <a:cs typeface="Arial" pitchFamily="34" charset="-120"/>
-                        </a:rPr>
-                        <a:t>With mtx.lock() and mtx.unlock(), an exception in between skips the unlock, and every later lock waits forever</a:t>
-                      </a:r>
-                    </a:p>
-                  </a:txBody>
-                  <a:tcPr marL="71120" marR="71120" marT="71120" marB="71120">
-                    <a:lnL w="12700" cap="flat" cmpd="sng" algn="ctr">
-                      <a:solidFill>
-                        <a:srgbClr val="C7C7C5"/>
-                      </a:solidFill>
-                      <a:prstDash val="solid"/>
-                      <a:round/>
-                      <a:headEnd type="none" w="med" len="med"/>
-                      <a:tailEnd type="none" w="med" len="med"/>
-                    </a:lnL>
-                    <a:lnR w="12700" cap="flat" cmpd="sng" algn="ctr">
-                      <a:solidFill>
-                        <a:srgbClr val="C7C7C5"/>
-                      </a:solidFill>
-                      <a:prstDash val="solid"/>
-                      <a:round/>
-                      <a:headEnd type="none" w="med" len="med"/>
-                      <a:tailEnd type="none" w="med" len="med"/>
-                    </a:lnR>
-                    <a:lnT w="12700" cap="flat" cmpd="sng" algn="ctr">
-                      <a:solidFill>
-                        <a:srgbClr val="C7C7C5"/>
-                      </a:solidFill>
-                      <a:prstDash val="solid"/>
-                      <a:round/>
-                      <a:headEnd type="none" w="med" len="med"/>
-                      <a:tailEnd type="none" w="med" len="med"/>
-                    </a:lnT>
-                    <a:lnB w="12700" cap="flat" cmpd="sng" algn="ctr">
-                      <a:solidFill>
-                        <a:srgbClr val="C7C7C5"/>
-                      </a:solidFill>
-                      <a:prstDash val="solid"/>
-                      <a:round/>
-                      <a:headEnd type="none" w="med" len="med"/>
-                      <a:tailEnd type="none" w="med" len="med"/>
-                    </a:lnB>
-                  </a:tcPr>
-                </a:tc>
-                <a:tc>
-                  <a:txBody>
-                    <a:bodyPr/>
-                    <a:lstStyle/>
-                    <a:p>
-                      <a:pPr marL="0" indent="0">
-                        <a:lnSpc>
-                          <a:spcPts val="1700"/>
-                        </a:lnSpc>
-                        <a:buNone/>
-                      </a:pPr>
-                      <a:r>
-                        <a:rPr lang="en-US" sz="1400" dirty="0">
-                          <a:solidFill>
-                            <a:srgbClr val="2F3A48"/>
-                          </a:solidFill>
-                          <a:latin typeface="Arial" pitchFamily="34" charset="0"/>
-                          <a:ea typeface="Arial" pitchFamily="34" charset="-122"/>
-                          <a:cs typeface="Arial" pitchFamily="34" charset="-120"/>
-                        </a:rPr>
-                        <a:t>Every lock is a lock_guard, which unlocks in its destructor, also when an exception is thrown</a:t>
-                      </a:r>
-                    </a:p>
-                  </a:txBody>
-                  <a:tcPr marL="71120" marR="71120" marT="71120" marB="71120">
-                    <a:lnL w="12700" cap="flat" cmpd="sng" algn="ctr">
-                      <a:solidFill>
-                        <a:srgbClr val="C7C7C5"/>
-                      </a:solidFill>
-                      <a:prstDash val="solid"/>
-                      <a:round/>
-                      <a:headEnd type="none" w="med" len="med"/>
-                      <a:tailEnd type="none" w="med" len="med"/>
-                    </a:lnL>
-                    <a:lnR w="12700" cap="flat" cmpd="sng" algn="ctr">
-                      <a:solidFill>
-                        <a:srgbClr val="C7C7C5"/>
-                      </a:solidFill>
-                      <a:prstDash val="solid"/>
-                      <a:round/>
-                      <a:headEnd type="none" w="med" len="med"/>
-                      <a:tailEnd type="none" w="med" len="med"/>
-                    </a:lnR>
-                    <a:lnT w="12700" cap="flat" cmpd="sng" algn="ctr">
-                      <a:solidFill>
-                        <a:srgbClr val="C7C7C5"/>
-                      </a:solidFill>
-                      <a:prstDash val="solid"/>
-                      <a:round/>
-                      <a:headEnd type="none" w="med" len="med"/>
-                      <a:tailEnd type="none" w="med" len="med"/>
-                    </a:lnT>
-                    <a:lnB w="12700" cap="flat" cmpd="sng" algn="ctr">
-                      <a:solidFill>
-                        <a:srgbClr val="C7C7C5"/>
-                      </a:solidFill>
-                      <a:prstDash val="solid"/>
-                      <a:round/>
-                      <a:headEnd type="none" w="med" len="med"/>
-                      <a:tailEnd type="none" w="med" len="med"/>
-                    </a:lnB>
-                  </a:tcPr>
-                </a:tc>
-              </a:tr>
-            </a:tbl>
-          </a:graphicData>
-        </a:graphic>
-      </p:graphicFrame>
-      <p:sp>
-        <p:nvSpPr>
-          <p:cNvPr id="4" name="Cycle panel"/>
-          <p:cNvSpPr/>
-          <p:nvPr/>
-        </p:nvSpPr>
-        <p:spPr>
-          <a:xfrm>
-            <a:off x="822960" y="4663440"/>
-            <a:ext cx="10556664" cy="1143000"/>
-          </a:xfrm>
-          <a:prstGeom prst="rect">
-            <a:avLst/>
-          </a:prstGeom>
-          <a:solidFill>
-            <a:srgbClr val="EEF2F8"/>
-          </a:solidFill>
-          <a:ln>
-            <a:noFill/>
-          </a:ln>
-        </p:spPr>
-        <p:txBody>
-          <a:bodyPr rtlCol="0" anchor="ctr"/>
-          <a:lstStyle/>
-          <a:p>
-            <a:endParaRPr lang="en-US"/>
-          </a:p>
-        </p:txBody>
-      </p:sp>
-      <p:sp>
-        <p:nvSpPr>
-          <p:cNvPr id="5" name="Why no cycle can form"/>
-          <p:cNvSpPr txBox="1"/>
-          <p:nvPr/>
-        </p:nvSpPr>
-        <p:spPr>
-          <a:xfrm>
-            <a:off x="1024128" y="4864608"/>
-            <a:ext cx="10154328" cy="822960"/>
-          </a:xfrm>
-          <a:prstGeom prst="rect">
-            <a:avLst/>
-          </a:prstGeom>
-          <a:noFill/>
-          <a:ln>
-            <a:noFill/>
-          </a:ln>
-        </p:spPr>
-        <p:txBody>
-          <a:bodyPr wrap="square" lIns="0" tIns="0" rIns="0" bIns="0" rtlCol="0" anchor="t">
-            <a:noAutofit/>
-          </a:bodyPr>
-          <a:lstStyle/>
-          <a:p>
-            <a:pPr marL="0" indent="0" algn="l">
-              <a:lnSpc>
-                <a:spcPct val="100000"/>
-              </a:lnSpc>
-              <a:spcBef>
-                <a:spcPts val="0"/>
-              </a:spcBef>
-              <a:spcAft>
-                <a:spcPts val="600"/>
-              </a:spcAft>
-              <a:buNone/>
-            </a:pPr>
-            <a:r>
-              <a:rPr lang="en-US" sz="1200" b="1" dirty="0">
-                <a:solidFill>
-                  <a:srgbClr val="5A6675"/>
-                </a:solidFill>
-                <a:latin typeface="Arial" pitchFamily="34" charset="0"/>
-                <a:ea typeface="Arial" pitchFamily="34" charset="-122"/>
-                <a:cs typeface="Arial" pitchFamily="34" charset="-120"/>
-              </a:rPr>
-              <a:t>Why no cycle can form</a:t>
-            </a:r>
-          </a:p>
-          <a:p>
-            <a:pPr marL="0" indent="0" algn="l">
-              <a:lnSpc>
-                <a:spcPct val="115000"/>
-              </a:lnSpc>
-              <a:spcBef>
-                <a:spcPts val="0"/>
-              </a:spcBef>
-              <a:spcAft>
-                <a:spcPts val="400"/>
-              </a:spcAft>
-              <a:buNone/>
-            </a:pPr>
-            <a:r>
-              <a:rPr lang="en-US" sz="1400" dirty="0">
-                <a:solidFill>
-                  <a:srgbClr val="1B2430"/>
-                </a:solidFill>
-                <a:latin typeface="Arial" pitchFamily="34" charset="0"/>
-                <a:ea typeface="Arial" pitchFamily="34" charset="-122"/>
-                <a:cs typeface="Arial" pitchFamily="34" charset="-120"/>
-              </a:rPr>
-              <a:t>A deadlock needs a circular wait. Every thread takes an instance before mtx, never the reverse, and no thread waits for another while it holds mtx, so no cycle can form.</a:t>
-            </a:r>
-          </a:p>
-        </p:txBody>
-      </p:sp>
-    </p:spTree>
-  </p:cSld>
-  <p:clrMapOvr>
-    <a:masterClrMapping/>
-  </p:clrMapOvr>
-</p:sld>
-</file>
-
-<file path=ppt/slides/slide5.xml><?xml version="1.0" encoding="utf-8"?>
-<p:sld xmlns:a="http://schemas.openxmlformats.org/drawingml/2006/main" xmlns:p="http://schemas.openxmlformats.org/presentationml/2006/main" xmlns:r="http://schemas.openxmlformats.org/officeDocument/2006/relationships">
-  <p:cSld>
-    <p:bg>
-      <p:bgPr>
-        <a:solidFill>
-          <a:srgbClr val="FAFAF7"/>
-        </a:solidFill>
-        <a:effectLst/>
-      </p:bgPr>
-    </p:bg>
-    <p:spTree>
-      <p:nvGrpSpPr>
-        <p:cNvPr id="1" name=""/>
-        <p:cNvGrpSpPr/>
-        <p:nvPr/>
-      </p:nvGrpSpPr>
-      <p:grpSpPr/>
-      <p:sp>
-        <p:nvSpPr>
-          <p:cNvPr id="2" name="Text 0"/>
-          <p:cNvSpPr>
-            <a:spLocks noGrp="1"/>
-          </p:cNvSpPr>
-          <p:nvPr>
-            <p:ph type="title"/>
-          </p:nvPr>
-        </p:nvSpPr>
-        <p:spPr>
-          <a:xfrm>
-            <a:off x="812800" y="812800"/>
-            <a:ext cx="10883392" cy="434340"/>
-          </a:xfrm>
-          <a:prstGeom prst="rect">
-            <a:avLst/>
-          </a:prstGeom>
-          <a:noFill/>
-          <a:ln/>
-        </p:spPr>
-        <p:txBody>
-          <a:bodyPr wrap="square" lIns="0" tIns="0" rIns="0" bIns="0" rtlCol="0" anchor="t">
-            <a:normAutofit/>
-          </a:bodyPr>
-          <a:lstStyle/>
-          <a:p>
-            <a:pPr marL="0" indent="0" algn="l">
-              <a:lnSpc>
-                <a:spcPts val="3220"/>
-              </a:lnSpc>
-              <a:buNone/>
-            </a:pPr>
-            <a:r>
-              <a:rPr lang="en-US" sz="2800" b="1" dirty="0">
-                <a:solidFill>
-                  <a:srgbClr val="1B2430"/>
-                </a:solidFill>
-                <a:latin typeface="Arial" pitchFamily="34" charset="0"/>
-                <a:ea typeface="Arial" pitchFamily="34" charset="-122"/>
-                <a:cs typeface="Arial" pitchFamily="34" charset="-120"/>
-              </a:rPr>
-              <a:t>Possible starvation: every wait is bounded</a:t>
-            </a:r>
-            <a:endParaRPr lang="en-US" sz="2800" dirty="0">
-              <a:solidFill>
-                <a:srgbClr val="1B2430"/>
-              </a:solidFill>
-              <a:latin typeface="Arial" pitchFamily="34" charset="0"/>
-              <a:ea typeface="Arial" pitchFamily="34" charset="-122"/>
-              <a:cs typeface="Arial" pitchFamily="34" charset="-120"/>
-            </a:endParaRPr>
-          </a:p>
-        </p:txBody>
-      </p:sp>
-      <p:graphicFrame>
-        <p:nvGraphicFramePr>
-          <p:cNvPr id="3" name="Table 0"/>
-          <p:cNvGraphicFramePr>
-            <a:graphicFrameLocks noGrp="1"/>
-          </p:cNvGraphicFramePr>
-          <p:nvPr/>
-        </p:nvGraphicFramePr>
-        <p:xfrm>
-          <a:off x="822960" y="1536192"/>
-          <a:ext cx="10556664" cy="2852928"/>
+          <a:ext cx="10556664" cy="2029968"/>
         </p:xfrm>
         <a:graphic>
           <a:graphicData uri="http://schemas.openxmlformats.org/drawingml/2006/table">
@@ -8852,197 +7808,6 @@
                           <a:ea typeface="Arial" pitchFamily="34" charset="-122"/>
                           <a:cs typeface="Arial" pitchFamily="34" charset="-120"/>
                         </a:rPr>
-                        <a:t>A run that never ends</a:t>
-                      </a:r>
-                    </a:p>
-                  </a:txBody>
-                  <a:tcPr marL="71120" marR="71120" marT="71120" marB="71120">
-                    <a:lnL w="12700" cap="flat" cmpd="sng" algn="ctr">
-                      <a:solidFill>
-                        <a:srgbClr val="C7C7C5"/>
-                      </a:solidFill>
-                      <a:prstDash val="solid"/>
-                      <a:round/>
-                      <a:headEnd type="none" w="med" len="med"/>
-                      <a:tailEnd type="none" w="med" len="med"/>
-                    </a:lnL>
-                    <a:lnR w="12700" cap="flat" cmpd="sng" algn="ctr">
-                      <a:solidFill>
-                        <a:srgbClr val="C7C7C5"/>
-                      </a:solidFill>
-                      <a:prstDash val="solid"/>
-                      <a:round/>
-                      <a:headEnd type="none" w="med" len="med"/>
-                      <a:tailEnd type="none" w="med" len="med"/>
-                    </a:lnR>
-                    <a:lnT w="12700" cap="flat" cmpd="sng" algn="ctr">
-                      <a:solidFill>
-                        <a:srgbClr val="C7C7C5"/>
-                      </a:solidFill>
-                      <a:prstDash val="solid"/>
-                      <a:round/>
-                      <a:headEnd type="none" w="med" len="med"/>
-                      <a:tailEnd type="none" w="med" len="med"/>
-                    </a:lnT>
-                    <a:lnB w="12700" cap="flat" cmpd="sng" algn="ctr">
-                      <a:solidFill>
-                        <a:srgbClr val="C7C7C5"/>
-                      </a:solidFill>
-                      <a:prstDash val="solid"/>
-                      <a:round/>
-                      <a:headEnd type="none" w="med" len="med"/>
-                      <a:tailEnd type="none" w="med" len="med"/>
-                    </a:lnB>
-                  </a:tcPr>
-                </a:tc>
-                <a:tc>
-                  <a:txBody>
-                    <a:bodyPr/>
-                    <a:lstStyle/>
-                    <a:p>
-                      <a:pPr marL="0" indent="0">
-                        <a:lnSpc>
-                          <a:spcPts val="1700"/>
-                        </a:lnSpc>
-                        <a:buNone/>
-                      </a:pPr>
-                      <a:r>
-                        <a:rPr lang="en-US" sz="1400" dirty="0">
-                          <a:solidFill>
-                            <a:srgbClr val="2F3A48"/>
-                          </a:solidFill>
-                          <a:latin typeface="Arial" pitchFamily="34" charset="0"/>
-                          <a:ea typeface="Arial" pitchFamily="34" charset="-122"/>
-                          <a:cs typeface="Arial" pitchFamily="34" charset="-120"/>
-                        </a:rPr>
-                        <a:t>Waiting parties need runs to end; a run with no time limit, or one that kept its instance after an error, could block them forever</a:t>
-                      </a:r>
-                    </a:p>
-                  </a:txBody>
-                  <a:tcPr marL="71120" marR="71120" marT="71120" marB="71120">
-                    <a:lnL w="12700" cap="flat" cmpd="sng" algn="ctr">
-                      <a:solidFill>
-                        <a:srgbClr val="C7C7C5"/>
-                      </a:solidFill>
-                      <a:prstDash val="solid"/>
-                      <a:round/>
-                      <a:headEnd type="none" w="med" len="med"/>
-                      <a:tailEnd type="none" w="med" len="med"/>
-                    </a:lnL>
-                    <a:lnR w="12700" cap="flat" cmpd="sng" algn="ctr">
-                      <a:solidFill>
-                        <a:srgbClr val="C7C7C5"/>
-                      </a:solidFill>
-                      <a:prstDash val="solid"/>
-                      <a:round/>
-                      <a:headEnd type="none" w="med" len="med"/>
-                      <a:tailEnd type="none" w="med" len="med"/>
-                    </a:lnR>
-                    <a:lnT w="12700" cap="flat" cmpd="sng" algn="ctr">
-                      <a:solidFill>
-                        <a:srgbClr val="C7C7C5"/>
-                      </a:solidFill>
-                      <a:prstDash val="solid"/>
-                      <a:round/>
-                      <a:headEnd type="none" w="med" len="med"/>
-                      <a:tailEnd type="none" w="med" len="med"/>
-                    </a:lnT>
-                    <a:lnB w="12700" cap="flat" cmpd="sng" algn="ctr">
-                      <a:solidFill>
-                        <a:srgbClr val="C7C7C5"/>
-                      </a:solidFill>
-                      <a:prstDash val="solid"/>
-                      <a:round/>
-                      <a:headEnd type="none" w="med" len="med"/>
-                      <a:tailEnd type="none" w="med" len="med"/>
-                    </a:lnB>
-                  </a:tcPr>
-                </a:tc>
-                <a:tc>
-                  <a:txBody>
-                    <a:bodyPr/>
-                    <a:lstStyle/>
-                    <a:p>
-                      <a:pPr marL="0" indent="0">
-                        <a:lnSpc>
-                          <a:spcPts val="1700"/>
-                        </a:lnSpc>
-                        <a:buNone/>
-                      </a:pPr>
-                      <a:r>
-                        <a:rPr lang="en-US" sz="1400" dirty="0">
-                          <a:solidFill>
-                            <a:srgbClr val="2F3A48"/>
-                          </a:solidFill>
-                          <a:latin typeface="Arial" pitchFamily="34" charset="0"/>
-                          <a:ea typeface="Arial" pitchFamily="34" charset="-122"/>
-                          <a:cs typeface="Arial" pitchFamily="34" charset="-120"/>
-                        </a:rPr>
-                        <a:t>Clear times are capped at t2 ≤ 15 s when the config is read, and every run frees its instance, even after an error</a:t>
-                      </a:r>
-                    </a:p>
-                  </a:txBody>
-                  <a:tcPr marL="71120" marR="71120" marT="71120" marB="71120">
-                    <a:lnL w="12700" cap="flat" cmpd="sng" algn="ctr">
-                      <a:solidFill>
-                        <a:srgbClr val="C7C7C5"/>
-                      </a:solidFill>
-                      <a:prstDash val="solid"/>
-                      <a:round/>
-                      <a:headEnd type="none" w="med" len="med"/>
-                      <a:tailEnd type="none" w="med" len="med"/>
-                    </a:lnL>
-                    <a:lnR w="12700" cap="flat" cmpd="sng" algn="ctr">
-                      <a:solidFill>
-                        <a:srgbClr val="C7C7C5"/>
-                      </a:solidFill>
-                      <a:prstDash val="solid"/>
-                      <a:round/>
-                      <a:headEnd type="none" w="med" len="med"/>
-                      <a:tailEnd type="none" w="med" len="med"/>
-                    </a:lnR>
-                    <a:lnT w="12700" cap="flat" cmpd="sng" algn="ctr">
-                      <a:solidFill>
-                        <a:srgbClr val="C7C7C5"/>
-                      </a:solidFill>
-                      <a:prstDash val="solid"/>
-                      <a:round/>
-                      <a:headEnd type="none" w="med" len="med"/>
-                      <a:tailEnd type="none" w="med" len="med"/>
-                    </a:lnT>
-                    <a:lnB w="12700" cap="flat" cmpd="sng" algn="ctr">
-                      <a:solidFill>
-                        <a:srgbClr val="C7C7C5"/>
-                      </a:solidFill>
-                      <a:prstDash val="solid"/>
-                      <a:round/>
-                      <a:headEnd type="none" w="med" len="med"/>
-                      <a:tailEnd type="none" w="med" len="med"/>
-                    </a:lnB>
-                  </a:tcPr>
-                </a:tc>
-              </a:tr>
-              <a:tr h="822960">
-                <a:tc>
-                  <a:txBody>
-                    <a:bodyPr/>
-                    <a:lstStyle/>
-                    <a:p>
-                      <a:pPr marL="0" indent="0">
-                        <a:lnSpc>
-                          <a:spcPts val="1700"/>
-                        </a:lnSpc>
-                        <a:buNone/>
-                      </a:pPr>
-                      <a:r>
-                        <a:rPr lang="en-US" sz="1400" dirty="0">
-                          <a:solidFill>
-                            <a:srgbClr val="2F3A48"/>
-                          </a:solidFill>
-                          <a:latin typeface="Arial" pitchFamily="34" charset="0"/>
-                          <a:ea typeface="Arial" pitchFamily="34" charset="-122"/>
-                          <a:cs typeface="Arial" pitchFamily="34" charset="-120"/>
-                        </a:rPr>
                         <a:t>Players with no party</a:t>
                       </a:r>
                     </a:p>
@@ -9225,7 +7990,7 @@
         </p:nvSpPr>
         <p:spPr>
           <a:xfrm>
-            <a:off x="822960" y="4663440"/>
+            <a:off x="822960" y="3840480"/>
             <a:ext cx="10556664" cy="1143000"/>
           </a:xfrm>
           <a:prstGeom prst="rect">
@@ -9254,7 +8019,7 @@
         </p:nvSpPr>
         <p:spPr>
           <a:xfrm>
-            <a:off x="1024128" y="4864608"/>
+            <a:off x="1024128" y="4041648"/>
             <a:ext cx="10154328" cy="822960"/>
           </a:xfrm>
           <a:prstGeom prst="rect">
@@ -9318,6 +8083,607 @@
                 <a:cs typeface="Arial" pitchFamily="34" charset="-120"/>
               </a:rPr>
               <a:t>Every n parties ahead of a party add at most t2 seconds to its wait. With n = 3 and t2 = 5 s, party 7 always enters within about 10 s, whatever clear times are drawn.</a:t>
+            </a:r>
+          </a:p>
+        </p:txBody>
+      </p:sp>
+    </p:spTree>
+  </p:cSld>
+  <p:clrMapOvr>
+    <a:masterClrMapping/>
+  </p:clrMapOvr>
+</p:sld>
+</file>
+
+<file path=ppt/slides/slide5.xml><?xml version="1.0" encoding="utf-8"?>
+<p:sld xmlns:a="http://schemas.openxmlformats.org/drawingml/2006/main" xmlns:p="http://schemas.openxmlformats.org/presentationml/2006/main" xmlns:r="http://schemas.openxmlformats.org/officeDocument/2006/relationships">
+  <p:cSld>
+    <p:bg>
+      <p:bgPr>
+        <a:solidFill>
+          <a:srgbClr val="FAFAF7"/>
+        </a:solidFill>
+        <a:effectLst/>
+      </p:bgPr>
+    </p:bg>
+    <p:spTree>
+      <p:nvGrpSpPr>
+        <p:cNvPr id="1" name=""/>
+        <p:cNvGrpSpPr/>
+        <p:nvPr/>
+      </p:nvGrpSpPr>
+      <p:grpSpPr/>
+      <p:sp>
+        <p:nvSpPr>
+          <p:cNvPr id="2" name="Text 0"/>
+          <p:cNvSpPr>
+            <a:spLocks noGrp="1"/>
+          </p:cNvSpPr>
+          <p:nvPr>
+            <p:ph type="title"/>
+          </p:nvPr>
+        </p:nvSpPr>
+        <p:spPr>
+          <a:xfrm>
+            <a:off x="812800" y="812800"/>
+            <a:ext cx="10883392" cy="434340"/>
+          </a:xfrm>
+          <a:prstGeom prst="rect">
+            <a:avLst/>
+          </a:prstGeom>
+          <a:noFill/>
+          <a:ln/>
+        </p:spPr>
+        <p:txBody>
+          <a:bodyPr wrap="square" lIns="0" tIns="0" rIns="0" bIns="0" rtlCol="0" anchor="t">
+            <a:normAutofit/>
+          </a:bodyPr>
+          <a:lstStyle/>
+          <a:p>
+            <a:pPr marL="0" indent="0" algn="l">
+              <a:lnSpc>
+                <a:spcPts val="3220"/>
+              </a:lnSpc>
+              <a:buNone/>
+            </a:pPr>
+            <a:r>
+              <a:rPr lang="en-US" sz="2800" b="1" dirty="0">
+                <a:solidFill>
+                  <a:srgbClr val="1B2430"/>
+                </a:solidFill>
+                <a:latin typeface="Arial" pitchFamily="34" charset="0"/>
+                <a:ea typeface="Arial" pitchFamily="34" charset="-122"/>
+                <a:cs typeface="Arial" pitchFamily="34" charset="-120"/>
+              </a:rPr>
+              <a:t>Synchronization mechanisms used</a:t>
+            </a:r>
+            <a:endParaRPr lang="en-US" sz="2800" dirty="0">
+              <a:solidFill>
+                <a:srgbClr val="1B2430"/>
+              </a:solidFill>
+              <a:latin typeface="Arial" pitchFamily="34" charset="0"/>
+              <a:ea typeface="Arial" pitchFamily="34" charset="-122"/>
+              <a:cs typeface="Arial" pitchFamily="34" charset="-120"/>
+            </a:endParaRPr>
+          </a:p>
+        </p:txBody>
+      </p:sp>
+      <p:sp>
+        <p:nvSpPr>
+          <p:cNvPr id="3" name="Mechanism panel 1"/>
+          <p:cNvSpPr/>
+          <p:nvPr/>
+        </p:nvSpPr>
+        <p:spPr>
+          <a:xfrm>
+            <a:off x="822960" y="1536192"/>
+            <a:ext cx="5141172" cy="2103120"/>
+          </a:xfrm>
+          <a:prstGeom prst="rect">
+            <a:avLst/>
+          </a:prstGeom>
+          <a:solidFill>
+            <a:srgbClr val="EEF2F8"/>
+          </a:solidFill>
+          <a:ln>
+            <a:noFill/>
+          </a:ln>
+        </p:spPr>
+        <p:txBody>
+          <a:bodyPr rtlCol="0" anchor="ctr"/>
+          <a:lstStyle/>
+          <a:p>
+            <a:endParaRPr lang="en-US"/>
+          </a:p>
+        </p:txBody>
+      </p:sp>
+      <p:sp>
+        <p:nvSpPr>
+          <p:cNvPr id="4" name="Mechanism 1"/>
+          <p:cNvSpPr txBox="1"/>
+          <p:nvPr/>
+        </p:nvSpPr>
+        <p:spPr>
+          <a:xfrm>
+            <a:off x="1051560" y="1764792"/>
+            <a:ext cx="4683972" cy="1645920"/>
+          </a:xfrm>
+          <a:prstGeom prst="rect">
+            <a:avLst/>
+          </a:prstGeom>
+          <a:noFill/>
+          <a:ln>
+            <a:noFill/>
+          </a:ln>
+        </p:spPr>
+        <p:txBody>
+          <a:bodyPr wrap="square" lIns="0" tIns="0" rIns="0" bIns="0" rtlCol="0" anchor="t">
+            <a:noAutofit/>
+          </a:bodyPr>
+          <a:lstStyle/>
+          <a:p>
+            <a:pPr marL="0" indent="0" algn="l">
+              <a:lnSpc>
+                <a:spcPct val="100000"/>
+              </a:lnSpc>
+              <a:spcBef>
+                <a:spcPts val="0"/>
+              </a:spcBef>
+              <a:spcAft>
+                <a:spcPts val="600"/>
+              </a:spcAft>
+              <a:buNone/>
+            </a:pPr>
+            <a:r>
+              <a:rPr lang="en-US" sz="1200" b="1" dirty="0">
+                <a:solidFill>
+                  <a:srgbClr val="5A6675"/>
+                </a:solidFill>
+                <a:latin typeface="Arial" pitchFamily="34" charset="0"/>
+                <a:ea typeface="Arial" pitchFamily="34" charset="-122"/>
+                <a:cs typeface="Arial" pitchFamily="34" charset="-120"/>
+              </a:rPr>
+              <a:t>Caps active instances at n</a:t>
+            </a:r>
+          </a:p>
+          <a:p>
+            <a:pPr marL="0" indent="0" algn="l">
+              <a:lnSpc>
+                <a:spcPct val="100000"/>
+              </a:lnSpc>
+              <a:spcBef>
+                <a:spcPts val="0"/>
+              </a:spcBef>
+              <a:spcAft>
+                <a:spcPts val="600"/>
+              </a:spcAft>
+              <a:buNone/>
+            </a:pPr>
+            <a:r>
+              <a:rPr lang="en-US" sz="2200" b="1" dirty="0">
+                <a:solidFill>
+                  <a:srgbClr val="156082"/>
+                </a:solidFill>
+                <a:latin typeface="Consolas" pitchFamily="49" charset="0"/>
+                <a:ea typeface="Consolas" pitchFamily="49" charset="-122"/>
+                <a:cs typeface="Consolas" pitchFamily="49" charset="-120"/>
+              </a:rPr>
+              <a:t>counting_semaphore</a:t>
+            </a:r>
+          </a:p>
+          <a:p>
+            <a:pPr marL="0" indent="0" algn="l">
+              <a:lnSpc>
+                <a:spcPct val="115000"/>
+              </a:lnSpc>
+              <a:spcBef>
+                <a:spcPts val="0"/>
+              </a:spcBef>
+              <a:spcAft>
+                <a:spcPts val="400"/>
+              </a:spcAft>
+              <a:buNone/>
+            </a:pPr>
+            <a:r>
+              <a:rPr lang="en-US" sz="1400" dirty="0">
+                <a:solidFill>
+                  <a:srgbClr val="1B2430"/>
+                </a:solidFill>
+                <a:latin typeface="Arial" pitchFamily="34" charset="0"/>
+                <a:ea typeface="Arial" pitchFamily="34" charset="-122"/>
+                <a:cs typeface="Arial" pitchFamily="34" charset="-120"/>
+              </a:rPr>
+              <a:t>freeInstances starts with n permits. A party takes one before it enters; its thread gives it back when the dungeon is cleared.</a:t>
+            </a:r>
+          </a:p>
+        </p:txBody>
+      </p:sp>
+      <p:sp>
+        <p:nvSpPr>
+          <p:cNvPr id="5" name="Mechanism panel 2"/>
+          <p:cNvSpPr/>
+          <p:nvPr/>
+        </p:nvSpPr>
+        <p:spPr>
+          <a:xfrm>
+            <a:off x="6238452" y="1536192"/>
+            <a:ext cx="5141172" cy="2103120"/>
+          </a:xfrm>
+          <a:prstGeom prst="rect">
+            <a:avLst/>
+          </a:prstGeom>
+          <a:solidFill>
+            <a:srgbClr val="EEF2F8"/>
+          </a:solidFill>
+          <a:ln>
+            <a:noFill/>
+          </a:ln>
+        </p:spPr>
+        <p:txBody>
+          <a:bodyPr rtlCol="0" anchor="ctr"/>
+          <a:lstStyle/>
+          <a:p>
+            <a:endParaRPr lang="en-US"/>
+          </a:p>
+        </p:txBody>
+      </p:sp>
+      <p:sp>
+        <p:nvSpPr>
+          <p:cNvPr id="6" name="Mechanism 2"/>
+          <p:cNvSpPr txBox="1"/>
+          <p:nvPr/>
+        </p:nvSpPr>
+        <p:spPr>
+          <a:xfrm>
+            <a:off x="6467052" y="1764792"/>
+            <a:ext cx="4683972" cy="1645920"/>
+          </a:xfrm>
+          <a:prstGeom prst="rect">
+            <a:avLst/>
+          </a:prstGeom>
+          <a:noFill/>
+          <a:ln>
+            <a:noFill/>
+          </a:ln>
+        </p:spPr>
+        <p:txBody>
+          <a:bodyPr wrap="square" lIns="0" tIns="0" rIns="0" bIns="0" rtlCol="0" anchor="t">
+            <a:noAutofit/>
+          </a:bodyPr>
+          <a:lstStyle/>
+          <a:p>
+            <a:pPr marL="0" indent="0" algn="l">
+              <a:lnSpc>
+                <a:spcPct val="100000"/>
+              </a:lnSpc>
+              <a:spcBef>
+                <a:spcPts val="0"/>
+              </a:spcBef>
+              <a:spcAft>
+                <a:spcPts val="600"/>
+              </a:spcAft>
+              <a:buNone/>
+            </a:pPr>
+            <a:r>
+              <a:rPr lang="en-US" sz="1200" b="1" dirty="0">
+                <a:solidFill>
+                  <a:srgbClr val="5A6675"/>
+                </a:solidFill>
+                <a:latin typeface="Arial" pitchFamily="34" charset="0"/>
+                <a:ea typeface="Arial" pitchFamily="34" charset="-122"/>
+                <a:cs typeface="Arial" pitchFamily="34" charset="-120"/>
+              </a:rPr>
+              <a:t>Guards shared state and printing</a:t>
+            </a:r>
+          </a:p>
+          <a:p>
+            <a:pPr marL="0" indent="0" algn="l">
+              <a:lnSpc>
+                <a:spcPct val="100000"/>
+              </a:lnSpc>
+              <a:spcBef>
+                <a:spcPts val="0"/>
+              </a:spcBef>
+              <a:spcAft>
+                <a:spcPts val="600"/>
+              </a:spcAft>
+              <a:buNone/>
+            </a:pPr>
+            <a:r>
+              <a:rPr lang="en-US" sz="2200" b="1" dirty="0">
+                <a:solidFill>
+                  <a:srgbClr val="156082"/>
+                </a:solidFill>
+                <a:latin typeface="Consolas" pitchFamily="49" charset="0"/>
+                <a:ea typeface="Consolas" pitchFamily="49" charset="-122"/>
+                <a:cs typeface="Consolas" pitchFamily="49" charset="-120"/>
+              </a:rPr>
+              <a:t>mutex + lock_guard</a:t>
+            </a:r>
+          </a:p>
+          <a:p>
+            <a:pPr marL="0" indent="0" algn="l">
+              <a:lnSpc>
+                <a:spcPct val="115000"/>
+              </a:lnSpc>
+              <a:spcBef>
+                <a:spcPts val="0"/>
+              </a:spcBef>
+              <a:spcAft>
+                <a:spcPts val="400"/>
+              </a:spcAft>
+              <a:buNone/>
+            </a:pPr>
+            <a:r>
+              <a:rPr lang="en-US" sz="1400" dirty="0">
+                <a:solidFill>
+                  <a:srgbClr val="1B2430"/>
+                </a:solidFill>
+                <a:latin typeface="Arial" pitchFamily="34" charset="0"/>
+                <a:ea typeface="Arial" pitchFamily="34" charset="-122"/>
+                <a:cs typeface="Arial" pitchFamily="34" charset="-120"/>
+              </a:rPr>
+              <a:t>mtx protects each instance's status, the served counts and times, the saved error and the output. lock_guard unlocks it automatically at the end of each block.</a:t>
+            </a:r>
+          </a:p>
+        </p:txBody>
+      </p:sp>
+      <p:sp>
+        <p:nvSpPr>
+          <p:cNvPr id="7" name="Mechanism panel 3"/>
+          <p:cNvSpPr/>
+          <p:nvPr/>
+        </p:nvSpPr>
+        <p:spPr>
+          <a:xfrm>
+            <a:off x="822960" y="3913632"/>
+            <a:ext cx="5141172" cy="2103120"/>
+          </a:xfrm>
+          <a:prstGeom prst="rect">
+            <a:avLst/>
+          </a:prstGeom>
+          <a:solidFill>
+            <a:srgbClr val="EEF2F8"/>
+          </a:solidFill>
+          <a:ln>
+            <a:noFill/>
+          </a:ln>
+        </p:spPr>
+        <p:txBody>
+          <a:bodyPr rtlCol="0" anchor="ctr"/>
+          <a:lstStyle/>
+          <a:p>
+            <a:endParaRPr lang="en-US"/>
+          </a:p>
+        </p:txBody>
+      </p:sp>
+      <p:sp>
+        <p:nvSpPr>
+          <p:cNvPr id="8" name="Mechanism 3"/>
+          <p:cNvSpPr txBox="1"/>
+          <p:nvPr/>
+        </p:nvSpPr>
+        <p:spPr>
+          <a:xfrm>
+            <a:off x="1051560" y="4142232"/>
+            <a:ext cx="4683972" cy="1645920"/>
+          </a:xfrm>
+          <a:prstGeom prst="rect">
+            <a:avLst/>
+          </a:prstGeom>
+          <a:noFill/>
+          <a:ln>
+            <a:noFill/>
+          </a:ln>
+        </p:spPr>
+        <p:txBody>
+          <a:bodyPr wrap="square" lIns="0" tIns="0" rIns="0" bIns="0" rtlCol="0" anchor="t">
+            <a:noAutofit/>
+          </a:bodyPr>
+          <a:lstStyle/>
+          <a:p>
+            <a:pPr marL="0" indent="0" algn="l">
+              <a:lnSpc>
+                <a:spcPct val="100000"/>
+              </a:lnSpc>
+              <a:spcBef>
+                <a:spcPts val="0"/>
+              </a:spcBef>
+              <a:spcAft>
+                <a:spcPts val="600"/>
+              </a:spcAft>
+              <a:buNone/>
+            </a:pPr>
+            <a:r>
+              <a:rPr lang="en-US" sz="1200" b="1" dirty="0">
+                <a:solidFill>
+                  <a:srgbClr val="5A6675"/>
+                </a:solidFill>
+                <a:latin typeface="Arial" pitchFamily="34" charset="0"/>
+                <a:ea typeface="Arial" pitchFamily="34" charset="-122"/>
+                <a:cs typeface="Arial" pitchFamily="34" charset="-120"/>
+              </a:rPr>
+              <a:t>One thread per dungeon run</a:t>
+            </a:r>
+          </a:p>
+          <a:p>
+            <a:pPr marL="0" indent="0" algn="l">
+              <a:lnSpc>
+                <a:spcPct val="100000"/>
+              </a:lnSpc>
+              <a:spcBef>
+                <a:spcPts val="0"/>
+              </a:spcBef>
+              <a:spcAft>
+                <a:spcPts val="600"/>
+              </a:spcAft>
+              <a:buNone/>
+            </a:pPr>
+            <a:r>
+              <a:rPr lang="en-US" sz="2200" b="1" dirty="0">
+                <a:solidFill>
+                  <a:srgbClr val="156082"/>
+                </a:solidFill>
+                <a:latin typeface="Consolas" pitchFamily="49" charset="0"/>
+                <a:ea typeface="Consolas" pitchFamily="49" charset="-122"/>
+                <a:cs typeface="Consolas" pitchFamily="49" charset="-120"/>
+              </a:rPr>
+              <a:t>thread + join</a:t>
+            </a:r>
+          </a:p>
+          <a:p>
+            <a:pPr marL="0" indent="0" algn="l">
+              <a:lnSpc>
+                <a:spcPct val="115000"/>
+              </a:lnSpc>
+              <a:spcBef>
+                <a:spcPts val="0"/>
+              </a:spcBef>
+              <a:spcAft>
+                <a:spcPts val="400"/>
+              </a:spcAft>
+              <a:buNone/>
+            </a:pPr>
+            <a:r>
+              <a:rPr lang="en-US" sz="1400" dirty="0">
+                <a:solidFill>
+                  <a:srgbClr val="1B2430"/>
+                </a:solidFill>
+                <a:latin typeface="Arial" pitchFamily="34" charset="0"/>
+                <a:ea typeface="Arial" pitchFamily="34" charset="-122"/>
+                <a:cs typeface="Arial" pitchFamily="34" charset="-120"/>
+              </a:rPr>
+              <a:t>Each party in a dungeon is a thread that sleeps for its clear time. Main joins an instance's old thread before reusing it, and joins all of them before the summary.</a:t>
+            </a:r>
+          </a:p>
+        </p:txBody>
+      </p:sp>
+      <p:sp>
+        <p:nvSpPr>
+          <p:cNvPr id="9" name="Mechanism panel 4"/>
+          <p:cNvSpPr/>
+          <p:nvPr/>
+        </p:nvSpPr>
+        <p:spPr>
+          <a:xfrm>
+            <a:off x="6238452" y="3913632"/>
+            <a:ext cx="5141172" cy="2103120"/>
+          </a:xfrm>
+          <a:prstGeom prst="rect">
+            <a:avLst/>
+          </a:prstGeom>
+          <a:solidFill>
+            <a:srgbClr val="EEF2F8"/>
+          </a:solidFill>
+          <a:ln>
+            <a:noFill/>
+          </a:ln>
+        </p:spPr>
+        <p:txBody>
+          <a:bodyPr rtlCol="0" anchor="ctr"/>
+          <a:lstStyle/>
+          <a:p>
+            <a:endParaRPr lang="en-US"/>
+          </a:p>
+        </p:txBody>
+      </p:sp>
+      <p:sp>
+        <p:nvSpPr>
+          <p:cNvPr id="10" name="Mechanism 4"/>
+          <p:cNvSpPr txBox="1"/>
+          <p:nvPr/>
+        </p:nvSpPr>
+        <p:spPr>
+          <a:xfrm>
+            <a:off x="6467052" y="4142232"/>
+            <a:ext cx="4683972" cy="1645920"/>
+          </a:xfrm>
+          <a:prstGeom prst="rect">
+            <a:avLst/>
+          </a:prstGeom>
+          <a:noFill/>
+          <a:ln>
+            <a:noFill/>
+          </a:ln>
+        </p:spPr>
+        <p:txBody>
+          <a:bodyPr wrap="square" lIns="0" tIns="0" rIns="0" bIns="0" rtlCol="0" anchor="t">
+            <a:noAutofit/>
+          </a:bodyPr>
+          <a:lstStyle/>
+          <a:p>
+            <a:pPr marL="0" indent="0" algn="l">
+              <a:lnSpc>
+                <a:spcPct val="100000"/>
+              </a:lnSpc>
+              <a:spcBef>
+                <a:spcPts val="0"/>
+              </a:spcBef>
+              <a:spcAft>
+                <a:spcPts val="600"/>
+              </a:spcAft>
+              <a:buNone/>
+            </a:pPr>
+            <a:r>
+              <a:rPr lang="en-US" sz="1200" b="1" dirty="0">
+                <a:solidFill>
+                  <a:srgbClr val="5A6675"/>
+                </a:solidFill>
+                <a:latin typeface="Arial" pitchFamily="34" charset="0"/>
+                <a:ea typeface="Arial" pitchFamily="34" charset="-122"/>
+                <a:cs typeface="Arial" pitchFamily="34" charset="-120"/>
+              </a:rPr>
+              <a:t>Rules against deadlock and starvation</a:t>
+            </a:r>
+          </a:p>
+          <a:p>
+            <a:pPr marL="0" indent="0" algn="l">
+              <a:lnSpc>
+                <a:spcPct val="100000"/>
+              </a:lnSpc>
+              <a:spcBef>
+                <a:spcPts val="0"/>
+              </a:spcBef>
+              <a:spcAft>
+                <a:spcPts val="600"/>
+              </a:spcAft>
+              <a:buNone/>
+            </a:pPr>
+            <a:r>
+              <a:rPr lang="en-US" sz="2200" b="1" dirty="0">
+                <a:solidFill>
+                  <a:srgbClr val="156082"/>
+                </a:solidFill>
+                <a:latin typeface="Consolas" pitchFamily="49" charset="0"/>
+                <a:ea typeface="Consolas" pitchFamily="49" charset="-122"/>
+                <a:cs typeface="Consolas" pitchFamily="49" charset="-120"/>
+              </a:rPr>
+              <a:t>acquire() → lock_guard</a:t>
+            </a:r>
+          </a:p>
+          <a:p>
+            <a:pPr marL="0" indent="0" algn="l">
+              <a:lnSpc>
+                <a:spcPct val="115000"/>
+              </a:lnSpc>
+              <a:spcBef>
+                <a:spcPts val="0"/>
+              </a:spcBef>
+              <a:spcAft>
+                <a:spcPts val="400"/>
+              </a:spcAft>
+              <a:buNone/>
+            </a:pPr>
+            <a:r>
+              <a:rPr lang="en-US" sz="1400" dirty="0">
+                <a:solidFill>
+                  <a:srgbClr val="1B2430"/>
+                </a:solidFill>
+                <a:latin typeface="Arial" pitchFamily="34" charset="0"/>
+                <a:ea typeface="Arial" pitchFamily="34" charset="-122"/>
+                <a:cs typeface="Arial" pitchFamily="34" charset="-120"/>
+              </a:rPr>
+              <a:t>Wait for an instance before locking. Never sleep or join while holding mtx. One thread sends the parties, in queue order.</a:t>
             </a:r>
           </a:p>
         </p:txBody>
@@ -9390,7 +8756,7 @@
                 <a:ea typeface="Arial" pitchFamily="34" charset="-122"/>
                 <a:cs typeface="Arial" pitchFamily="34" charset="-120"/>
               </a:rPr>
-              <a:t>Synchronization mechanisms used</a:t>
+              <a:t>Counting semaphore: implementation</a:t>
             </a:r>
             <a:endParaRPr lang="en-US" sz="2800" dirty="0">
               <a:solidFill>
@@ -9405,43 +8771,14 @@
       </p:sp>
       <p:sp>
         <p:nvSpPr>
-          <p:cNvPr id="3" name="Mechanism panel 1"/>
-          <p:cNvSpPr/>
+          <p:cNvPr id="3" name="Text 1"/>
+          <p:cNvSpPr txBox="1"/>
           <p:nvPr/>
         </p:nvSpPr>
         <p:spPr>
           <a:xfrm>
-            <a:off x="822960" y="1536192"/>
-            <a:ext cx="5141172" cy="2103120"/>
-          </a:xfrm>
-          <a:prstGeom prst="rect">
-            <a:avLst/>
-          </a:prstGeom>
-          <a:solidFill>
-            <a:srgbClr val="EEF2F8"/>
-          </a:solidFill>
-          <a:ln>
-            <a:noFill/>
-          </a:ln>
-        </p:spPr>
-        <p:txBody>
-          <a:bodyPr rtlCol="0" anchor="ctr"/>
-          <a:lstStyle/>
-          <a:p>
-            <a:endParaRPr lang="en-US"/>
-          </a:p>
-        </p:txBody>
-      </p:sp>
-      <p:sp>
-        <p:nvSpPr>
-          <p:cNvPr id="4" name="Mechanism 1"/>
-          <p:cNvSpPr txBox="1"/>
-          <p:nvPr/>
-        </p:nvSpPr>
-        <p:spPr>
-          <a:xfrm>
-            <a:off x="1051560" y="1764792"/>
-            <a:ext cx="4683972" cy="1645920"/>
+            <a:off x="875284" y="1526539"/>
+            <a:ext cx="4343400" cy="4754880"/>
           </a:xfrm>
           <a:prstGeom prst="rect">
             <a:avLst/>
@@ -9453,13 +8790,13 @@
         </p:spPr>
         <p:txBody>
           <a:bodyPr wrap="square" lIns="0" tIns="0" rIns="0" bIns="0" rtlCol="0" anchor="t">
-            <a:noAutofit/>
+            <a:normAutofit/>
           </a:bodyPr>
           <a:lstStyle/>
           <a:p>
-            <a:pPr marL="0" indent="0" algn="l">
+            <a:pPr marL="320040" indent="-320040" algn="l">
               <a:lnSpc>
-                <a:spcPct val="100000"/>
+                <a:spcPts val="2200"/>
               </a:lnSpc>
               <a:spcBef>
                 <a:spcPts val="0"/>
@@ -9467,24 +8804,29 @@
               <a:spcAft>
                 <a:spcPts val="600"/>
               </a:spcAft>
-              <a:buNone/>
+              <a:buClr>
+                <a:srgbClr val="C2410C"/>
+              </a:buClr>
+              <a:buSzPct val="100000"/>
+              <a:buFont typeface="Arial"/>
+              <a:buAutoNum type="arabicPeriod"/>
             </a:pPr>
             <a:r>
-              <a:rPr lang="en-US" sz="1200" b="1" dirty="0">
-                <a:solidFill>
-                  <a:srgbClr val="5A6675"/>
+              <a:rPr lang="en-US" sz="1600" dirty="0">
+                <a:solidFill>
+                  <a:srgbClr val="2F3A48"/>
                 </a:solidFill>
                 <a:latin typeface="Arial" pitchFamily="34" charset="0"/>
                 <a:ea typeface="Arial" pitchFamily="34" charset="-122"/>
                 <a:cs typeface="Arial" pitchFamily="34" charset="-120"/>
               </a:rPr>
-              <a:t>Caps active instances at n</a:t>
-            </a:r>
-          </a:p>
-          <a:p>
-            <a:pPr marL="0" indent="0" algn="l">
+              <a:t>freeInstances counts the free instances; main gives it n permits once the instance lists exist</a:t>
+            </a:r>
+          </a:p>
+          <a:p>
+            <a:pPr marL="320040" indent="-320040" algn="l">
               <a:lnSpc>
-                <a:spcPct val="100000"/>
+                <a:spcPts val="2200"/>
               </a:lnSpc>
               <a:spcBef>
                 <a:spcPts val="0"/>
@@ -9492,63 +8834,103 @@
               <a:spcAft>
                 <a:spcPts val="600"/>
               </a:spcAft>
-              <a:buNone/>
+              <a:buClr>
+                <a:srgbClr val="C2410C"/>
+              </a:buClr>
+              <a:buSzPct val="100000"/>
+              <a:buFont typeface="Arial"/>
+              <a:buAutoNum type="arabicPeriod"/>
             </a:pPr>
             <a:r>
-              <a:rPr lang="en-US" sz="2200" b="1" dirty="0">
-                <a:solidFill>
-                  <a:srgbClr val="156082"/>
-                </a:solidFill>
-                <a:latin typeface="Consolas" pitchFamily="49" charset="0"/>
-                <a:ea typeface="Consolas" pitchFamily="49" charset="-122"/>
-                <a:cs typeface="Consolas" pitchFamily="49" charset="-120"/>
-              </a:rPr>
-              <a:t>counting_semaphore</a:t>
-            </a:r>
-          </a:p>
-          <a:p>
-            <a:pPr marL="0" indent="0" algn="l">
-              <a:lnSpc>
-                <a:spcPct val="115000"/>
-              </a:lnSpc>
-              <a:spcBef>
-                <a:spcPts val="0"/>
-              </a:spcBef>
-              <a:spcAft>
-                <a:spcPts val="400"/>
-              </a:spcAft>
-              <a:buNone/>
-            </a:pPr>
-            <a:r>
-              <a:rPr lang="en-US" sz="1400" dirty="0">
-                <a:solidFill>
-                  <a:srgbClr val="1B2430"/>
+              <a:rPr lang="en-US" sz="1600" dirty="0">
+                <a:solidFill>
+                  <a:srgbClr val="2F3A48"/>
                 </a:solidFill>
                 <a:latin typeface="Arial" pitchFamily="34" charset="0"/>
                 <a:ea typeface="Arial" pitchFamily="34" charset="-122"/>
                 <a:cs typeface="Arial" pitchFamily="34" charset="-120"/>
               </a:rPr>
-              <a:t>freeInstances starts with n permits. A party takes one before it enters; its thread gives it back when the dungeon is cleared.</a:t>
-            </a:r>
-          </a:p>
-        </p:txBody>
-      </p:sp>
-      <p:sp>
-        <p:nvSpPr>
-          <p:cNvPr id="5" name="Mechanism panel 2"/>
+              <a:t>Before a party enters, main takes a permit; with all n instances active, acquire() blocks until a run ends</a:t>
+            </a:r>
+          </a:p>
+          <a:p>
+            <a:pPr marL="320040" indent="-320040" algn="l">
+              <a:lnSpc>
+                <a:spcPts val="2200"/>
+              </a:lnSpc>
+              <a:spcBef>
+                <a:spcPts val="0"/>
+              </a:spcBef>
+              <a:spcAft>
+                <a:spcPts val="600"/>
+              </a:spcAft>
+              <a:buClr>
+                <a:srgbClr val="C2410C"/>
+              </a:buClr>
+              <a:buSzPct val="100000"/>
+              <a:buFont typeface="Arial"/>
+              <a:buAutoNum type="arabicPeriod"/>
+            </a:pPr>
+            <a:r>
+              <a:rPr lang="en-US" sz="1600" dirty="0">
+                <a:solidFill>
+                  <a:srgbClr val="2F3A48"/>
+                </a:solidFill>
+                <a:latin typeface="Arial" pitchFamily="34" charset="0"/>
+                <a:ea typeface="Arial" pitchFamily="34" charset="-122"/>
+                <a:cs typeface="Arial" pitchFamily="34" charset="-120"/>
+              </a:rPr>
+              <a:t>So no more than n parties are ever in a dungeon at once (requirement a)</a:t>
+            </a:r>
+          </a:p>
+          <a:p>
+            <a:pPr marL="320040" indent="-320040" algn="l">
+              <a:lnSpc>
+                <a:spcPts val="2200"/>
+              </a:lnSpc>
+              <a:spcBef>
+                <a:spcPts val="0"/>
+              </a:spcBef>
+              <a:spcAft>
+                <a:spcPts val="600"/>
+              </a:spcAft>
+              <a:buClr>
+                <a:srgbClr val="C2410C"/>
+              </a:buClr>
+              <a:buSzPct val="100000"/>
+              <a:buFont typeface="Arial"/>
+              <a:buAutoNum type="arabicPeriod"/>
+            </a:pPr>
+            <a:r>
+              <a:rPr lang="en-US" sz="1600" dirty="0">
+                <a:solidFill>
+                  <a:srgbClr val="2F3A48"/>
+                </a:solidFill>
+                <a:latin typeface="Arial" pitchFamily="34" charset="0"/>
+                <a:ea typeface="Arial" pitchFamily="34" charset="-122"/>
+                <a:cs typeface="Arial" pitchFamily="34" charset="-120"/>
+              </a:rPr>
+              <a:t>A run returns its permit when its party clears, which wakes main if it is waiting for one</a:t>
+            </a:r>
+          </a:p>
+        </p:txBody>
+      </p:sp>
+      <p:sp>
+        <p:nvSpPr>
+          <p:cNvPr id="4" name="Code card"/>
           <p:cNvSpPr/>
           <p:nvPr/>
         </p:nvSpPr>
         <p:spPr>
           <a:xfrm>
-            <a:off x="6238452" y="1536192"/>
-            <a:ext cx="5141172" cy="2103120"/>
+            <a:off x="5504688" y="1526539"/>
+            <a:ext cx="6191504" cy="2990596"/>
           </a:xfrm>
           <a:prstGeom prst="rect">
             <a:avLst/>
           </a:prstGeom>
           <a:solidFill>
-            <a:srgbClr val="EEF2F8"/>
+            <a:srgbClr val="1B2430"/>
           </a:solidFill>
           <a:ln>
             <a:noFill/>
@@ -9564,14 +8946,159 @@
       </p:sp>
       <p:sp>
         <p:nvSpPr>
-          <p:cNvPr id="6" name="Mechanism 2"/>
+          <p:cNvPr id="5" name="Code highlight 1"/>
+          <p:cNvSpPr/>
+          <p:nvPr/>
+        </p:nvSpPr>
+        <p:spPr>
+          <a:xfrm>
+            <a:off x="5559552" y="1872487"/>
+            <a:ext cx="6081776" cy="152400"/>
+          </a:xfrm>
+          <a:prstGeom prst="rect">
+            <a:avLst/>
+          </a:prstGeom>
+          <a:solidFill>
+            <a:srgbClr val="2D3C52"/>
+          </a:solidFill>
+          <a:ln>
+            <a:noFill/>
+          </a:ln>
+        </p:spPr>
+        <p:txBody>
+          <a:bodyPr rtlCol="0" anchor="ctr"/>
+          <a:lstStyle/>
+          <a:p>
+            <a:endParaRPr lang="en-US"/>
+          </a:p>
+        </p:txBody>
+      </p:sp>
+      <p:sp>
+        <p:nvSpPr>
+          <p:cNvPr id="6" name="Code highlight 1"/>
+          <p:cNvSpPr/>
+          <p:nvPr/>
+        </p:nvSpPr>
+        <p:spPr>
+          <a:xfrm>
+            <a:off x="5559552" y="2291587"/>
+            <a:ext cx="6081776" cy="152400"/>
+          </a:xfrm>
+          <a:prstGeom prst="rect">
+            <a:avLst/>
+          </a:prstGeom>
+          <a:solidFill>
+            <a:srgbClr val="2D3C52"/>
+          </a:solidFill>
+          <a:ln>
+            <a:noFill/>
+          </a:ln>
+        </p:spPr>
+        <p:txBody>
+          <a:bodyPr rtlCol="0" anchor="ctr"/>
+          <a:lstStyle/>
+          <a:p>
+            <a:endParaRPr lang="en-US"/>
+          </a:p>
+        </p:txBody>
+      </p:sp>
+      <p:sp>
+        <p:nvSpPr>
+          <p:cNvPr id="7" name="Code highlight 2"/>
+          <p:cNvSpPr/>
+          <p:nvPr/>
+        </p:nvSpPr>
+        <p:spPr>
+          <a:xfrm>
+            <a:off x="5559552" y="2710687"/>
+            <a:ext cx="6081776" cy="152400"/>
+          </a:xfrm>
+          <a:prstGeom prst="rect">
+            <a:avLst/>
+          </a:prstGeom>
+          <a:solidFill>
+            <a:srgbClr val="2D3C52"/>
+          </a:solidFill>
+          <a:ln>
+            <a:noFill/>
+          </a:ln>
+        </p:spPr>
+        <p:txBody>
+          <a:bodyPr rtlCol="0" anchor="ctr"/>
+          <a:lstStyle/>
+          <a:p>
+            <a:endParaRPr lang="en-US"/>
+          </a:p>
+        </p:txBody>
+      </p:sp>
+      <p:sp>
+        <p:nvSpPr>
+          <p:cNvPr id="8" name="Code highlight 3"/>
+          <p:cNvSpPr/>
+          <p:nvPr/>
+        </p:nvSpPr>
+        <p:spPr>
+          <a:xfrm>
+            <a:off x="5559552" y="3421887"/>
+            <a:ext cx="6081776" cy="152400"/>
+          </a:xfrm>
+          <a:prstGeom prst="rect">
+            <a:avLst/>
+          </a:prstGeom>
+          <a:solidFill>
+            <a:srgbClr val="2D3C52"/>
+          </a:solidFill>
+          <a:ln>
+            <a:noFill/>
+          </a:ln>
+        </p:spPr>
+        <p:txBody>
+          <a:bodyPr rtlCol="0" anchor="ctr"/>
+          <a:lstStyle/>
+          <a:p>
+            <a:endParaRPr lang="en-US"/>
+          </a:p>
+        </p:txBody>
+      </p:sp>
+      <p:sp>
+        <p:nvSpPr>
+          <p:cNvPr id="9" name="Code highlight 4"/>
+          <p:cNvSpPr/>
+          <p:nvPr/>
+        </p:nvSpPr>
+        <p:spPr>
+          <a:xfrm>
+            <a:off x="5559552" y="4196587"/>
+            <a:ext cx="6081776" cy="152400"/>
+          </a:xfrm>
+          <a:prstGeom prst="rect">
+            <a:avLst/>
+          </a:prstGeom>
+          <a:solidFill>
+            <a:srgbClr val="2D3C52"/>
+          </a:solidFill>
+          <a:ln>
+            <a:noFill/>
+          </a:ln>
+        </p:spPr>
+        <p:txBody>
+          <a:bodyPr rtlCol="0" anchor="ctr"/>
+          <a:lstStyle/>
+          <a:p>
+            <a:endParaRPr lang="en-US"/>
+          </a:p>
+        </p:txBody>
+      </p:sp>
+      <p:sp>
+        <p:nvSpPr>
+          <p:cNvPr id="10" name="Code"/>
           <p:cNvSpPr txBox="1"/>
           <p:nvPr/>
         </p:nvSpPr>
         <p:spPr>
           <a:xfrm>
-            <a:off x="6467052" y="1764792"/>
-            <a:ext cx="4683972" cy="1645920"/>
+            <a:off x="5925312" y="1681987"/>
+            <a:ext cx="5661152" cy="2679700"/>
           </a:xfrm>
           <a:prstGeom prst="rect">
             <a:avLst/>
@@ -9582,126 +9109,660 @@
           </a:ln>
         </p:spPr>
         <p:txBody>
-          <a:bodyPr wrap="square" lIns="0" tIns="0" rIns="0" bIns="0" rtlCol="0" anchor="t">
+          <a:bodyPr wrap="none" lIns="0" tIns="0" rIns="0" bIns="0" rtlCol="0" anchor="t">
             <a:noAutofit/>
           </a:bodyPr>
           <a:lstStyle/>
           <a:p>
             <a:pPr marL="0" indent="0" algn="l">
               <a:lnSpc>
-                <a:spcPct val="100000"/>
+                <a:spcPts val="1400"/>
               </a:lnSpc>
               <a:spcBef>
                 <a:spcPts val="0"/>
               </a:spcBef>
               <a:spcAft>
-                <a:spcPts val="600"/>
+                <a:spcPts val="0"/>
               </a:spcAft>
               <a:buNone/>
             </a:pPr>
             <a:r>
-              <a:rPr lang="en-US" sz="1200" b="1" dirty="0">
-                <a:solidFill>
-                  <a:srgbClr val="5A6675"/>
-                </a:solidFill>
-                <a:latin typeface="Arial" pitchFamily="34" charset="0"/>
-                <a:ea typeface="Arial" pitchFamily="34" charset="-122"/>
-                <a:cs typeface="Arial" pitchFamily="34" charset="-120"/>
-              </a:rPr>
-              <a:t>Guards shared state and printing</a:t>
+              <a:rPr lang="en-US" sz="1200" i="1" dirty="0">
+                <a:solidFill>
+                  <a:srgbClr val="A3B0C2"/>
+                </a:solidFill>
+                <a:latin typeface="Consolas" pitchFamily="49" charset="0"/>
+                <a:ea typeface="Consolas" pitchFamily="49" charset="-122"/>
+                <a:cs typeface="Consolas" pitchFamily="49" charset="-120"/>
+              </a:rPr>
+              <a:t>// global</a:t>
             </a:r>
           </a:p>
           <a:p>
             <a:pPr marL="0" indent="0" algn="l">
               <a:lnSpc>
-                <a:spcPct val="100000"/>
+                <a:spcPts val="1400"/>
               </a:lnSpc>
               <a:spcBef>
                 <a:spcPts val="0"/>
               </a:spcBef>
               <a:spcAft>
-                <a:spcPts val="600"/>
+                <a:spcPts val="0"/>
               </a:spcAft>
               <a:buNone/>
             </a:pPr>
             <a:r>
-              <a:rPr lang="en-US" sz="2200" b="1" dirty="0">
-                <a:solidFill>
-                  <a:srgbClr val="156082"/>
-                </a:solidFill>
-                <a:latin typeface="Consolas" pitchFamily="49" charset="0"/>
-                <a:ea typeface="Consolas" pitchFamily="49" charset="-122"/>
-                <a:cs typeface="Consolas" pitchFamily="49" charset="-120"/>
-              </a:rPr>
-              <a:t>mutex + lock_guard</a:t>
+              <a:rPr lang="en-US" sz="1200" dirty="0">
+                <a:solidFill>
+                  <a:srgbClr val="7ED3C0"/>
+                </a:solidFill>
+                <a:latin typeface="Consolas" pitchFamily="49" charset="0"/>
+                <a:ea typeface="Consolas" pitchFamily="49" charset="-122"/>
+                <a:cs typeface="Consolas" pitchFamily="49" charset="-120"/>
+              </a:rPr>
+              <a:t>counting_semaphore</a:t>
+            </a:r>
+            <a:r>
+              <a:rPr lang="en-US" sz="1200" dirty="0">
+                <a:solidFill>
+                  <a:srgbClr val="DCE3EE"/>
+                </a:solidFill>
+                <a:latin typeface="Consolas" pitchFamily="49" charset="0"/>
+                <a:ea typeface="Consolas" pitchFamily="49" charset="-122"/>
+                <a:cs typeface="Consolas" pitchFamily="49" charset="-120"/>
+              </a:rPr>
+              <a:t>&lt;&gt; freeInstances(</a:t>
+            </a:r>
+            <a:r>
+              <a:rPr lang="en-US" sz="1200" dirty="0">
+                <a:solidFill>
+                  <a:srgbClr val="F4B26B"/>
+                </a:solidFill>
+                <a:latin typeface="Consolas" pitchFamily="49" charset="0"/>
+                <a:ea typeface="Consolas" pitchFamily="49" charset="-122"/>
+                <a:cs typeface="Consolas" pitchFamily="49" charset="-120"/>
+              </a:rPr>
+              <a:t>0</a:t>
+            </a:r>
+            <a:r>
+              <a:rPr lang="en-US" sz="1200" dirty="0">
+                <a:solidFill>
+                  <a:srgbClr val="DCE3EE"/>
+                </a:solidFill>
+                <a:latin typeface="Consolas" pitchFamily="49" charset="0"/>
+                <a:ea typeface="Consolas" pitchFamily="49" charset="-122"/>
+                <a:cs typeface="Consolas" pitchFamily="49" charset="-120"/>
+              </a:rPr>
+              <a:t>);</a:t>
             </a:r>
           </a:p>
           <a:p>
             <a:pPr marL="0" indent="0" algn="l">
               <a:lnSpc>
-                <a:spcPct val="115000"/>
+                <a:spcPts val="1400"/>
               </a:lnSpc>
               <a:spcBef>
-                <a:spcPts val="0"/>
+                <a:spcPts val="500"/>
               </a:spcBef>
               <a:spcAft>
-                <a:spcPts val="400"/>
+                <a:spcPts val="0"/>
               </a:spcAft>
               <a:buNone/>
             </a:pPr>
             <a:r>
-              <a:rPr lang="en-US" sz="1400" dirty="0">
-                <a:solidFill>
-                  <a:srgbClr val="1B2430"/>
-                </a:solidFill>
-                <a:latin typeface="Arial" pitchFamily="34" charset="0"/>
-                <a:ea typeface="Arial" pitchFamily="34" charset="-122"/>
-                <a:cs typeface="Arial" pitchFamily="34" charset="-120"/>
-              </a:rPr>
-              <a:t>mtx protects each instance's status, the served counts and times, the saved error and the output. lock_guard unlocks even on an exception.</a:t>
-            </a:r>
-          </a:p>
-        </p:txBody>
-      </p:sp>
-      <p:sp>
-        <p:nvSpPr>
-          <p:cNvPr id="7" name="Mechanism panel 3"/>
+              <a:rPr lang="en-US" sz="1200" i="1" dirty="0">
+                <a:solidFill>
+                  <a:srgbClr val="A3B0C2"/>
+                </a:solidFill>
+                <a:latin typeface="Consolas" pitchFamily="49" charset="0"/>
+                <a:ea typeface="Consolas" pitchFamily="49" charset="-122"/>
+                <a:cs typeface="Consolas" pitchFamily="49" charset="-120"/>
+              </a:rPr>
+              <a:t>// main(): once the instance lists are allocated</a:t>
+            </a:r>
+          </a:p>
+          <a:p>
+            <a:pPr marL="0" indent="0" algn="l">
+              <a:lnSpc>
+                <a:spcPts val="1400"/>
+              </a:lnSpc>
+              <a:spcBef>
+                <a:spcPts val="0"/>
+              </a:spcBef>
+              <a:spcAft>
+                <a:spcPts val="0"/>
+              </a:spcAft>
+              <a:buNone/>
+            </a:pPr>
+            <a:r>
+              <a:rPr lang="en-US" sz="1200" dirty="0">
+                <a:solidFill>
+                  <a:srgbClr val="DCE3EE"/>
+                </a:solidFill>
+                <a:latin typeface="Consolas" pitchFamily="49" charset="0"/>
+                <a:ea typeface="Consolas" pitchFamily="49" charset="-122"/>
+                <a:cs typeface="Consolas" pitchFamily="49" charset="-120"/>
+              </a:rPr>
+              <a:t>freeInstances.release(maxInstances);</a:t>
+            </a:r>
+          </a:p>
+          <a:p>
+            <a:pPr marL="0" indent="0" algn="l">
+              <a:lnSpc>
+                <a:spcPts val="1400"/>
+              </a:lnSpc>
+              <a:spcBef>
+                <a:spcPts val="500"/>
+              </a:spcBef>
+              <a:spcAft>
+                <a:spcPts val="0"/>
+              </a:spcAft>
+              <a:buNone/>
+            </a:pPr>
+            <a:r>
+              <a:rPr lang="en-US" sz="1200" i="1" dirty="0">
+                <a:solidFill>
+                  <a:srgbClr val="A3B0C2"/>
+                </a:solidFill>
+                <a:latin typeface="Consolas" pitchFamily="49" charset="0"/>
+                <a:ea typeface="Consolas" pitchFamily="49" charset="-122"/>
+                <a:cs typeface="Consolas" pitchFamily="49" charset="-120"/>
+              </a:rPr>
+              <a:t>// enterDungeon(): main thread, once per party</a:t>
+            </a:r>
+          </a:p>
+          <a:p>
+            <a:pPr marL="0" indent="0" algn="l">
+              <a:lnSpc>
+                <a:spcPts val="1400"/>
+              </a:lnSpc>
+              <a:spcBef>
+                <a:spcPts val="0"/>
+              </a:spcBef>
+              <a:spcAft>
+                <a:spcPts val="0"/>
+              </a:spcAft>
+              <a:buNone/>
+            </a:pPr>
+            <a:r>
+              <a:rPr lang="en-US" sz="1200" dirty="0">
+                <a:solidFill>
+                  <a:srgbClr val="DCE3EE"/>
+                </a:solidFill>
+                <a:latin typeface="Consolas" pitchFamily="49" charset="0"/>
+                <a:ea typeface="Consolas" pitchFamily="49" charset="-122"/>
+                <a:cs typeface="Consolas" pitchFamily="49" charset="-120"/>
+              </a:rPr>
+              <a:t>freeInstances.acquire();</a:t>
+            </a:r>
+          </a:p>
+          <a:p>
+            <a:pPr marL="0" indent="0" algn="l">
+              <a:lnSpc>
+                <a:spcPts val="1400"/>
+              </a:lnSpc>
+              <a:spcBef>
+                <a:spcPts val="0"/>
+              </a:spcBef>
+              <a:spcAft>
+                <a:spcPts val="0"/>
+              </a:spcAft>
+              <a:buNone/>
+            </a:pPr>
+            <a:r>
+              <a:rPr lang="en-US" sz="1200" dirty="0">
+                <a:solidFill>
+                  <a:srgbClr val="DCE3EE"/>
+                </a:solidFill>
+                <a:latin typeface="Consolas" pitchFamily="49" charset="0"/>
+                <a:ea typeface="Consolas" pitchFamily="49" charset="-122"/>
+                <a:cs typeface="Consolas" pitchFamily="49" charset="-120"/>
+              </a:rPr>
+              <a:t>...</a:t>
+            </a:r>
+          </a:p>
+          <a:p>
+            <a:pPr marL="0" indent="0" algn="l">
+              <a:lnSpc>
+                <a:spcPts val="1400"/>
+              </a:lnSpc>
+              <a:spcBef>
+                <a:spcPts val="0"/>
+              </a:spcBef>
+              <a:spcAft>
+                <a:spcPts val="0"/>
+              </a:spcAft>
+              <a:buNone/>
+            </a:pPr>
+            <a:r>
+              <a:rPr lang="en-US" sz="1200" dirty="0">
+                <a:solidFill>
+                  <a:srgbClr val="7ED3C0"/>
+                </a:solidFill>
+                <a:latin typeface="Consolas" pitchFamily="49" charset="0"/>
+                <a:ea typeface="Consolas" pitchFamily="49" charset="-122"/>
+                <a:cs typeface="Consolas" pitchFamily="49" charset="-120"/>
+              </a:rPr>
+              <a:t>lock_guard</a:t>
+            </a:r>
+            <a:r>
+              <a:rPr lang="en-US" sz="1200" dirty="0">
+                <a:solidFill>
+                  <a:srgbClr val="DCE3EE"/>
+                </a:solidFill>
+                <a:latin typeface="Consolas" pitchFamily="49" charset="0"/>
+                <a:ea typeface="Consolas" pitchFamily="49" charset="-122"/>
+                <a:cs typeface="Consolas" pitchFamily="49" charset="-120"/>
+              </a:rPr>
+              <a:t>&lt;</a:t>
+            </a:r>
+            <a:r>
+              <a:rPr lang="en-US" sz="1200" dirty="0">
+                <a:solidFill>
+                  <a:srgbClr val="7ED3C0"/>
+                </a:solidFill>
+                <a:latin typeface="Consolas" pitchFamily="49" charset="0"/>
+                <a:ea typeface="Consolas" pitchFamily="49" charset="-122"/>
+                <a:cs typeface="Consolas" pitchFamily="49" charset="-120"/>
+              </a:rPr>
+              <a:t>mutex</a:t>
+            </a:r>
+            <a:r>
+              <a:rPr lang="en-US" sz="1200" dirty="0">
+                <a:solidFill>
+                  <a:srgbClr val="DCE3EE"/>
+                </a:solidFill>
+                <a:latin typeface="Consolas" pitchFamily="49" charset="0"/>
+                <a:ea typeface="Consolas" pitchFamily="49" charset="-122"/>
+                <a:cs typeface="Consolas" pitchFamily="49" charset="-120"/>
+              </a:rPr>
+              <a:t>&gt; lock(mtx);</a:t>
+            </a:r>
+          </a:p>
+          <a:p>
+            <a:pPr marL="0" indent="0" algn="l">
+              <a:lnSpc>
+                <a:spcPts val="1400"/>
+              </a:lnSpc>
+              <a:spcBef>
+                <a:spcPts val="0"/>
+              </a:spcBef>
+              <a:spcAft>
+                <a:spcPts val="0"/>
+              </a:spcAft>
+              <a:buNone/>
+            </a:pPr>
+            <a:r>
+              <a:rPr lang="en-US" sz="1200" dirty="0">
+                <a:solidFill>
+                  <a:srgbClr val="DCE3EE"/>
+                </a:solidFill>
+                <a:latin typeface="Consolas" pitchFamily="49" charset="0"/>
+                <a:ea typeface="Consolas" pitchFamily="49" charset="-122"/>
+                <a:cs typeface="Consolas" pitchFamily="49" charset="-120"/>
+              </a:rPr>
+              <a:t>instance = pickInstance();</a:t>
+            </a:r>
+          </a:p>
+          <a:p>
+            <a:pPr marL="0" indent="0" algn="l">
+              <a:lnSpc>
+                <a:spcPts val="1400"/>
+              </a:lnSpc>
+              <a:spcBef>
+                <a:spcPts val="0"/>
+              </a:spcBef>
+              <a:spcAft>
+                <a:spcPts val="0"/>
+              </a:spcAft>
+              <a:buNone/>
+            </a:pPr>
+            <a:r>
+              <a:rPr lang="en-US" sz="1200" dirty="0">
+                <a:solidFill>
+                  <a:srgbClr val="DCE3EE"/>
+                </a:solidFill>
+                <a:latin typeface="Consolas" pitchFamily="49" charset="0"/>
+                <a:ea typeface="Consolas" pitchFamily="49" charset="-122"/>
+                <a:cs typeface="Consolas" pitchFamily="49" charset="-120"/>
+              </a:rPr>
+              <a:t>status[instance] = </a:t>
+            </a:r>
+            <a:r>
+              <a:rPr lang="en-US" sz="1200" dirty="0">
+                <a:solidFill>
+                  <a:srgbClr val="B5DCA0"/>
+                </a:solidFill>
+                <a:latin typeface="Consolas" pitchFamily="49" charset="0"/>
+                <a:ea typeface="Consolas" pitchFamily="49" charset="-122"/>
+                <a:cs typeface="Consolas" pitchFamily="49" charset="-120"/>
+              </a:rPr>
+              <a:t>"active"</a:t>
+            </a:r>
+            <a:r>
+              <a:rPr lang="en-US" sz="1200" dirty="0">
+                <a:solidFill>
+                  <a:srgbClr val="DCE3EE"/>
+                </a:solidFill>
+                <a:latin typeface="Consolas" pitchFamily="49" charset="0"/>
+                <a:ea typeface="Consolas" pitchFamily="49" charset="-122"/>
+                <a:cs typeface="Consolas" pitchFamily="49" charset="-120"/>
+              </a:rPr>
+              <a:t>;</a:t>
+            </a:r>
+          </a:p>
+          <a:p>
+            <a:pPr marL="0" indent="0" algn="l">
+              <a:lnSpc>
+                <a:spcPts val="1400"/>
+              </a:lnSpc>
+              <a:spcBef>
+                <a:spcPts val="500"/>
+              </a:spcBef>
+              <a:spcAft>
+                <a:spcPts val="0"/>
+              </a:spcAft>
+              <a:buNone/>
+            </a:pPr>
+            <a:r>
+              <a:rPr lang="en-US" sz="1200" i="1" dirty="0">
+                <a:solidFill>
+                  <a:srgbClr val="A3B0C2"/>
+                </a:solidFill>
+                <a:latin typeface="Consolas" pitchFamily="49" charset="0"/>
+                <a:ea typeface="Consolas" pitchFamily="49" charset="-122"/>
+                <a:cs typeface="Consolas" pitchFamily="49" charset="-120"/>
+              </a:rPr>
+              <a:t>// runDungeon(): the party's thread</a:t>
+            </a:r>
+          </a:p>
+          <a:p>
+            <a:pPr marL="0" indent="0" algn="l">
+              <a:lnSpc>
+                <a:spcPts val="1400"/>
+              </a:lnSpc>
+              <a:spcBef>
+                <a:spcPts val="0"/>
+              </a:spcBef>
+              <a:spcAft>
+                <a:spcPts val="0"/>
+              </a:spcAft>
+              <a:buNone/>
+            </a:pPr>
+            <a:r>
+              <a:rPr lang="en-US" sz="1200" dirty="0">
+                <a:solidFill>
+                  <a:srgbClr val="DCE3EE"/>
+                </a:solidFill>
+                <a:latin typeface="Consolas" pitchFamily="49" charset="0"/>
+                <a:ea typeface="Consolas" pitchFamily="49" charset="-122"/>
+                <a:cs typeface="Consolas" pitchFamily="49" charset="-120"/>
+              </a:rPr>
+              <a:t>this_thread::sleep_for(chrono::seconds(clearTime));</a:t>
+            </a:r>
+          </a:p>
+          <a:p>
+            <a:pPr marL="0" indent="0" algn="l">
+              <a:lnSpc>
+                <a:spcPts val="1400"/>
+              </a:lnSpc>
+              <a:spcBef>
+                <a:spcPts val="0"/>
+              </a:spcBef>
+              <a:spcAft>
+                <a:spcPts val="0"/>
+              </a:spcAft>
+              <a:buNone/>
+            </a:pPr>
+            <a:r>
+              <a:rPr lang="en-US" sz="1200" dirty="0">
+                <a:solidFill>
+                  <a:srgbClr val="DCE3EE"/>
+                </a:solidFill>
+                <a:latin typeface="Consolas" pitchFamily="49" charset="0"/>
+                <a:ea typeface="Consolas" pitchFamily="49" charset="-122"/>
+                <a:cs typeface="Consolas" pitchFamily="49" charset="-120"/>
+              </a:rPr>
+              <a:t>...</a:t>
+            </a:r>
+          </a:p>
+          <a:p>
+            <a:pPr marL="0" indent="0" algn="l">
+              <a:lnSpc>
+                <a:spcPts val="1400"/>
+              </a:lnSpc>
+              <a:spcBef>
+                <a:spcPts val="0"/>
+              </a:spcBef>
+              <a:spcAft>
+                <a:spcPts val="0"/>
+              </a:spcAft>
+              <a:buNone/>
+            </a:pPr>
+            <a:r>
+              <a:rPr lang="en-US" sz="1200" dirty="0">
+                <a:solidFill>
+                  <a:srgbClr val="DCE3EE"/>
+                </a:solidFill>
+                <a:latin typeface="Consolas" pitchFamily="49" charset="0"/>
+                <a:ea typeface="Consolas" pitchFamily="49" charset="-122"/>
+                <a:cs typeface="Consolas" pitchFamily="49" charset="-120"/>
+              </a:rPr>
+              <a:t>freeInstances.release();</a:t>
+            </a:r>
+          </a:p>
+        </p:txBody>
+      </p:sp>
+      <p:sp>
+        <p:nvSpPr>
+          <p:cNvPr id="11" name="Code badge 1"/>
           <p:cNvSpPr/>
           <p:nvPr/>
         </p:nvSpPr>
         <p:spPr>
           <a:xfrm>
-            <a:off x="822960" y="3913632"/>
-            <a:ext cx="5141172" cy="2103120"/>
+            <a:off x="5623560" y="1868677"/>
+            <a:ext cx="160020" cy="160020"/>
           </a:xfrm>
-          <a:prstGeom prst="rect">
+          <a:prstGeom prst="ellipse">
             <a:avLst/>
           </a:prstGeom>
           <a:solidFill>
-            <a:srgbClr val="EEF2F8"/>
+            <a:srgbClr val="C2410C"/>
           </a:solidFill>
           <a:ln>
             <a:noFill/>
           </a:ln>
         </p:spPr>
         <p:txBody>
-          <a:bodyPr rtlCol="0" anchor="ctr"/>
-          <a:lstStyle/>
-          <a:p>
-            <a:endParaRPr lang="en-US"/>
-          </a:p>
-        </p:txBody>
-      </p:sp>
-      <p:sp>
-        <p:nvSpPr>
-          <p:cNvPr id="8" name="Mechanism 3"/>
+          <a:bodyPr wrap="none" lIns="0" tIns="0" rIns="0" bIns="0" rtlCol="0" anchor="ctr"/>
+          <a:lstStyle/>
+          <a:p>
+            <a:pPr algn="ctr"/>
+            <a:r>
+              <a:rPr lang="en-US" sz="881" b="1" dirty="0">
+                <a:solidFill>
+                  <a:srgbClr val="FFFFFF"/>
+                </a:solidFill>
+                <a:latin typeface="Arial" pitchFamily="34" charset="0"/>
+                <a:ea typeface="Arial" pitchFamily="34" charset="-122"/>
+                <a:cs typeface="Arial" pitchFamily="34" charset="-120"/>
+              </a:rPr>
+              <a:t>1</a:t>
+            </a:r>
+          </a:p>
+        </p:txBody>
+      </p:sp>
+      <p:sp>
+        <p:nvSpPr>
+          <p:cNvPr id="12" name="Code badge 1"/>
+          <p:cNvSpPr/>
+          <p:nvPr/>
+        </p:nvSpPr>
+        <p:spPr>
+          <a:xfrm>
+            <a:off x="5623560" y="2287777"/>
+            <a:ext cx="160020" cy="160020"/>
+          </a:xfrm>
+          <a:prstGeom prst="ellipse">
+            <a:avLst/>
+          </a:prstGeom>
+          <a:solidFill>
+            <a:srgbClr val="C2410C"/>
+          </a:solidFill>
+          <a:ln>
+            <a:noFill/>
+          </a:ln>
+        </p:spPr>
+        <p:txBody>
+          <a:bodyPr wrap="none" lIns="0" tIns="0" rIns="0" bIns="0" rtlCol="0" anchor="ctr"/>
+          <a:lstStyle/>
+          <a:p>
+            <a:pPr algn="ctr"/>
+            <a:r>
+              <a:rPr lang="en-US" sz="881" b="1" dirty="0">
+                <a:solidFill>
+                  <a:srgbClr val="FFFFFF"/>
+                </a:solidFill>
+                <a:latin typeface="Arial" pitchFamily="34" charset="0"/>
+                <a:ea typeface="Arial" pitchFamily="34" charset="-122"/>
+                <a:cs typeface="Arial" pitchFamily="34" charset="-120"/>
+              </a:rPr>
+              <a:t>1</a:t>
+            </a:r>
+          </a:p>
+        </p:txBody>
+      </p:sp>
+      <p:sp>
+        <p:nvSpPr>
+          <p:cNvPr id="13" name="Code badge 2"/>
+          <p:cNvSpPr/>
+          <p:nvPr/>
+        </p:nvSpPr>
+        <p:spPr>
+          <a:xfrm>
+            <a:off x="5623560" y="2706877"/>
+            <a:ext cx="160020" cy="160020"/>
+          </a:xfrm>
+          <a:prstGeom prst="ellipse">
+            <a:avLst/>
+          </a:prstGeom>
+          <a:solidFill>
+            <a:srgbClr val="C2410C"/>
+          </a:solidFill>
+          <a:ln>
+            <a:noFill/>
+          </a:ln>
+        </p:spPr>
+        <p:txBody>
+          <a:bodyPr wrap="none" lIns="0" tIns="0" rIns="0" bIns="0" rtlCol="0" anchor="ctr"/>
+          <a:lstStyle/>
+          <a:p>
+            <a:pPr algn="ctr"/>
+            <a:r>
+              <a:rPr lang="en-US" sz="881" b="1" dirty="0">
+                <a:solidFill>
+                  <a:srgbClr val="FFFFFF"/>
+                </a:solidFill>
+                <a:latin typeface="Arial" pitchFamily="34" charset="0"/>
+                <a:ea typeface="Arial" pitchFamily="34" charset="-122"/>
+                <a:cs typeface="Arial" pitchFamily="34" charset="-120"/>
+              </a:rPr>
+              <a:t>2</a:t>
+            </a:r>
+          </a:p>
+        </p:txBody>
+      </p:sp>
+      <p:sp>
+        <p:nvSpPr>
+          <p:cNvPr id="14" name="Code badge 3"/>
+          <p:cNvSpPr/>
+          <p:nvPr/>
+        </p:nvSpPr>
+        <p:spPr>
+          <a:xfrm>
+            <a:off x="5623560" y="3418077"/>
+            <a:ext cx="160020" cy="160020"/>
+          </a:xfrm>
+          <a:prstGeom prst="ellipse">
+            <a:avLst/>
+          </a:prstGeom>
+          <a:solidFill>
+            <a:srgbClr val="C2410C"/>
+          </a:solidFill>
+          <a:ln>
+            <a:noFill/>
+          </a:ln>
+        </p:spPr>
+        <p:txBody>
+          <a:bodyPr wrap="none" lIns="0" tIns="0" rIns="0" bIns="0" rtlCol="0" anchor="ctr"/>
+          <a:lstStyle/>
+          <a:p>
+            <a:pPr algn="ctr"/>
+            <a:r>
+              <a:rPr lang="en-US" sz="881" b="1" dirty="0">
+                <a:solidFill>
+                  <a:srgbClr val="FFFFFF"/>
+                </a:solidFill>
+                <a:latin typeface="Arial" pitchFamily="34" charset="0"/>
+                <a:ea typeface="Arial" pitchFamily="34" charset="-122"/>
+                <a:cs typeface="Arial" pitchFamily="34" charset="-120"/>
+              </a:rPr>
+              <a:t>3</a:t>
+            </a:r>
+          </a:p>
+        </p:txBody>
+      </p:sp>
+      <p:sp>
+        <p:nvSpPr>
+          <p:cNvPr id="15" name="Code badge 4"/>
+          <p:cNvSpPr/>
+          <p:nvPr/>
+        </p:nvSpPr>
+        <p:spPr>
+          <a:xfrm>
+            <a:off x="5623560" y="4192777"/>
+            <a:ext cx="160020" cy="160020"/>
+          </a:xfrm>
+          <a:prstGeom prst="ellipse">
+            <a:avLst/>
+          </a:prstGeom>
+          <a:solidFill>
+            <a:srgbClr val="C2410C"/>
+          </a:solidFill>
+          <a:ln>
+            <a:noFill/>
+          </a:ln>
+        </p:spPr>
+        <p:txBody>
+          <a:bodyPr wrap="none" lIns="0" tIns="0" rIns="0" bIns="0" rtlCol="0" anchor="ctr"/>
+          <a:lstStyle/>
+          <a:p>
+            <a:pPr algn="ctr"/>
+            <a:r>
+              <a:rPr lang="en-US" sz="881" b="1" dirty="0">
+                <a:solidFill>
+                  <a:srgbClr val="FFFFFF"/>
+                </a:solidFill>
+                <a:latin typeface="Arial" pitchFamily="34" charset="0"/>
+                <a:ea typeface="Arial" pitchFamily="34" charset="-122"/>
+                <a:cs typeface="Arial" pitchFamily="34" charset="-120"/>
+              </a:rPr>
+              <a:t>4</a:t>
+            </a:r>
+          </a:p>
+        </p:txBody>
+      </p:sp>
+      <p:sp>
+        <p:nvSpPr>
+          <p:cNvPr id="16" name="Code caption"/>
           <p:cNvSpPr txBox="1"/>
           <p:nvPr/>
         </p:nvSpPr>
         <p:spPr>
           <a:xfrm>
-            <a:off x="1051560" y="4142232"/>
-            <a:ext cx="4683972" cy="1645920"/>
+            <a:off x="5504688" y="4590287"/>
+            <a:ext cx="6191504" cy="603504"/>
           </a:xfrm>
           <a:prstGeom prst="rect">
             <a:avLst/>
@@ -9717,20 +9778,9 @@
           </a:bodyPr>
           <a:lstStyle/>
           <a:p>
-            <a:pPr marL="0" indent="0" algn="l">
-              <a:lnSpc>
-                <a:spcPct val="100000"/>
-              </a:lnSpc>
-              <a:spcBef>
-                <a:spcPts val="0"/>
-              </a:spcBef>
-              <a:spcAft>
-                <a:spcPts val="600"/>
-              </a:spcAft>
-              <a:buNone/>
-            </a:pPr>
-            <a:r>
-              <a:rPr lang="en-US" sz="1200" b="1" dirty="0">
+            <a:pPr algn="l"/>
+            <a:r>
+              <a:rPr lang="en-US" sz="1100" dirty="0">
                 <a:solidFill>
                   <a:srgbClr val="5A6675"/>
                 </a:solidFill>
@@ -9738,129 +9788,27 @@
                 <a:ea typeface="Arial" pitchFamily="34" charset="-122"/>
                 <a:cs typeface="Arial" pitchFamily="34" charset="-120"/>
               </a:rPr>
-              <a:t>One thread per dungeon run</a:t>
-            </a:r>
-          </a:p>
-          <a:p>
-            <a:pPr marL="0" indent="0" algn="l">
-              <a:lnSpc>
-                <a:spcPct val="100000"/>
-              </a:lnSpc>
-              <a:spcBef>
-                <a:spcPts val="0"/>
-              </a:spcBef>
-              <a:spcAft>
-                <a:spcPts val="600"/>
-              </a:spcAft>
-              <a:buNone/>
-            </a:pPr>
-            <a:r>
-              <a:rPr lang="en-US" sz="2200" b="1" dirty="0">
-                <a:solidFill>
-                  <a:srgbClr val="156082"/>
-                </a:solidFill>
-                <a:latin typeface="Consolas" pitchFamily="49" charset="0"/>
-                <a:ea typeface="Consolas" pitchFamily="49" charset="-122"/>
-                <a:cs typeface="Consolas" pitchFamily="49" charset="-120"/>
-              </a:rPr>
-              <a:t>thread + join</a:t>
-            </a:r>
-          </a:p>
-          <a:p>
-            <a:pPr marL="0" indent="0" algn="l">
-              <a:lnSpc>
-                <a:spcPct val="115000"/>
-              </a:lnSpc>
-              <a:spcBef>
-                <a:spcPts val="0"/>
-              </a:spcBef>
-              <a:spcAft>
-                <a:spcPts val="400"/>
-              </a:spcAft>
-              <a:buNone/>
-            </a:pPr>
-            <a:r>
-              <a:rPr lang="en-US" sz="1400" dirty="0">
-                <a:solidFill>
-                  <a:srgbClr val="1B2430"/>
+              <a:t>Excerpts from the project source, abridged.</a:t>
+            </a:r>
+          </a:p>
+          <a:p>
+            <a:pPr algn="l"/>
+            <a:r>
+              <a:rPr lang="en-US" sz="1100" dirty="0">
+                <a:solidFill>
+                  <a:srgbClr val="5A6675"/>
                 </a:solidFill>
                 <a:latin typeface="Arial" pitchFamily="34" charset="0"/>
                 <a:ea typeface="Arial" pitchFamily="34" charset="-122"/>
                 <a:cs typeface="Arial" pitchFamily="34" charset="-120"/>
               </a:rPr>
-              <a:t>Each party in a dungeon is a thread that sleeps for its clear time. Main joins an instance's old thread before reusing it, and joins all of them before the summary.</a:t>
-            </a:r>
-          </a:p>
-        </p:txBody>
-      </p:sp>
-      <p:sp>
-        <p:nvSpPr>
-          <p:cNvPr id="9" name="Mechanism panel 4"/>
-          <p:cNvSpPr/>
-          <p:nvPr/>
-        </p:nvSpPr>
-        <p:spPr>
-          <a:xfrm>
-            <a:off x="6238452" y="3913632"/>
-            <a:ext cx="5141172" cy="2103120"/>
-          </a:xfrm>
-          <a:prstGeom prst="rect">
-            <a:avLst/>
-          </a:prstGeom>
-          <a:solidFill>
-            <a:srgbClr val="EEF2F8"/>
-          </a:solidFill>
-          <a:ln>
-            <a:noFill/>
-          </a:ln>
-        </p:spPr>
-        <p:txBody>
-          <a:bodyPr rtlCol="0" anchor="ctr"/>
-          <a:lstStyle/>
-          <a:p>
-            <a:endParaRPr lang="en-US"/>
-          </a:p>
-        </p:txBody>
-      </p:sp>
-      <p:sp>
-        <p:nvSpPr>
-          <p:cNvPr id="10" name="Mechanism 4"/>
-          <p:cNvSpPr txBox="1"/>
-          <p:nvPr/>
-        </p:nvSpPr>
-        <p:spPr>
-          <a:xfrm>
-            <a:off x="6467052" y="4142232"/>
-            <a:ext cx="4683972" cy="1645920"/>
-          </a:xfrm>
-          <a:prstGeom prst="rect">
-            <a:avLst/>
-          </a:prstGeom>
-          <a:noFill/>
-          <a:ln>
-            <a:noFill/>
-          </a:ln>
-        </p:spPr>
-        <p:txBody>
-          <a:bodyPr wrap="square" lIns="0" tIns="0" rIns="0" bIns="0" rtlCol="0" anchor="t">
-            <a:noAutofit/>
-          </a:bodyPr>
-          <a:lstStyle/>
-          <a:p>
-            <a:pPr marL="0" indent="0" algn="l">
-              <a:lnSpc>
-                <a:spcPct val="100000"/>
-              </a:lnSpc>
-              <a:spcBef>
-                <a:spcPts val="0"/>
-              </a:spcBef>
-              <a:spcAft>
-                <a:spcPts val="600"/>
-              </a:spcAft>
-              <a:buNone/>
-            </a:pPr>
-            <a:r>
-              <a:rPr lang="en-US" sz="1200" b="1" dirty="0">
+              <a:t> </a:t>
+            </a:r>
+          </a:p>
+          <a:p>
+            <a:pPr algn="l"/>
+            <a:r>
+              <a:rPr lang="en-US" sz="1100" dirty="0">
                 <a:solidFill>
                   <a:srgbClr val="5A6675"/>
                 </a:solidFill>
@@ -9868,57 +9816,7 @@
                 <a:ea typeface="Arial" pitchFamily="34" charset="-122"/>
                 <a:cs typeface="Arial" pitchFamily="34" charset="-120"/>
               </a:rPr>
-              <a:t>Rules against deadlock and starvation</a:t>
-            </a:r>
-          </a:p>
-          <a:p>
-            <a:pPr marL="0" indent="0" algn="l">
-              <a:lnSpc>
-                <a:spcPct val="100000"/>
-              </a:lnSpc>
-              <a:spcBef>
-                <a:spcPts val="0"/>
-              </a:spcBef>
-              <a:spcAft>
-                <a:spcPts val="600"/>
-              </a:spcAft>
-              <a:buNone/>
-            </a:pPr>
-            <a:r>
-              <a:rPr lang="en-US" sz="2200" b="1" dirty="0">
-                <a:solidFill>
-                  <a:srgbClr val="156082"/>
-                </a:solidFill>
-                <a:latin typeface="Consolas" pitchFamily="49" charset="0"/>
-                <a:ea typeface="Consolas" pitchFamily="49" charset="-122"/>
-                <a:cs typeface="Consolas" pitchFamily="49" charset="-120"/>
-              </a:rPr>
-              <a:t>acquire() → lock_guard</a:t>
-            </a:r>
-          </a:p>
-          <a:p>
-            <a:pPr marL="0" indent="0" algn="l">
-              <a:lnSpc>
-                <a:spcPct val="115000"/>
-              </a:lnSpc>
-              <a:spcBef>
-                <a:spcPts val="0"/>
-              </a:spcBef>
-              <a:spcAft>
-                <a:spcPts val="400"/>
-              </a:spcAft>
-              <a:buNone/>
-            </a:pPr>
-            <a:r>
-              <a:rPr lang="en-US" sz="1400" dirty="0">
-                <a:solidFill>
-                  <a:srgbClr val="1B2430"/>
-                </a:solidFill>
-                <a:latin typeface="Arial" pitchFamily="34" charset="0"/>
-                <a:ea typeface="Arial" pitchFamily="34" charset="-122"/>
-                <a:cs typeface="Arial" pitchFamily="34" charset="-120"/>
-              </a:rPr>
-              <a:t>Wait for an instance before locking. Never sleep or join while holding mtx. One thread sends the parties, in queue order.</a:t>
+              <a:t>Note: Claude was used in mapping the specific line of code per number to the bullet point.</a:t>
             </a:r>
           </a:p>
         </p:txBody>
@@ -9991,7 +9889,7 @@
                 <a:ea typeface="Arial" pitchFamily="34" charset="-122"/>
                 <a:cs typeface="Arial" pitchFamily="34" charset="-120"/>
               </a:rPr>
-              <a:t>Counting semaphore: implementation</a:t>
+              <a:t>Mutex and lock_guard: implementation</a:t>
             </a:r>
             <a:endParaRPr lang="en-US" sz="2800" dirty="0">
               <a:solidFill>
@@ -10055,7 +9953,7 @@
                 <a:ea typeface="Arial" pitchFamily="34" charset="-122"/>
                 <a:cs typeface="Arial" pitchFamily="34" charset="-120"/>
               </a:rPr>
-              <a:t>freeInstances counts the free instances; main gives it n permits once the instance lists exist</a:t>
+              <a:t>One mutex, mtx, guards all shared state: status, parties served, time served and the saved error</a:t>
             </a:r>
           </a:p>
           <a:p>
@@ -10085,7 +9983,7 @@
                 <a:ea typeface="Arial" pitchFamily="34" charset="-122"/>
                 <a:cs typeface="Arial" pitchFamily="34" charset="-120"/>
               </a:rPr>
-              <a:t>Before a party enters, main takes a permit; with all n instances active, acquire() blocks until a run ends</a:t>
+              <a:t>Each status change is printed under the same lock, so every printed list is a consistent snapshot</a:t>
             </a:r>
           </a:p>
           <a:p>
@@ -10115,7 +10013,7 @@
                 <a:ea typeface="Arial" pitchFamily="34" charset="-122"/>
                 <a:cs typeface="Arial" pitchFamily="34" charset="-120"/>
               </a:rPr>
-              <a:t>So no more than n parties are ever in a dungeon at once (requirement a)</a:t>
+              <a:t>A run sleeps before it locks, so the lock is held only for a few updates and one print</a:t>
             </a:r>
           </a:p>
           <a:p>
@@ -10145,7 +10043,7 @@
                 <a:ea typeface="Arial" pitchFamily="34" charset="-122"/>
                 <a:cs typeface="Arial" pitchFamily="34" charset="-120"/>
               </a:rPr>
-              <a:t>A run returns its permit when its party clears, even after an error, so no permit is ever lost</a:t>
+              <a:t>Under the lock, pickInstance() takes the empty instance with the fewest parties served</a:t>
             </a:r>
           </a:p>
           <a:p>
@@ -10175,7 +10073,7 @@
                 <a:ea typeface="Arial" pitchFamily="34" charset="-122"/>
                 <a:cs typeface="Arial" pitchFamily="34" charset="-120"/>
               </a:rPr>
-              <a:t>If a party cannot start (e.g. no new thread could be created), undoEnter() frees its instance and returns the permit</a:t>
+              <a:t>lock_guard locks mtx and unlocks it automatically when its block ends</a:t>
             </a:r>
           </a:p>
         </p:txBody>
@@ -10189,7 +10087,7 @@
         <p:spPr>
           <a:xfrm>
             <a:off x="5504688" y="1526539"/>
-            <a:ext cx="6191504" cy="4120896"/>
+            <a:ext cx="6191504" cy="4235196"/>
           </a:xfrm>
           <a:prstGeom prst="rect">
             <a:avLst/>
@@ -10240,7 +10138,7 @@
       </p:sp>
       <p:sp>
         <p:nvSpPr>
-          <p:cNvPr id="6" name="Code highlight 1"/>
+          <p:cNvPr id="6" name="Code highlight 3"/>
           <p:cNvSpPr/>
           <p:nvPr/>
         </p:nvSpPr>
@@ -10269,13 +10167,13 @@
       </p:sp>
       <p:sp>
         <p:nvSpPr>
-          <p:cNvPr id="7" name="Code highlight 2"/>
+          <p:cNvPr id="7" name="Code highlight 5"/>
           <p:cNvSpPr/>
           <p:nvPr/>
         </p:nvSpPr>
         <p:spPr>
           <a:xfrm>
-            <a:off x="5559552" y="2710687"/>
+            <a:off x="5559552" y="2469387"/>
             <a:ext cx="6081776" cy="152400"/>
           </a:xfrm>
           <a:prstGeom prst="rect">
@@ -10298,71 +10196,13 @@
       </p:sp>
       <p:sp>
         <p:nvSpPr>
-          <p:cNvPr id="8" name="Code highlight 3"/>
+          <p:cNvPr id="8" name="Code highlight 1"/>
           <p:cNvSpPr/>
           <p:nvPr/>
         </p:nvSpPr>
         <p:spPr>
           <a:xfrm>
-            <a:off x="5559552" y="3421887"/>
-            <a:ext cx="6081776" cy="152400"/>
-          </a:xfrm>
-          <a:prstGeom prst="rect">
-            <a:avLst/>
-          </a:prstGeom>
-          <a:solidFill>
-            <a:srgbClr val="2D3C52"/>
-          </a:solidFill>
-          <a:ln>
-            <a:noFill/>
-          </a:ln>
-        </p:spPr>
-        <p:txBody>
-          <a:bodyPr rtlCol="0" anchor="ctr"/>
-          <a:lstStyle/>
-          <a:p>
-            <a:endParaRPr lang="en-US"/>
-          </a:p>
-        </p:txBody>
-      </p:sp>
-      <p:sp>
-        <p:nvSpPr>
-          <p:cNvPr id="9" name="Code highlight 4"/>
-          <p:cNvSpPr/>
-          <p:nvPr/>
-        </p:nvSpPr>
-        <p:spPr>
-          <a:xfrm>
-            <a:off x="5559552" y="4552187"/>
-            <a:ext cx="6081776" cy="152400"/>
-          </a:xfrm>
-          <a:prstGeom prst="rect">
-            <a:avLst/>
-          </a:prstGeom>
-          <a:solidFill>
-            <a:srgbClr val="2D3C52"/>
-          </a:solidFill>
-          <a:ln>
-            <a:noFill/>
-          </a:ln>
-        </p:spPr>
-        <p:txBody>
-          <a:bodyPr rtlCol="0" anchor="ctr"/>
-          <a:lstStyle/>
-          <a:p>
-            <a:endParaRPr lang="en-US"/>
-          </a:p>
-        </p:txBody>
-      </p:sp>
-      <p:sp>
-        <p:nvSpPr>
-          <p:cNvPr id="10" name="Code highlight 5"/>
-          <p:cNvSpPr/>
-          <p:nvPr/>
-        </p:nvSpPr>
-        <p:spPr>
-          <a:xfrm>
-            <a:off x="5559552" y="4971287"/>
+            <a:off x="5559552" y="2647187"/>
             <a:ext cx="6081776" cy="508000"/>
           </a:xfrm>
           <a:prstGeom prst="rect">
@@ -10385,14 +10225,101 @@
       </p:sp>
       <p:sp>
         <p:nvSpPr>
-          <p:cNvPr id="11" name="Code"/>
+          <p:cNvPr id="9" name="Code highlight 2"/>
+          <p:cNvSpPr/>
+          <p:nvPr/>
+        </p:nvSpPr>
+        <p:spPr>
+          <a:xfrm>
+            <a:off x="5559552" y="3180587"/>
+            <a:ext cx="6081776" cy="330200"/>
+          </a:xfrm>
+          <a:prstGeom prst="rect">
+            <a:avLst/>
+          </a:prstGeom>
+          <a:solidFill>
+            <a:srgbClr val="2D3C52"/>
+          </a:solidFill>
+          <a:ln>
+            <a:noFill/>
+          </a:ln>
+        </p:spPr>
+        <p:txBody>
+          <a:bodyPr rtlCol="0" anchor="ctr"/>
+          <a:lstStyle/>
+          <a:p>
+            <a:endParaRPr lang="en-US"/>
+          </a:p>
+        </p:txBody>
+      </p:sp>
+      <p:sp>
+        <p:nvSpPr>
+          <p:cNvPr id="10" name="Code highlight 2"/>
+          <p:cNvSpPr/>
+          <p:nvPr/>
+        </p:nvSpPr>
+        <p:spPr>
+          <a:xfrm>
+            <a:off x="5559552" y="3777487"/>
+            <a:ext cx="6081776" cy="508000"/>
+          </a:xfrm>
+          <a:prstGeom prst="rect">
+            <a:avLst/>
+          </a:prstGeom>
+          <a:solidFill>
+            <a:srgbClr val="2D3C52"/>
+          </a:solidFill>
+          <a:ln>
+            <a:noFill/>
+          </a:ln>
+        </p:spPr>
+        <p:txBody>
+          <a:bodyPr rtlCol="0" anchor="ctr"/>
+          <a:lstStyle/>
+          <a:p>
+            <a:endParaRPr lang="en-US"/>
+          </a:p>
+        </p:txBody>
+      </p:sp>
+      <p:sp>
+        <p:nvSpPr>
+          <p:cNvPr id="11" name="Code highlight 4"/>
+          <p:cNvSpPr/>
+          <p:nvPr/>
+        </p:nvSpPr>
+        <p:spPr>
+          <a:xfrm>
+            <a:off x="5559552" y="4729987"/>
+            <a:ext cx="6081776" cy="330200"/>
+          </a:xfrm>
+          <a:prstGeom prst="rect">
+            <a:avLst/>
+          </a:prstGeom>
+          <a:solidFill>
+            <a:srgbClr val="2D3C52"/>
+          </a:solidFill>
+          <a:ln>
+            <a:noFill/>
+          </a:ln>
+        </p:spPr>
+        <p:txBody>
+          <a:bodyPr rtlCol="0" anchor="ctr"/>
+          <a:lstStyle/>
+          <a:p>
+            <a:endParaRPr lang="en-US"/>
+          </a:p>
+        </p:txBody>
+      </p:sp>
+      <p:sp>
+        <p:nvSpPr>
+          <p:cNvPr id="12" name="Code"/>
           <p:cNvSpPr txBox="1"/>
           <p:nvPr/>
         </p:nvSpPr>
         <p:spPr>
           <a:xfrm>
             <a:off x="5925312" y="1681987"/>
-            <a:ext cx="5661152" cy="3810000"/>
+            <a:ext cx="5661152" cy="3924300"/>
           </a:xfrm>
           <a:prstGeom prst="rect">
             <a:avLst/>
@@ -10454,7 +10381,7 @@
                 <a:ea typeface="Consolas" pitchFamily="49" charset="-122"/>
                 <a:cs typeface="Consolas" pitchFamily="49" charset="-120"/>
               </a:rPr>
-              <a:t>counting_semaphore</a:t>
+              <a:t>mutex</a:t>
             </a:r>
             <a:r>
               <a:rPr lang="en-US" sz="1200" dirty="0">
@@ -10465,29 +10392,7 @@
                 <a:ea typeface="Consolas" pitchFamily="49" charset="-122"/>
                 <a:cs typeface="Consolas" pitchFamily="49" charset="-120"/>
               </a:rPr>
-              <a:t>&lt;&gt; freeInstances(</a:t>
-            </a:r>
-            <a:r>
-              <a:rPr lang="en-US" sz="1200" dirty="0">
-                <a:solidFill>
-                  <a:srgbClr val="F4B26B"/>
-                </a:solidFill>
-                <a:latin typeface="Consolas" pitchFamily="49" charset="0"/>
-                <a:ea typeface="Consolas" pitchFamily="49" charset="-122"/>
-                <a:cs typeface="Consolas" pitchFamily="49" charset="-120"/>
-              </a:rPr>
-              <a:t>0</a:t>
-            </a:r>
-            <a:r>
-              <a:rPr lang="en-US" sz="1200" dirty="0">
-                <a:solidFill>
-                  <a:srgbClr val="DCE3EE"/>
-                </a:solidFill>
-                <a:latin typeface="Consolas" pitchFamily="49" charset="0"/>
-                <a:ea typeface="Consolas" pitchFamily="49" charset="-122"/>
-                <a:cs typeface="Consolas" pitchFamily="49" charset="-120"/>
-              </a:rPr>
-              <a:t>);</a:t>
+              <a:t> mtx;</a:t>
             </a:r>
           </a:p>
           <a:p>
@@ -10512,7 +10417,7 @@
                 <a:ea typeface="Consolas" pitchFamily="49" charset="-122"/>
                 <a:cs typeface="Consolas" pitchFamily="49" charset="-120"/>
               </a:rPr>
-              <a:t>// main(): once the instance lists are allocated</a:t>
+              <a:t>// runDungeon(): the party's thread</a:t>
             </a:r>
           </a:p>
           <a:p>
@@ -10537,7 +10442,267 @@
                 <a:ea typeface="Consolas" pitchFamily="49" charset="-122"/>
                 <a:cs typeface="Consolas" pitchFamily="49" charset="-120"/>
               </a:rPr>
-              <a:t>freeInstances.release(maxInstances);</a:t>
+              <a:t>this_thread::sleep_for(chrono::seconds(clearTime));</a:t>
+            </a:r>
+          </a:p>
+          <a:p>
+            <a:pPr marL="0" indent="0" algn="l">
+              <a:lnSpc>
+                <a:spcPts val="1400"/>
+              </a:lnSpc>
+              <a:spcBef>
+                <a:spcPts val="0"/>
+              </a:spcBef>
+              <a:spcAft>
+                <a:spcPts val="0"/>
+              </a:spcAft>
+              <a:buNone/>
+            </a:pPr>
+            <a:r>
+              <a:rPr lang="en-US" sz="1200" dirty="0">
+                <a:solidFill>
+                  <a:srgbClr val="7ED3C0"/>
+                </a:solidFill>
+                <a:latin typeface="Consolas" pitchFamily="49" charset="0"/>
+                <a:ea typeface="Consolas" pitchFamily="49" charset="-122"/>
+                <a:cs typeface="Consolas" pitchFamily="49" charset="-120"/>
+              </a:rPr>
+              <a:t>lock_guard</a:t>
+            </a:r>
+            <a:r>
+              <a:rPr lang="en-US" sz="1200" dirty="0">
+                <a:solidFill>
+                  <a:srgbClr val="DCE3EE"/>
+                </a:solidFill>
+                <a:latin typeface="Consolas" pitchFamily="49" charset="0"/>
+                <a:ea typeface="Consolas" pitchFamily="49" charset="-122"/>
+                <a:cs typeface="Consolas" pitchFamily="49" charset="-120"/>
+              </a:rPr>
+              <a:t>&lt;</a:t>
+            </a:r>
+            <a:r>
+              <a:rPr lang="en-US" sz="1200" dirty="0">
+                <a:solidFill>
+                  <a:srgbClr val="7ED3C0"/>
+                </a:solidFill>
+                <a:latin typeface="Consolas" pitchFamily="49" charset="0"/>
+                <a:ea typeface="Consolas" pitchFamily="49" charset="-122"/>
+                <a:cs typeface="Consolas" pitchFamily="49" charset="-120"/>
+              </a:rPr>
+              <a:t>mutex</a:t>
+            </a:r>
+            <a:r>
+              <a:rPr lang="en-US" sz="1200" dirty="0">
+                <a:solidFill>
+                  <a:srgbClr val="DCE3EE"/>
+                </a:solidFill>
+                <a:latin typeface="Consolas" pitchFamily="49" charset="0"/>
+                <a:ea typeface="Consolas" pitchFamily="49" charset="-122"/>
+                <a:cs typeface="Consolas" pitchFamily="49" charset="-120"/>
+              </a:rPr>
+              <a:t>&gt; lock(mtx);</a:t>
+            </a:r>
+          </a:p>
+          <a:p>
+            <a:pPr marL="0" indent="0" algn="l">
+              <a:lnSpc>
+                <a:spcPts val="1400"/>
+              </a:lnSpc>
+              <a:spcBef>
+                <a:spcPts val="0"/>
+              </a:spcBef>
+              <a:spcAft>
+                <a:spcPts val="0"/>
+              </a:spcAft>
+              <a:buNone/>
+            </a:pPr>
+            <a:r>
+              <a:rPr lang="en-US" sz="1200" dirty="0">
+                <a:solidFill>
+                  <a:srgbClr val="DCE3EE"/>
+                </a:solidFill>
+                <a:latin typeface="Consolas" pitchFamily="49" charset="0"/>
+                <a:ea typeface="Consolas" pitchFamily="49" charset="-122"/>
+                <a:cs typeface="Consolas" pitchFamily="49" charset="-120"/>
+              </a:rPr>
+              <a:t>status[instance] = </a:t>
+            </a:r>
+            <a:r>
+              <a:rPr lang="en-US" sz="1200" dirty="0">
+                <a:solidFill>
+                  <a:srgbClr val="B5DCA0"/>
+                </a:solidFill>
+                <a:latin typeface="Consolas" pitchFamily="49" charset="0"/>
+                <a:ea typeface="Consolas" pitchFamily="49" charset="-122"/>
+                <a:cs typeface="Consolas" pitchFamily="49" charset="-120"/>
+              </a:rPr>
+              <a:t>"empty"</a:t>
+            </a:r>
+            <a:r>
+              <a:rPr lang="en-US" sz="1200" dirty="0">
+                <a:solidFill>
+                  <a:srgbClr val="DCE3EE"/>
+                </a:solidFill>
+                <a:latin typeface="Consolas" pitchFamily="49" charset="0"/>
+                <a:ea typeface="Consolas" pitchFamily="49" charset="-122"/>
+                <a:cs typeface="Consolas" pitchFamily="49" charset="-120"/>
+              </a:rPr>
+              <a:t>;</a:t>
+            </a:r>
+          </a:p>
+          <a:p>
+            <a:pPr marL="0" indent="0" algn="l">
+              <a:lnSpc>
+                <a:spcPts val="1400"/>
+              </a:lnSpc>
+              <a:spcBef>
+                <a:spcPts val="0"/>
+              </a:spcBef>
+              <a:spcAft>
+                <a:spcPts val="0"/>
+              </a:spcAft>
+              <a:buNone/>
+            </a:pPr>
+            <a:r>
+              <a:rPr lang="en-US" sz="1200" dirty="0">
+                <a:solidFill>
+                  <a:srgbClr val="DCE3EE"/>
+                </a:solidFill>
+                <a:latin typeface="Consolas" pitchFamily="49" charset="0"/>
+                <a:ea typeface="Consolas" pitchFamily="49" charset="-122"/>
+                <a:cs typeface="Consolas" pitchFamily="49" charset="-120"/>
+              </a:rPr>
+              <a:t>partiesServed[instance]++;</a:t>
+            </a:r>
+          </a:p>
+          <a:p>
+            <a:pPr marL="0" indent="0" algn="l">
+              <a:lnSpc>
+                <a:spcPts val="1400"/>
+              </a:lnSpc>
+              <a:spcBef>
+                <a:spcPts val="0"/>
+              </a:spcBef>
+              <a:spcAft>
+                <a:spcPts val="0"/>
+              </a:spcAft>
+              <a:buNone/>
+            </a:pPr>
+            <a:r>
+              <a:rPr lang="en-US" sz="1200" dirty="0">
+                <a:solidFill>
+                  <a:srgbClr val="DCE3EE"/>
+                </a:solidFill>
+                <a:latin typeface="Consolas" pitchFamily="49" charset="0"/>
+                <a:ea typeface="Consolas" pitchFamily="49" charset="-122"/>
+                <a:cs typeface="Consolas" pitchFamily="49" charset="-120"/>
+              </a:rPr>
+              <a:t>timeServed[instance] += clearTime;</a:t>
+            </a:r>
+          </a:p>
+          <a:p>
+            <a:pPr marL="0" indent="0" algn="l">
+              <a:lnSpc>
+                <a:spcPts val="1400"/>
+              </a:lnSpc>
+              <a:spcBef>
+                <a:spcPts val="0"/>
+              </a:spcBef>
+              <a:spcAft>
+                <a:spcPts val="0"/>
+              </a:spcAft>
+              <a:buNone/>
+            </a:pPr>
+            <a:r>
+              <a:rPr lang="en-US" sz="1200" dirty="0">
+                <a:solidFill>
+                  <a:srgbClr val="DCE3EE"/>
+                </a:solidFill>
+                <a:latin typeface="Consolas" pitchFamily="49" charset="0"/>
+                <a:ea typeface="Consolas" pitchFamily="49" charset="-122"/>
+                <a:cs typeface="Consolas" pitchFamily="49" charset="-120"/>
+              </a:rPr>
+              <a:t>printEvent(</a:t>
+            </a:r>
+            <a:r>
+              <a:rPr lang="en-US" sz="1200" dirty="0">
+                <a:solidFill>
+                  <a:srgbClr val="B5DCA0"/>
+                </a:solidFill>
+                <a:latin typeface="Consolas" pitchFamily="49" charset="0"/>
+                <a:ea typeface="Consolas" pitchFamily="49" charset="-122"/>
+                <a:cs typeface="Consolas" pitchFamily="49" charset="-120"/>
+              </a:rPr>
+              <a:t>"Party "</a:t>
+            </a:r>
+            <a:r>
+              <a:rPr lang="en-US" sz="1200" dirty="0">
+                <a:solidFill>
+                  <a:srgbClr val="DCE3EE"/>
+                </a:solidFill>
+                <a:latin typeface="Consolas" pitchFamily="49" charset="0"/>
+                <a:ea typeface="Consolas" pitchFamily="49" charset="-122"/>
+                <a:cs typeface="Consolas" pitchFamily="49" charset="-120"/>
+              </a:rPr>
+              <a:t> + to_string(party) + </a:t>
+            </a:r>
+            <a:r>
+              <a:rPr lang="en-US" sz="1200" dirty="0">
+                <a:solidFill>
+                  <a:srgbClr val="B5DCA0"/>
+                </a:solidFill>
+                <a:latin typeface="Consolas" pitchFamily="49" charset="0"/>
+                <a:ea typeface="Consolas" pitchFamily="49" charset="-122"/>
+                <a:cs typeface="Consolas" pitchFamily="49" charset="-120"/>
+              </a:rPr>
+              <a:t>" cleared Instance "</a:t>
+            </a:r>
+          </a:p>
+          <a:p>
+            <a:pPr marL="0" indent="0" algn="l">
+              <a:lnSpc>
+                <a:spcPts val="1400"/>
+              </a:lnSpc>
+              <a:spcBef>
+                <a:spcPts val="0"/>
+              </a:spcBef>
+              <a:spcAft>
+                <a:spcPts val="0"/>
+              </a:spcAft>
+              <a:buNone/>
+            </a:pPr>
+            <a:r>
+              <a:rPr lang="en-US" sz="1200" dirty="0">
+                <a:solidFill>
+                  <a:srgbClr val="DCE3EE"/>
+                </a:solidFill>
+                <a:latin typeface="Consolas" pitchFamily="49" charset="0"/>
+                <a:ea typeface="Consolas" pitchFamily="49" charset="-122"/>
+                <a:cs typeface="Consolas" pitchFamily="49" charset="-120"/>
+              </a:rPr>
+              <a:t>           + to_string(instance + </a:t>
+            </a:r>
+            <a:r>
+              <a:rPr lang="en-US" sz="1200" dirty="0">
+                <a:solidFill>
+                  <a:srgbClr val="F4B26B"/>
+                </a:solidFill>
+                <a:latin typeface="Consolas" pitchFamily="49" charset="0"/>
+                <a:ea typeface="Consolas" pitchFamily="49" charset="-122"/>
+                <a:cs typeface="Consolas" pitchFamily="49" charset="-120"/>
+              </a:rPr>
+              <a:t>1</a:t>
+            </a:r>
+            <a:r>
+              <a:rPr lang="en-US" sz="1200" dirty="0">
+                <a:solidFill>
+                  <a:srgbClr val="DCE3EE"/>
+                </a:solidFill>
+                <a:latin typeface="Consolas" pitchFamily="49" charset="0"/>
+                <a:ea typeface="Consolas" pitchFamily="49" charset="-122"/>
+                <a:cs typeface="Consolas" pitchFamily="49" charset="-120"/>
+              </a:rPr>
+              <a:t>));</a:t>
             </a:r>
           </a:p>
           <a:p>
@@ -10562,7 +10727,7 @@
                 <a:ea typeface="Consolas" pitchFamily="49" charset="-122"/>
                 <a:cs typeface="Consolas" pitchFamily="49" charset="-120"/>
               </a:rPr>
-              <a:t>// enterDungeon(): main thread, once per party</a:t>
+              <a:t>// printEvent(): only call this while holding mtx</a:t>
             </a:r>
           </a:p>
           <a:p>
@@ -10587,7 +10752,62 @@
                 <a:ea typeface="Consolas" pitchFamily="49" charset="-122"/>
                 <a:cs typeface="Consolas" pitchFamily="49" charset="-120"/>
               </a:rPr>
-              <a:t>freeInstances.acquire();</a:t>
+              <a:t>cout &lt;&lt; </a:t>
+            </a:r>
+            <a:r>
+              <a:rPr lang="en-US" sz="1200" dirty="0">
+                <a:solidFill>
+                  <a:srgbClr val="B5DCA0"/>
+                </a:solidFill>
+                <a:latin typeface="Consolas" pitchFamily="49" charset="0"/>
+                <a:ea typeface="Consolas" pitchFamily="49" charset="-122"/>
+                <a:cs typeface="Consolas" pitchFamily="49" charset="-120"/>
+              </a:rPr>
+              <a:t>"["</a:t>
+            </a:r>
+            <a:r>
+              <a:rPr lang="en-US" sz="1200" dirty="0">
+                <a:solidFill>
+                  <a:srgbClr val="DCE3EE"/>
+                </a:solidFill>
+                <a:latin typeface="Consolas" pitchFamily="49" charset="0"/>
+                <a:ea typeface="Consolas" pitchFamily="49" charset="-122"/>
+                <a:cs typeface="Consolas" pitchFamily="49" charset="-120"/>
+              </a:rPr>
+              <a:t> &lt;&lt; fixed &lt;&lt; setprecision(</a:t>
+            </a:r>
+            <a:r>
+              <a:rPr lang="en-US" sz="1200" dirty="0">
+                <a:solidFill>
+                  <a:srgbClr val="F4B26B"/>
+                </a:solidFill>
+                <a:latin typeface="Consolas" pitchFamily="49" charset="0"/>
+                <a:ea typeface="Consolas" pitchFamily="49" charset="-122"/>
+                <a:cs typeface="Consolas" pitchFamily="49" charset="-120"/>
+              </a:rPr>
+              <a:t>1</a:t>
+            </a:r>
+            <a:r>
+              <a:rPr lang="en-US" sz="1200" dirty="0">
+                <a:solidFill>
+                  <a:srgbClr val="DCE3EE"/>
+                </a:solidFill>
+                <a:latin typeface="Consolas" pitchFamily="49" charset="0"/>
+                <a:ea typeface="Consolas" pitchFamily="49" charset="-122"/>
+                <a:cs typeface="Consolas" pitchFamily="49" charset="-120"/>
+              </a:rPr>
+              <a:t>) &lt;&lt; elapsed() &lt;&lt; </a:t>
+            </a:r>
+            <a:r>
+              <a:rPr lang="en-US" sz="1200" dirty="0">
+                <a:solidFill>
+                  <a:srgbClr val="B5DCA0"/>
+                </a:solidFill>
+                <a:latin typeface="Consolas" pitchFamily="49" charset="0"/>
+                <a:ea typeface="Consolas" pitchFamily="49" charset="-122"/>
+                <a:cs typeface="Consolas" pitchFamily="49" charset="-120"/>
+              </a:rPr>
+              <a:t>"s] "</a:t>
             </a:r>
           </a:p>
           <a:p>
@@ -10612,7 +10832,29 @@
                 <a:ea typeface="Consolas" pitchFamily="49" charset="-122"/>
                 <a:cs typeface="Consolas" pitchFamily="49" charset="-120"/>
               </a:rPr>
-              <a:t>...</a:t>
+              <a:t>     &lt;&lt; message &lt;&lt; </a:t>
+            </a:r>
+            <a:r>
+              <a:rPr lang="en-US" sz="1200" dirty="0">
+                <a:solidFill>
+                  <a:srgbClr val="B5DCA0"/>
+                </a:solidFill>
+                <a:latin typeface="Consolas" pitchFamily="49" charset="0"/>
+                <a:ea typeface="Consolas" pitchFamily="49" charset="-122"/>
+                <a:cs typeface="Consolas" pitchFamily="49" charset="-120"/>
+              </a:rPr>
+              <a:t>"\n"</a:t>
+            </a:r>
+            <a:r>
+              <a:rPr lang="en-US" sz="1200" dirty="0">
+                <a:solidFill>
+                  <a:srgbClr val="DCE3EE"/>
+                </a:solidFill>
+                <a:latin typeface="Consolas" pitchFamily="49" charset="0"/>
+                <a:ea typeface="Consolas" pitchFamily="49" charset="-122"/>
+                <a:cs typeface="Consolas" pitchFamily="49" charset="-120"/>
+              </a:rPr>
+              <a:t>;</a:t>
             </a:r>
           </a:p>
           <a:p>
@@ -10631,118 +10873,13 @@
             <a:r>
               <a:rPr lang="en-US" sz="1200" dirty="0">
                 <a:solidFill>
-                  <a:srgbClr val="7ED3C0"/>
-                </a:solidFill>
-                <a:latin typeface="Consolas" pitchFamily="49" charset="0"/>
-                <a:ea typeface="Consolas" pitchFamily="49" charset="-122"/>
-                <a:cs typeface="Consolas" pitchFamily="49" charset="-120"/>
-              </a:rPr>
-              <a:t>lock_guard</a:t>
-            </a:r>
-            <a:r>
-              <a:rPr lang="en-US" sz="1200" dirty="0">
-                <a:solidFill>
                   <a:srgbClr val="DCE3EE"/>
                 </a:solidFill>
                 <a:latin typeface="Consolas" pitchFamily="49" charset="0"/>
                 <a:ea typeface="Consolas" pitchFamily="49" charset="-122"/>
                 <a:cs typeface="Consolas" pitchFamily="49" charset="-120"/>
               </a:rPr>
-              <a:t>&lt;</a:t>
-            </a:r>
-            <a:r>
-              <a:rPr lang="en-US" sz="1200" dirty="0">
-                <a:solidFill>
-                  <a:srgbClr val="7ED3C0"/>
-                </a:solidFill>
-                <a:latin typeface="Consolas" pitchFamily="49" charset="0"/>
-                <a:ea typeface="Consolas" pitchFamily="49" charset="-122"/>
-                <a:cs typeface="Consolas" pitchFamily="49" charset="-120"/>
-              </a:rPr>
-              <a:t>mutex</a:t>
-            </a:r>
-            <a:r>
-              <a:rPr lang="en-US" sz="1200" dirty="0">
-                <a:solidFill>
-                  <a:srgbClr val="DCE3EE"/>
-                </a:solidFill>
-                <a:latin typeface="Consolas" pitchFamily="49" charset="0"/>
-                <a:ea typeface="Consolas" pitchFamily="49" charset="-122"/>
-                <a:cs typeface="Consolas" pitchFamily="49" charset="-120"/>
-              </a:rPr>
-              <a:t>&gt; lock(mtx);</a:t>
-            </a:r>
-          </a:p>
-          <a:p>
-            <a:pPr marL="0" indent="0" algn="l">
-              <a:lnSpc>
-                <a:spcPts val="1400"/>
-              </a:lnSpc>
-              <a:spcBef>
-                <a:spcPts val="0"/>
-              </a:spcBef>
-              <a:spcAft>
-                <a:spcPts val="0"/>
-              </a:spcAft>
-              <a:buNone/>
-            </a:pPr>
-            <a:r>
-              <a:rPr lang="en-US" sz="1200" dirty="0">
-                <a:solidFill>
-                  <a:srgbClr val="DCE3EE"/>
-                </a:solidFill>
-                <a:latin typeface="Consolas" pitchFamily="49" charset="0"/>
-                <a:ea typeface="Consolas" pitchFamily="49" charset="-122"/>
-                <a:cs typeface="Consolas" pitchFamily="49" charset="-120"/>
-              </a:rPr>
-              <a:t>instance = pickInstance();</a:t>
-            </a:r>
-          </a:p>
-          <a:p>
-            <a:pPr marL="0" indent="0" algn="l">
-              <a:lnSpc>
-                <a:spcPts val="1400"/>
-              </a:lnSpc>
-              <a:spcBef>
-                <a:spcPts val="0"/>
-              </a:spcBef>
-              <a:spcAft>
-                <a:spcPts val="0"/>
-              </a:spcAft>
-              <a:buNone/>
-            </a:pPr>
-            <a:r>
-              <a:rPr lang="en-US" sz="1200" dirty="0">
-                <a:solidFill>
-                  <a:srgbClr val="DCE3EE"/>
-                </a:solidFill>
-                <a:latin typeface="Consolas" pitchFamily="49" charset="0"/>
-                <a:ea typeface="Consolas" pitchFamily="49" charset="-122"/>
-                <a:cs typeface="Consolas" pitchFamily="49" charset="-120"/>
-              </a:rPr>
-              <a:t>status[instance] = </a:t>
-            </a:r>
-            <a:r>
-              <a:rPr lang="en-US" sz="1200" dirty="0">
-                <a:solidFill>
-                  <a:srgbClr val="B5DCA0"/>
-                </a:solidFill>
-                <a:latin typeface="Consolas" pitchFamily="49" charset="0"/>
-                <a:ea typeface="Consolas" pitchFamily="49" charset="-122"/>
-                <a:cs typeface="Consolas" pitchFamily="49" charset="-120"/>
-              </a:rPr>
-              <a:t>"active"</a:t>
-            </a:r>
-            <a:r>
-              <a:rPr lang="en-US" sz="1200" dirty="0">
-                <a:solidFill>
-                  <a:srgbClr val="DCE3EE"/>
-                </a:solidFill>
-                <a:latin typeface="Consolas" pitchFamily="49" charset="0"/>
-                <a:ea typeface="Consolas" pitchFamily="49" charset="-122"/>
-                <a:cs typeface="Consolas" pitchFamily="49" charset="-120"/>
-              </a:rPr>
-              <a:t>;</a:t>
+              <a:t>printStatus();</a:t>
             </a:r>
           </a:p>
           <a:p>
@@ -10767,7 +10904,7 @@
                 <a:ea typeface="Consolas" pitchFamily="49" charset="-122"/>
                 <a:cs typeface="Consolas" pitchFamily="49" charset="-120"/>
               </a:rPr>
-              <a:t>// runDungeon(): the party's thread</a:t>
+              <a:t>// pickInstance(): the empty instance with the fewest parties</a:t>
             </a:r>
           </a:p>
           <a:p>
@@ -10786,13 +10923,68 @@
             <a:r>
               <a:rPr lang="en-US" sz="1200" dirty="0">
                 <a:solidFill>
+                  <a:srgbClr val="8EC1F5"/>
+                </a:solidFill>
+                <a:latin typeface="Consolas" pitchFamily="49" charset="0"/>
+                <a:ea typeface="Consolas" pitchFamily="49" charset="-122"/>
+                <a:cs typeface="Consolas" pitchFamily="49" charset="-120"/>
+              </a:rPr>
+              <a:t>for</a:t>
+            </a:r>
+            <a:r>
+              <a:rPr lang="en-US" sz="1200" dirty="0">
+                <a:solidFill>
                   <a:srgbClr val="DCE3EE"/>
                 </a:solidFill>
                 <a:latin typeface="Consolas" pitchFamily="49" charset="0"/>
                 <a:ea typeface="Consolas" pitchFamily="49" charset="-122"/>
                 <a:cs typeface="Consolas" pitchFamily="49" charset="-120"/>
               </a:rPr>
-              <a:t>this_thread::sleep_for(chrono::seconds(clearTime));</a:t>
+              <a:t> (</a:t>
+            </a:r>
+            <a:r>
+              <a:rPr lang="en-US" sz="1200" dirty="0">
+                <a:solidFill>
+                  <a:srgbClr val="7ED3C0"/>
+                </a:solidFill>
+                <a:latin typeface="Consolas" pitchFamily="49" charset="0"/>
+                <a:ea typeface="Consolas" pitchFamily="49" charset="-122"/>
+                <a:cs typeface="Consolas" pitchFamily="49" charset="-120"/>
+              </a:rPr>
+              <a:t>int</a:t>
+            </a:r>
+            <a:r>
+              <a:rPr lang="en-US" sz="1200" dirty="0">
+                <a:solidFill>
+                  <a:srgbClr val="DCE3EE"/>
+                </a:solidFill>
+                <a:latin typeface="Consolas" pitchFamily="49" charset="0"/>
+                <a:ea typeface="Consolas" pitchFamily="49" charset="-122"/>
+                <a:cs typeface="Consolas" pitchFamily="49" charset="-120"/>
+              </a:rPr>
+              <a:t> i = </a:t>
+            </a:r>
+            <a:r>
+              <a:rPr lang="en-US" sz="1200" dirty="0">
+                <a:solidFill>
+                  <a:srgbClr val="F4B26B"/>
+                </a:solidFill>
+                <a:latin typeface="Consolas" pitchFamily="49" charset="0"/>
+                <a:ea typeface="Consolas" pitchFamily="49" charset="-122"/>
+                <a:cs typeface="Consolas" pitchFamily="49" charset="-120"/>
+              </a:rPr>
+              <a:t>0</a:t>
+            </a:r>
+            <a:r>
+              <a:rPr lang="en-US" sz="1200" dirty="0">
+                <a:solidFill>
+                  <a:srgbClr val="DCE3EE"/>
+                </a:solidFill>
+                <a:latin typeface="Consolas" pitchFamily="49" charset="0"/>
+                <a:ea typeface="Consolas" pitchFamily="49" charset="-122"/>
+                <a:cs typeface="Consolas" pitchFamily="49" charset="-120"/>
+              </a:rPr>
+              <a:t>; i &lt; maxInstances; i++) {</a:t>
             </a:r>
           </a:p>
           <a:p>
@@ -10817,7 +11009,73 @@
                 <a:ea typeface="Consolas" pitchFamily="49" charset="-122"/>
                 <a:cs typeface="Consolas" pitchFamily="49" charset="-120"/>
               </a:rPr>
-              <a:t>...</a:t>
+              <a:t>  </a:t>
+            </a:r>
+            <a:r>
+              <a:rPr lang="en-US" sz="1200" dirty="0">
+                <a:solidFill>
+                  <a:srgbClr val="8EC1F5"/>
+                </a:solidFill>
+                <a:latin typeface="Consolas" pitchFamily="49" charset="0"/>
+                <a:ea typeface="Consolas" pitchFamily="49" charset="-122"/>
+                <a:cs typeface="Consolas" pitchFamily="49" charset="-120"/>
+              </a:rPr>
+              <a:t>if</a:t>
+            </a:r>
+            <a:r>
+              <a:rPr lang="en-US" sz="1200" dirty="0">
+                <a:solidFill>
+                  <a:srgbClr val="DCE3EE"/>
+                </a:solidFill>
+                <a:latin typeface="Consolas" pitchFamily="49" charset="0"/>
+                <a:ea typeface="Consolas" pitchFamily="49" charset="-122"/>
+                <a:cs typeface="Consolas" pitchFamily="49" charset="-120"/>
+              </a:rPr>
+              <a:t> (status[i] == </a:t>
+            </a:r>
+            <a:r>
+              <a:rPr lang="en-US" sz="1200" dirty="0">
+                <a:solidFill>
+                  <a:srgbClr val="B5DCA0"/>
+                </a:solidFill>
+                <a:latin typeface="Consolas" pitchFamily="49" charset="0"/>
+                <a:ea typeface="Consolas" pitchFamily="49" charset="-122"/>
+                <a:cs typeface="Consolas" pitchFamily="49" charset="-120"/>
+              </a:rPr>
+              <a:t>"empty"</a:t>
+            </a:r>
+            <a:r>
+              <a:rPr lang="en-US" sz="1200" dirty="0">
+                <a:solidFill>
+                  <a:srgbClr val="DCE3EE"/>
+                </a:solidFill>
+                <a:latin typeface="Consolas" pitchFamily="49" charset="0"/>
+                <a:ea typeface="Consolas" pitchFamily="49" charset="-122"/>
+                <a:cs typeface="Consolas" pitchFamily="49" charset="-120"/>
+              </a:rPr>
+              <a:t> &amp;&amp; (best == -</a:t>
+            </a:r>
+            <a:r>
+              <a:rPr lang="en-US" sz="1200" dirty="0">
+                <a:solidFill>
+                  <a:srgbClr val="F4B26B"/>
+                </a:solidFill>
+                <a:latin typeface="Consolas" pitchFamily="49" charset="0"/>
+                <a:ea typeface="Consolas" pitchFamily="49" charset="-122"/>
+                <a:cs typeface="Consolas" pitchFamily="49" charset="-120"/>
+              </a:rPr>
+              <a:t>1</a:t>
+            </a:r>
+            <a:r>
+              <a:rPr lang="en-US" sz="1200" dirty="0">
+                <a:solidFill>
+                  <a:srgbClr val="DCE3EE"/>
+                </a:solidFill>
+                <a:latin typeface="Consolas" pitchFamily="49" charset="0"/>
+                <a:ea typeface="Consolas" pitchFamily="49" charset="-122"/>
+                <a:cs typeface="Consolas" pitchFamily="49" charset="-120"/>
+              </a:rPr>
+              <a:t> ||</a:t>
             </a:r>
           </a:p>
           <a:p>
@@ -10834,15 +11092,15 @@
               <a:buNone/>
             </a:pPr>
             <a:r>
-              <a:rPr lang="en-US" sz="1200" i="1" dirty="0">
-                <a:solidFill>
-                  <a:srgbClr val="A3B0C2"/>
-                </a:solidFill>
-                <a:latin typeface="Consolas" pitchFamily="49" charset="0"/>
-                <a:ea typeface="Consolas" pitchFamily="49" charset="-122"/>
-                <a:cs typeface="Consolas" pitchFamily="49" charset="-120"/>
-              </a:rPr>
-              <a:t>// give the instance back even after an error,</a:t>
+              <a:rPr lang="en-US" sz="1200" dirty="0">
+                <a:solidFill>
+                  <a:srgbClr val="DCE3EE"/>
+                </a:solidFill>
+                <a:latin typeface="Consolas" pitchFamily="49" charset="0"/>
+                <a:ea typeface="Consolas" pitchFamily="49" charset="-122"/>
+                <a:cs typeface="Consolas" pitchFamily="49" charset="-120"/>
+              </a:rPr>
+              <a:t>      partiesServed[i] &lt; partiesServed[best])) {</a:t>
             </a:r>
           </a:p>
           <a:p>
@@ -10859,15 +11117,15 @@
               <a:buNone/>
             </a:pPr>
             <a:r>
-              <a:rPr lang="en-US" sz="1200" i="1" dirty="0">
-                <a:solidFill>
-                  <a:srgbClr val="A3B0C2"/>
-                </a:solidFill>
-                <a:latin typeface="Consolas" pitchFamily="49" charset="0"/>
-                <a:ea typeface="Consolas" pitchFamily="49" charset="-122"/>
-                <a:cs typeface="Consolas" pitchFamily="49" charset="-120"/>
-              </a:rPr>
-              <a:t>// otherwise enterDungeon could wait for it forever</a:t>
+              <a:rPr lang="en-US" sz="1200" dirty="0">
+                <a:solidFill>
+                  <a:srgbClr val="DCE3EE"/>
+                </a:solidFill>
+                <a:latin typeface="Consolas" pitchFamily="49" charset="0"/>
+                <a:ea typeface="Consolas" pitchFamily="49" charset="-122"/>
+                <a:cs typeface="Consolas" pitchFamily="49" charset="-120"/>
+              </a:rPr>
+              <a:t>    best = i;</a:t>
             </a:r>
           </a:p>
           <a:p>
@@ -10892,7 +11150,7 @@
                 <a:ea typeface="Consolas" pitchFamily="49" charset="-122"/>
                 <a:cs typeface="Consolas" pitchFamily="49" charset="-120"/>
               </a:rPr>
-              <a:t>freeInstances.release();</a:t>
+              <a:t>  }</a:t>
             </a:r>
           </a:p>
           <a:p>
@@ -10901,7 +11159,7 @@
                 <a:spcPts val="1400"/>
               </a:lnSpc>
               <a:spcBef>
-                <a:spcPts val="500"/>
+                <a:spcPts val="0"/>
               </a:spcBef>
               <a:spcAft>
                 <a:spcPts val="0"/>
@@ -10909,31 +11167,6 @@
               <a:buNone/>
             </a:pPr>
             <a:r>
-              <a:rPr lang="en-US" sz="1200" i="1" dirty="0">
-                <a:solidFill>
-                  <a:srgbClr val="A3B0C2"/>
-                </a:solidFill>
-                <a:latin typeface="Consolas" pitchFamily="49" charset="0"/>
-                <a:ea typeface="Consolas" pitchFamily="49" charset="-122"/>
-                <a:cs typeface="Consolas" pitchFamily="49" charset="-120"/>
-              </a:rPr>
-              <a:t>// undoEnter(): the party never started</a:t>
-            </a:r>
-          </a:p>
-          <a:p>
-            <a:pPr marL="0" indent="0" algn="l">
-              <a:lnSpc>
-                <a:spcPts val="1400"/>
-              </a:lnSpc>
-              <a:spcBef>
-                <a:spcPts val="0"/>
-              </a:spcBef>
-              <a:spcAft>
-                <a:spcPts val="0"/>
-              </a:spcAft>
-              <a:buNone/>
-            </a:pPr>
-            <a:r>
               <a:rPr lang="en-US" sz="1200" dirty="0">
                 <a:solidFill>
                   <a:srgbClr val="DCE3EE"/>
@@ -10942,86 +11175,14 @@
                 <a:ea typeface="Consolas" pitchFamily="49" charset="-122"/>
                 <a:cs typeface="Consolas" pitchFamily="49" charset="-120"/>
               </a:rPr>
-              <a:t>status[instance] = </a:t>
-            </a:r>
-            <a:r>
-              <a:rPr lang="en-US" sz="1200" dirty="0">
-                <a:solidFill>
-                  <a:srgbClr val="B5DCA0"/>
-                </a:solidFill>
-                <a:latin typeface="Consolas" pitchFamily="49" charset="0"/>
-                <a:ea typeface="Consolas" pitchFamily="49" charset="-122"/>
-                <a:cs typeface="Consolas" pitchFamily="49" charset="-120"/>
-              </a:rPr>
-              <a:t>"empty"</a:t>
-            </a:r>
-            <a:r>
-              <a:rPr lang="en-US" sz="1200" dirty="0">
-                <a:solidFill>
-                  <a:srgbClr val="DCE3EE"/>
-                </a:solidFill>
-                <a:latin typeface="Consolas" pitchFamily="49" charset="0"/>
-                <a:ea typeface="Consolas" pitchFamily="49" charset="-122"/>
-                <a:cs typeface="Consolas" pitchFamily="49" charset="-120"/>
-              </a:rPr>
-              <a:t>;</a:t>
-            </a:r>
-          </a:p>
-          <a:p>
-            <a:pPr marL="0" indent="0" algn="l">
-              <a:lnSpc>
-                <a:spcPts val="1400"/>
-              </a:lnSpc>
-              <a:spcBef>
-                <a:spcPts val="0"/>
-              </a:spcBef>
-              <a:spcAft>
-                <a:spcPts val="0"/>
-              </a:spcAft>
-              <a:buNone/>
-            </a:pPr>
-            <a:r>
-              <a:rPr lang="en-US" sz="1200" dirty="0">
-                <a:solidFill>
-                  <a:srgbClr val="DCE3EE"/>
-                </a:solidFill>
-                <a:latin typeface="Consolas" pitchFamily="49" charset="0"/>
-                <a:ea typeface="Consolas" pitchFamily="49" charset="-122"/>
-                <a:cs typeface="Consolas" pitchFamily="49" charset="-120"/>
-              </a:rPr>
-              <a:t>...</a:t>
-            </a:r>
-          </a:p>
-          <a:p>
-            <a:pPr marL="0" indent="0" algn="l">
-              <a:lnSpc>
-                <a:spcPts val="1400"/>
-              </a:lnSpc>
-              <a:spcBef>
-                <a:spcPts val="0"/>
-              </a:spcBef>
-              <a:spcAft>
-                <a:spcPts val="0"/>
-              </a:spcAft>
-              <a:buNone/>
-            </a:pPr>
-            <a:r>
-              <a:rPr lang="en-US" sz="1200" dirty="0">
-                <a:solidFill>
-                  <a:srgbClr val="DCE3EE"/>
-                </a:solidFill>
-                <a:latin typeface="Consolas" pitchFamily="49" charset="0"/>
-                <a:ea typeface="Consolas" pitchFamily="49" charset="-122"/>
-                <a:cs typeface="Consolas" pitchFamily="49" charset="-120"/>
-              </a:rPr>
-              <a:t>freeInstances.release();</a:t>
-            </a:r>
-          </a:p>
-        </p:txBody>
-      </p:sp>
-      <p:sp>
-        <p:nvSpPr>
-          <p:cNvPr id="12" name="Code badge 1"/>
+              <a:t>}</a:t>
+            </a:r>
+          </a:p>
+        </p:txBody>
+      </p:sp>
+      <p:sp>
+        <p:nvSpPr>
+          <p:cNvPr id="13" name="Code badge 1"/>
           <p:cNvSpPr/>
           <p:nvPr/>
         </p:nvSpPr>
@@ -11061,7 +11222,7 @@
       </p:sp>
       <p:sp>
         <p:nvSpPr>
-          <p:cNvPr id="13" name="Code badge 1"/>
+          <p:cNvPr id="14" name="Code badge 3"/>
           <p:cNvSpPr/>
           <p:nvPr/>
         </p:nvSpPr>
@@ -11094,1673 +11255,6 @@
                 <a:ea typeface="Arial" pitchFamily="34" charset="-122"/>
                 <a:cs typeface="Arial" pitchFamily="34" charset="-120"/>
               </a:rPr>
-              <a:t>1</a:t>
-            </a:r>
-          </a:p>
-        </p:txBody>
-      </p:sp>
-      <p:sp>
-        <p:nvSpPr>
-          <p:cNvPr id="14" name="Code badge 2"/>
-          <p:cNvSpPr/>
-          <p:nvPr/>
-        </p:nvSpPr>
-        <p:spPr>
-          <a:xfrm>
-            <a:off x="5623560" y="2706877"/>
-            <a:ext cx="160020" cy="160020"/>
-          </a:xfrm>
-          <a:prstGeom prst="ellipse">
-            <a:avLst/>
-          </a:prstGeom>
-          <a:solidFill>
-            <a:srgbClr val="C2410C"/>
-          </a:solidFill>
-          <a:ln>
-            <a:noFill/>
-          </a:ln>
-        </p:spPr>
-        <p:txBody>
-          <a:bodyPr wrap="none" lIns="0" tIns="0" rIns="0" bIns="0" rtlCol="0" anchor="ctr"/>
-          <a:lstStyle/>
-          <a:p>
-            <a:pPr algn="ctr"/>
-            <a:r>
-              <a:rPr lang="en-US" sz="881" b="1" dirty="0">
-                <a:solidFill>
-                  <a:srgbClr val="FFFFFF"/>
-                </a:solidFill>
-                <a:latin typeface="Arial" pitchFamily="34" charset="0"/>
-                <a:ea typeface="Arial" pitchFamily="34" charset="-122"/>
-                <a:cs typeface="Arial" pitchFamily="34" charset="-120"/>
-              </a:rPr>
-              <a:t>2</a:t>
-            </a:r>
-          </a:p>
-        </p:txBody>
-      </p:sp>
-      <p:sp>
-        <p:nvSpPr>
-          <p:cNvPr id="15" name="Code badge 3"/>
-          <p:cNvSpPr/>
-          <p:nvPr/>
-        </p:nvSpPr>
-        <p:spPr>
-          <a:xfrm>
-            <a:off x="5623560" y="3418077"/>
-            <a:ext cx="160020" cy="160020"/>
-          </a:xfrm>
-          <a:prstGeom prst="ellipse">
-            <a:avLst/>
-          </a:prstGeom>
-          <a:solidFill>
-            <a:srgbClr val="C2410C"/>
-          </a:solidFill>
-          <a:ln>
-            <a:noFill/>
-          </a:ln>
-        </p:spPr>
-        <p:txBody>
-          <a:bodyPr wrap="none" lIns="0" tIns="0" rIns="0" bIns="0" rtlCol="0" anchor="ctr"/>
-          <a:lstStyle/>
-          <a:p>
-            <a:pPr algn="ctr"/>
-            <a:r>
-              <a:rPr lang="en-US" sz="881" b="1" dirty="0">
-                <a:solidFill>
-                  <a:srgbClr val="FFFFFF"/>
-                </a:solidFill>
-                <a:latin typeface="Arial" pitchFamily="34" charset="0"/>
-                <a:ea typeface="Arial" pitchFamily="34" charset="-122"/>
-                <a:cs typeface="Arial" pitchFamily="34" charset="-120"/>
-              </a:rPr>
-              <a:t>3</a:t>
-            </a:r>
-          </a:p>
-        </p:txBody>
-      </p:sp>
-      <p:sp>
-        <p:nvSpPr>
-          <p:cNvPr id="16" name="Code badge 4"/>
-          <p:cNvSpPr/>
-          <p:nvPr/>
-        </p:nvSpPr>
-        <p:spPr>
-          <a:xfrm>
-            <a:off x="5623560" y="4548377"/>
-            <a:ext cx="160020" cy="160020"/>
-          </a:xfrm>
-          <a:prstGeom prst="ellipse">
-            <a:avLst/>
-          </a:prstGeom>
-          <a:solidFill>
-            <a:srgbClr val="C2410C"/>
-          </a:solidFill>
-          <a:ln>
-            <a:noFill/>
-          </a:ln>
-        </p:spPr>
-        <p:txBody>
-          <a:bodyPr wrap="none" lIns="0" tIns="0" rIns="0" bIns="0" rtlCol="0" anchor="ctr"/>
-          <a:lstStyle/>
-          <a:p>
-            <a:pPr algn="ctr"/>
-            <a:r>
-              <a:rPr lang="en-US" sz="881" b="1" dirty="0">
-                <a:solidFill>
-                  <a:srgbClr val="FFFFFF"/>
-                </a:solidFill>
-                <a:latin typeface="Arial" pitchFamily="34" charset="0"/>
-                <a:ea typeface="Arial" pitchFamily="34" charset="-122"/>
-                <a:cs typeface="Arial" pitchFamily="34" charset="-120"/>
-              </a:rPr>
-              <a:t>4</a:t>
-            </a:r>
-          </a:p>
-        </p:txBody>
-      </p:sp>
-      <p:sp>
-        <p:nvSpPr>
-          <p:cNvPr id="17" name="Code badge 5"/>
-          <p:cNvSpPr/>
-          <p:nvPr/>
-        </p:nvSpPr>
-        <p:spPr>
-          <a:xfrm>
-            <a:off x="5623560" y="4967477"/>
-            <a:ext cx="160020" cy="160020"/>
-          </a:xfrm>
-          <a:prstGeom prst="ellipse">
-            <a:avLst/>
-          </a:prstGeom>
-          <a:solidFill>
-            <a:srgbClr val="C2410C"/>
-          </a:solidFill>
-          <a:ln>
-            <a:noFill/>
-          </a:ln>
-        </p:spPr>
-        <p:txBody>
-          <a:bodyPr wrap="none" lIns="0" tIns="0" rIns="0" bIns="0" rtlCol="0" anchor="ctr"/>
-          <a:lstStyle/>
-          <a:p>
-            <a:pPr algn="ctr"/>
-            <a:r>
-              <a:rPr lang="en-US" sz="881" b="1" dirty="0">
-                <a:solidFill>
-                  <a:srgbClr val="FFFFFF"/>
-                </a:solidFill>
-                <a:latin typeface="Arial" pitchFamily="34" charset="0"/>
-                <a:ea typeface="Arial" pitchFamily="34" charset="-122"/>
-                <a:cs typeface="Arial" pitchFamily="34" charset="-120"/>
-              </a:rPr>
-              <a:t>5</a:t>
-            </a:r>
-          </a:p>
-        </p:txBody>
-      </p:sp>
-      <p:sp>
-        <p:nvSpPr>
-          <p:cNvPr id="18" name="Code caption"/>
-          <p:cNvSpPr txBox="1"/>
-          <p:nvPr/>
-        </p:nvSpPr>
-        <p:spPr>
-          <a:xfrm>
-            <a:off x="5504688" y="5720587"/>
-            <a:ext cx="6191504" cy="603504"/>
-          </a:xfrm>
-          <a:prstGeom prst="rect">
-            <a:avLst/>
-          </a:prstGeom>
-          <a:noFill/>
-          <a:ln>
-            <a:noFill/>
-          </a:ln>
-        </p:spPr>
-        <p:txBody>
-          <a:bodyPr wrap="square" lIns="0" tIns="0" rIns="0" bIns="0" rtlCol="0" anchor="t">
-            <a:noAutofit/>
-          </a:bodyPr>
-          <a:lstStyle/>
-          <a:p>
-            <a:pPr algn="l"/>
-            <a:r>
-              <a:rPr lang="en-US" sz="1100" dirty="0">
-                <a:solidFill>
-                  <a:srgbClr val="5A6675"/>
-                </a:solidFill>
-                <a:latin typeface="Arial" pitchFamily="34" charset="0"/>
-                <a:ea typeface="Arial" pitchFamily="34" charset="-122"/>
-                <a:cs typeface="Arial" pitchFamily="34" charset="-120"/>
-              </a:rPr>
-              <a:t>Excerpts from the project source, abridged.</a:t>
-            </a:r>
-          </a:p>
-          <a:p>
-            <a:pPr algn="l"/>
-            <a:r>
-              <a:rPr lang="en-US" sz="1100" dirty="0">
-                <a:solidFill>
-                  <a:srgbClr val="5A6675"/>
-                </a:solidFill>
-                <a:latin typeface="Arial" pitchFamily="34" charset="0"/>
-                <a:ea typeface="Arial" pitchFamily="34" charset="-122"/>
-                <a:cs typeface="Arial" pitchFamily="34" charset="-120"/>
-              </a:rPr>
-              <a:t> </a:t>
-            </a:r>
-          </a:p>
-          <a:p>
-            <a:pPr algn="l"/>
-            <a:r>
-              <a:rPr lang="en-US" sz="1100" dirty="0">
-                <a:solidFill>
-                  <a:srgbClr val="5A6675"/>
-                </a:solidFill>
-                <a:latin typeface="Arial" pitchFamily="34" charset="0"/>
-                <a:ea typeface="Arial" pitchFamily="34" charset="-122"/>
-                <a:cs typeface="Arial" pitchFamily="34" charset="-120"/>
-              </a:rPr>
-              <a:t>Note: Claude was used in mapping the specific line of code per number to the bullet point.</a:t>
-            </a:r>
-          </a:p>
-        </p:txBody>
-      </p:sp>
-    </p:spTree>
-  </p:cSld>
-  <p:clrMapOvr>
-    <a:masterClrMapping/>
-  </p:clrMapOvr>
-</p:sld>
-</file>
-
-<file path=ppt/slides/slide8.xml><?xml version="1.0" encoding="utf-8"?>
-<p:sld xmlns:a="http://schemas.openxmlformats.org/drawingml/2006/main" xmlns:p="http://schemas.openxmlformats.org/presentationml/2006/main" xmlns:r="http://schemas.openxmlformats.org/officeDocument/2006/relationships">
-  <p:cSld>
-    <p:bg>
-      <p:bgPr>
-        <a:solidFill>
-          <a:srgbClr val="FAFAF7"/>
-        </a:solidFill>
-        <a:effectLst/>
-      </p:bgPr>
-    </p:bg>
-    <p:spTree>
-      <p:nvGrpSpPr>
-        <p:cNvPr id="1" name=""/>
-        <p:cNvGrpSpPr/>
-        <p:nvPr/>
-      </p:nvGrpSpPr>
-      <p:grpSpPr/>
-      <p:sp>
-        <p:nvSpPr>
-          <p:cNvPr id="2" name="Text 0"/>
-          <p:cNvSpPr>
-            <a:spLocks noGrp="1"/>
-          </p:cNvSpPr>
-          <p:nvPr>
-            <p:ph type="title"/>
-          </p:nvPr>
-        </p:nvSpPr>
-        <p:spPr>
-          <a:xfrm>
-            <a:off x="812800" y="812800"/>
-            <a:ext cx="10883392" cy="434340"/>
-          </a:xfrm>
-          <a:prstGeom prst="rect">
-            <a:avLst/>
-          </a:prstGeom>
-          <a:noFill/>
-          <a:ln/>
-        </p:spPr>
-        <p:txBody>
-          <a:bodyPr wrap="square" lIns="0" tIns="0" rIns="0" bIns="0" rtlCol="0" anchor="t">
-            <a:normAutofit/>
-          </a:bodyPr>
-          <a:lstStyle/>
-          <a:p>
-            <a:pPr marL="0" indent="0" algn="l">
-              <a:lnSpc>
-                <a:spcPts val="3220"/>
-              </a:lnSpc>
-              <a:buNone/>
-            </a:pPr>
-            <a:r>
-              <a:rPr lang="en-US" sz="2800" b="1" dirty="0">
-                <a:solidFill>
-                  <a:srgbClr val="1B2430"/>
-                </a:solidFill>
-                <a:latin typeface="Arial" pitchFamily="34" charset="0"/>
-                <a:ea typeface="Arial" pitchFamily="34" charset="-122"/>
-                <a:cs typeface="Arial" pitchFamily="34" charset="-120"/>
-              </a:rPr>
-              <a:t>Mutex and lock_guard: implementation</a:t>
-            </a:r>
-            <a:endParaRPr lang="en-US" sz="2800" dirty="0">
-              <a:solidFill>
-                <a:srgbClr val="1B2430"/>
-              </a:solidFill>
-              <a:latin typeface="Arial" pitchFamily="34" charset="0"/>
-              <a:ea typeface="Arial" pitchFamily="34" charset="-122"/>
-              <a:cs typeface="Arial" pitchFamily="34" charset="-120"/>
-            </a:endParaRPr>
-          </a:p>
-        </p:txBody>
-      </p:sp>
-      <p:sp>
-        <p:nvSpPr>
-          <p:cNvPr id="3" name="Text 1"/>
-          <p:cNvSpPr txBox="1"/>
-          <p:nvPr/>
-        </p:nvSpPr>
-        <p:spPr>
-          <a:xfrm>
-            <a:off x="875284" y="1526539"/>
-            <a:ext cx="4343400" cy="4754880"/>
-          </a:xfrm>
-          <a:prstGeom prst="rect">
-            <a:avLst/>
-          </a:prstGeom>
-          <a:noFill/>
-          <a:ln>
-            <a:noFill/>
-          </a:ln>
-        </p:spPr>
-        <p:txBody>
-          <a:bodyPr wrap="square" lIns="0" tIns="0" rIns="0" bIns="0" rtlCol="0" anchor="t">
-            <a:normAutofit/>
-          </a:bodyPr>
-          <a:lstStyle/>
-          <a:p>
-            <a:pPr marL="320040" indent="-320040" algn="l">
-              <a:lnSpc>
-                <a:spcPts val="2200"/>
-              </a:lnSpc>
-              <a:spcBef>
-                <a:spcPts val="0"/>
-              </a:spcBef>
-              <a:spcAft>
-                <a:spcPts val="600"/>
-              </a:spcAft>
-              <a:buClr>
-                <a:srgbClr val="C2410C"/>
-              </a:buClr>
-              <a:buSzPct val="100000"/>
-              <a:buFont typeface="Arial"/>
-              <a:buAutoNum type="arabicPeriod"/>
-            </a:pPr>
-            <a:r>
-              <a:rPr lang="en-US" sz="1600" dirty="0">
-                <a:solidFill>
-                  <a:srgbClr val="2F3A48"/>
-                </a:solidFill>
-                <a:latin typeface="Arial" pitchFamily="34" charset="0"/>
-                <a:ea typeface="Arial" pitchFamily="34" charset="-122"/>
-                <a:cs typeface="Arial" pitchFamily="34" charset="-120"/>
-              </a:rPr>
-              <a:t>One mutex, mtx, guards all shared state: status, parties served, time served and the saved error</a:t>
-            </a:r>
-          </a:p>
-          <a:p>
-            <a:pPr marL="320040" indent="-320040" algn="l">
-              <a:lnSpc>
-                <a:spcPts val="2200"/>
-              </a:lnSpc>
-              <a:spcBef>
-                <a:spcPts val="0"/>
-              </a:spcBef>
-              <a:spcAft>
-                <a:spcPts val="600"/>
-              </a:spcAft>
-              <a:buClr>
-                <a:srgbClr val="C2410C"/>
-              </a:buClr>
-              <a:buSzPct val="100000"/>
-              <a:buFont typeface="Arial"/>
-              <a:buAutoNum type="arabicPeriod"/>
-            </a:pPr>
-            <a:r>
-              <a:rPr lang="en-US" sz="1600" dirty="0">
-                <a:solidFill>
-                  <a:srgbClr val="2F3A48"/>
-                </a:solidFill>
-                <a:latin typeface="Arial" pitchFamily="34" charset="0"/>
-                <a:ea typeface="Arial" pitchFamily="34" charset="-122"/>
-                <a:cs typeface="Arial" pitchFamily="34" charset="-120"/>
-              </a:rPr>
-              <a:t>Each status change is printed under the same lock, so every printed list is a consistent snapshot</a:t>
-            </a:r>
-          </a:p>
-          <a:p>
-            <a:pPr marL="320040" indent="-320040" algn="l">
-              <a:lnSpc>
-                <a:spcPts val="2200"/>
-              </a:lnSpc>
-              <a:spcBef>
-                <a:spcPts val="0"/>
-              </a:spcBef>
-              <a:spcAft>
-                <a:spcPts val="600"/>
-              </a:spcAft>
-              <a:buClr>
-                <a:srgbClr val="C2410C"/>
-              </a:buClr>
-              <a:buSzPct val="100000"/>
-              <a:buFont typeface="Arial"/>
-              <a:buAutoNum type="arabicPeriod"/>
-            </a:pPr>
-            <a:r>
-              <a:rPr lang="en-US" sz="1600" dirty="0">
-                <a:solidFill>
-                  <a:srgbClr val="2F3A48"/>
-                </a:solidFill>
-                <a:latin typeface="Arial" pitchFamily="34" charset="0"/>
-                <a:ea typeface="Arial" pitchFamily="34" charset="-122"/>
-                <a:cs typeface="Arial" pitchFamily="34" charset="-120"/>
-              </a:rPr>
-              <a:t>A run sleeps before it locks, so the lock is held only for a few updates and one print</a:t>
-            </a:r>
-          </a:p>
-          <a:p>
-            <a:pPr marL="320040" indent="-320040" algn="l">
-              <a:lnSpc>
-                <a:spcPts val="2200"/>
-              </a:lnSpc>
-              <a:spcBef>
-                <a:spcPts val="0"/>
-              </a:spcBef>
-              <a:spcAft>
-                <a:spcPts val="600"/>
-              </a:spcAft>
-              <a:buClr>
-                <a:srgbClr val="C2410C"/>
-              </a:buClr>
-              <a:buSzPct val="100000"/>
-              <a:buFont typeface="Arial"/>
-              <a:buAutoNum type="arabicPeriod"/>
-            </a:pPr>
-            <a:r>
-              <a:rPr lang="en-US" sz="1600" dirty="0">
-                <a:solidFill>
-                  <a:srgbClr val="2F3A48"/>
-                </a:solidFill>
-                <a:latin typeface="Arial" pitchFamily="34" charset="0"/>
-                <a:ea typeface="Arial" pitchFamily="34" charset="-122"/>
-                <a:cs typeface="Arial" pitchFamily="34" charset="-120"/>
-              </a:rPr>
-              <a:t>Under the lock, pickInstance() takes the empty instance with the fewest parties served</a:t>
-            </a:r>
-          </a:p>
-          <a:p>
-            <a:pPr marL="320040" indent="-320040" algn="l">
-              <a:lnSpc>
-                <a:spcPts val="2200"/>
-              </a:lnSpc>
-              <a:spcBef>
-                <a:spcPts val="0"/>
-              </a:spcBef>
-              <a:spcAft>
-                <a:spcPts val="600"/>
-              </a:spcAft>
-              <a:buClr>
-                <a:srgbClr val="C2410C"/>
-              </a:buClr>
-              <a:buSzPct val="100000"/>
-              <a:buFont typeface="Arial"/>
-              <a:buAutoNum type="arabicPeriod"/>
-            </a:pPr>
-            <a:r>
-              <a:rPr lang="en-US" sz="1600" dirty="0">
-                <a:solidFill>
-                  <a:srgbClr val="2F3A48"/>
-                </a:solidFill>
-                <a:latin typeface="Arial" pitchFamily="34" charset="0"/>
-                <a:ea typeface="Arial" pitchFamily="34" charset="-122"/>
-                <a:cs typeface="Arial" pitchFamily="34" charset="-120"/>
-              </a:rPr>
-              <a:t>lock_guard unlocks even if something throws; a bare lock()/unlock() would stay locked forever</a:t>
-            </a:r>
-          </a:p>
-        </p:txBody>
-      </p:sp>
-      <p:sp>
-        <p:nvSpPr>
-          <p:cNvPr id="4" name="Code card"/>
-          <p:cNvSpPr/>
-          <p:nvPr/>
-        </p:nvSpPr>
-        <p:spPr>
-          <a:xfrm>
-            <a:off x="5504688" y="1526539"/>
-            <a:ext cx="6191504" cy="4235196"/>
-          </a:xfrm>
-          <a:prstGeom prst="rect">
-            <a:avLst/>
-          </a:prstGeom>
-          <a:solidFill>
-            <a:srgbClr val="1B2430"/>
-          </a:solidFill>
-          <a:ln>
-            <a:noFill/>
-          </a:ln>
-        </p:spPr>
-        <p:txBody>
-          <a:bodyPr rtlCol="0" anchor="ctr"/>
-          <a:lstStyle/>
-          <a:p>
-            <a:endParaRPr lang="en-US"/>
-          </a:p>
-        </p:txBody>
-      </p:sp>
-      <p:sp>
-        <p:nvSpPr>
-          <p:cNvPr id="5" name="Code highlight 1"/>
-          <p:cNvSpPr/>
-          <p:nvPr/>
-        </p:nvSpPr>
-        <p:spPr>
-          <a:xfrm>
-            <a:off x="5559552" y="1872487"/>
-            <a:ext cx="6081776" cy="152400"/>
-          </a:xfrm>
-          <a:prstGeom prst="rect">
-            <a:avLst/>
-          </a:prstGeom>
-          <a:solidFill>
-            <a:srgbClr val="2D3C52"/>
-          </a:solidFill>
-          <a:ln>
-            <a:noFill/>
-          </a:ln>
-        </p:spPr>
-        <p:txBody>
-          <a:bodyPr rtlCol="0" anchor="ctr"/>
-          <a:lstStyle/>
-          <a:p>
-            <a:endParaRPr lang="en-US"/>
-          </a:p>
-        </p:txBody>
-      </p:sp>
-      <p:sp>
-        <p:nvSpPr>
-          <p:cNvPr id="6" name="Code highlight 3"/>
-          <p:cNvSpPr/>
-          <p:nvPr/>
-        </p:nvSpPr>
-        <p:spPr>
-          <a:xfrm>
-            <a:off x="5559552" y="2291587"/>
-            <a:ext cx="6081776" cy="152400"/>
-          </a:xfrm>
-          <a:prstGeom prst="rect">
-            <a:avLst/>
-          </a:prstGeom>
-          <a:solidFill>
-            <a:srgbClr val="2D3C52"/>
-          </a:solidFill>
-          <a:ln>
-            <a:noFill/>
-          </a:ln>
-        </p:spPr>
-        <p:txBody>
-          <a:bodyPr rtlCol="0" anchor="ctr"/>
-          <a:lstStyle/>
-          <a:p>
-            <a:endParaRPr lang="en-US"/>
-          </a:p>
-        </p:txBody>
-      </p:sp>
-      <p:sp>
-        <p:nvSpPr>
-          <p:cNvPr id="7" name="Code highlight 5"/>
-          <p:cNvSpPr/>
-          <p:nvPr/>
-        </p:nvSpPr>
-        <p:spPr>
-          <a:xfrm>
-            <a:off x="5559552" y="2469387"/>
-            <a:ext cx="6081776" cy="152400"/>
-          </a:xfrm>
-          <a:prstGeom prst="rect">
-            <a:avLst/>
-          </a:prstGeom>
-          <a:solidFill>
-            <a:srgbClr val="2D3C52"/>
-          </a:solidFill>
-          <a:ln>
-            <a:noFill/>
-          </a:ln>
-        </p:spPr>
-        <p:txBody>
-          <a:bodyPr rtlCol="0" anchor="ctr"/>
-          <a:lstStyle/>
-          <a:p>
-            <a:endParaRPr lang="en-US"/>
-          </a:p>
-        </p:txBody>
-      </p:sp>
-      <p:sp>
-        <p:nvSpPr>
-          <p:cNvPr id="8" name="Code highlight 1"/>
-          <p:cNvSpPr/>
-          <p:nvPr/>
-        </p:nvSpPr>
-        <p:spPr>
-          <a:xfrm>
-            <a:off x="5559552" y="2647187"/>
-            <a:ext cx="6081776" cy="508000"/>
-          </a:xfrm>
-          <a:prstGeom prst="rect">
-            <a:avLst/>
-          </a:prstGeom>
-          <a:solidFill>
-            <a:srgbClr val="2D3C52"/>
-          </a:solidFill>
-          <a:ln>
-            <a:noFill/>
-          </a:ln>
-        </p:spPr>
-        <p:txBody>
-          <a:bodyPr rtlCol="0" anchor="ctr"/>
-          <a:lstStyle/>
-          <a:p>
-            <a:endParaRPr lang="en-US"/>
-          </a:p>
-        </p:txBody>
-      </p:sp>
-      <p:sp>
-        <p:nvSpPr>
-          <p:cNvPr id="9" name="Code highlight 2"/>
-          <p:cNvSpPr/>
-          <p:nvPr/>
-        </p:nvSpPr>
-        <p:spPr>
-          <a:xfrm>
-            <a:off x="5559552" y="3180587"/>
-            <a:ext cx="6081776" cy="330200"/>
-          </a:xfrm>
-          <a:prstGeom prst="rect">
-            <a:avLst/>
-          </a:prstGeom>
-          <a:solidFill>
-            <a:srgbClr val="2D3C52"/>
-          </a:solidFill>
-          <a:ln>
-            <a:noFill/>
-          </a:ln>
-        </p:spPr>
-        <p:txBody>
-          <a:bodyPr rtlCol="0" anchor="ctr"/>
-          <a:lstStyle/>
-          <a:p>
-            <a:endParaRPr lang="en-US"/>
-          </a:p>
-        </p:txBody>
-      </p:sp>
-      <p:sp>
-        <p:nvSpPr>
-          <p:cNvPr id="10" name="Code highlight 2"/>
-          <p:cNvSpPr/>
-          <p:nvPr/>
-        </p:nvSpPr>
-        <p:spPr>
-          <a:xfrm>
-            <a:off x="5559552" y="3777487"/>
-            <a:ext cx="6081776" cy="508000"/>
-          </a:xfrm>
-          <a:prstGeom prst="rect">
-            <a:avLst/>
-          </a:prstGeom>
-          <a:solidFill>
-            <a:srgbClr val="2D3C52"/>
-          </a:solidFill>
-          <a:ln>
-            <a:noFill/>
-          </a:ln>
-        </p:spPr>
-        <p:txBody>
-          <a:bodyPr rtlCol="0" anchor="ctr"/>
-          <a:lstStyle/>
-          <a:p>
-            <a:endParaRPr lang="en-US"/>
-          </a:p>
-        </p:txBody>
-      </p:sp>
-      <p:sp>
-        <p:nvSpPr>
-          <p:cNvPr id="11" name="Code highlight 4"/>
-          <p:cNvSpPr/>
-          <p:nvPr/>
-        </p:nvSpPr>
-        <p:spPr>
-          <a:xfrm>
-            <a:off x="5559552" y="4729987"/>
-            <a:ext cx="6081776" cy="330200"/>
-          </a:xfrm>
-          <a:prstGeom prst="rect">
-            <a:avLst/>
-          </a:prstGeom>
-          <a:solidFill>
-            <a:srgbClr val="2D3C52"/>
-          </a:solidFill>
-          <a:ln>
-            <a:noFill/>
-          </a:ln>
-        </p:spPr>
-        <p:txBody>
-          <a:bodyPr rtlCol="0" anchor="ctr"/>
-          <a:lstStyle/>
-          <a:p>
-            <a:endParaRPr lang="en-US"/>
-          </a:p>
-        </p:txBody>
-      </p:sp>
-      <p:sp>
-        <p:nvSpPr>
-          <p:cNvPr id="12" name="Code"/>
-          <p:cNvSpPr txBox="1"/>
-          <p:nvPr/>
-        </p:nvSpPr>
-        <p:spPr>
-          <a:xfrm>
-            <a:off x="5925312" y="1681987"/>
-            <a:ext cx="5661152" cy="3924300"/>
-          </a:xfrm>
-          <a:prstGeom prst="rect">
-            <a:avLst/>
-          </a:prstGeom>
-          <a:noFill/>
-          <a:ln>
-            <a:noFill/>
-          </a:ln>
-        </p:spPr>
-        <p:txBody>
-          <a:bodyPr wrap="none" lIns="0" tIns="0" rIns="0" bIns="0" rtlCol="0" anchor="t">
-            <a:noAutofit/>
-          </a:bodyPr>
-          <a:lstStyle/>
-          <a:p>
-            <a:pPr marL="0" indent="0" algn="l">
-              <a:lnSpc>
-                <a:spcPts val="1400"/>
-              </a:lnSpc>
-              <a:spcBef>
-                <a:spcPts val="0"/>
-              </a:spcBef>
-              <a:spcAft>
-                <a:spcPts val="0"/>
-              </a:spcAft>
-              <a:buNone/>
-            </a:pPr>
-            <a:r>
-              <a:rPr lang="en-US" sz="1200" i="1" dirty="0">
-                <a:solidFill>
-                  <a:srgbClr val="A3B0C2"/>
-                </a:solidFill>
-                <a:latin typeface="Consolas" pitchFamily="49" charset="0"/>
-                <a:ea typeface="Consolas" pitchFamily="49" charset="-122"/>
-                <a:cs typeface="Consolas" pitchFamily="49" charset="-120"/>
-              </a:rPr>
-              <a:t>// global</a:t>
-            </a:r>
-          </a:p>
-          <a:p>
-            <a:pPr marL="0" indent="0" algn="l">
-              <a:lnSpc>
-                <a:spcPts val="1400"/>
-              </a:lnSpc>
-              <a:spcBef>
-                <a:spcPts val="0"/>
-              </a:spcBef>
-              <a:spcAft>
-                <a:spcPts val="0"/>
-              </a:spcAft>
-              <a:buNone/>
-            </a:pPr>
-            <a:r>
-              <a:rPr lang="en-US" sz="1200" dirty="0">
-                <a:solidFill>
-                  <a:srgbClr val="7ED3C0"/>
-                </a:solidFill>
-                <a:latin typeface="Consolas" pitchFamily="49" charset="0"/>
-                <a:ea typeface="Consolas" pitchFamily="49" charset="-122"/>
-                <a:cs typeface="Consolas" pitchFamily="49" charset="-120"/>
-              </a:rPr>
-              <a:t>mutex</a:t>
-            </a:r>
-            <a:r>
-              <a:rPr lang="en-US" sz="1200" dirty="0">
-                <a:solidFill>
-                  <a:srgbClr val="DCE3EE"/>
-                </a:solidFill>
-                <a:latin typeface="Consolas" pitchFamily="49" charset="0"/>
-                <a:ea typeface="Consolas" pitchFamily="49" charset="-122"/>
-                <a:cs typeface="Consolas" pitchFamily="49" charset="-120"/>
-              </a:rPr>
-              <a:t> mtx;</a:t>
-            </a:r>
-          </a:p>
-          <a:p>
-            <a:pPr marL="0" indent="0" algn="l">
-              <a:lnSpc>
-                <a:spcPts val="1400"/>
-              </a:lnSpc>
-              <a:spcBef>
-                <a:spcPts val="500"/>
-              </a:spcBef>
-              <a:spcAft>
-                <a:spcPts val="0"/>
-              </a:spcAft>
-              <a:buNone/>
-            </a:pPr>
-            <a:r>
-              <a:rPr lang="en-US" sz="1200" i="1" dirty="0">
-                <a:solidFill>
-                  <a:srgbClr val="A3B0C2"/>
-                </a:solidFill>
-                <a:latin typeface="Consolas" pitchFamily="49" charset="0"/>
-                <a:ea typeface="Consolas" pitchFamily="49" charset="-122"/>
-                <a:cs typeface="Consolas" pitchFamily="49" charset="-120"/>
-              </a:rPr>
-              <a:t>// runDungeon(): the party's thread</a:t>
-            </a:r>
-          </a:p>
-          <a:p>
-            <a:pPr marL="0" indent="0" algn="l">
-              <a:lnSpc>
-                <a:spcPts val="1400"/>
-              </a:lnSpc>
-              <a:spcBef>
-                <a:spcPts val="0"/>
-              </a:spcBef>
-              <a:spcAft>
-                <a:spcPts val="0"/>
-              </a:spcAft>
-              <a:buNone/>
-            </a:pPr>
-            <a:r>
-              <a:rPr lang="en-US" sz="1200" dirty="0">
-                <a:solidFill>
-                  <a:srgbClr val="DCE3EE"/>
-                </a:solidFill>
-                <a:latin typeface="Consolas" pitchFamily="49" charset="0"/>
-                <a:ea typeface="Consolas" pitchFamily="49" charset="-122"/>
-                <a:cs typeface="Consolas" pitchFamily="49" charset="-120"/>
-              </a:rPr>
-              <a:t>this_thread::sleep_for(chrono::seconds(clearTime));</a:t>
-            </a:r>
-          </a:p>
-          <a:p>
-            <a:pPr marL="0" indent="0" algn="l">
-              <a:lnSpc>
-                <a:spcPts val="1400"/>
-              </a:lnSpc>
-              <a:spcBef>
-                <a:spcPts val="0"/>
-              </a:spcBef>
-              <a:spcAft>
-                <a:spcPts val="0"/>
-              </a:spcAft>
-              <a:buNone/>
-            </a:pPr>
-            <a:r>
-              <a:rPr lang="en-US" sz="1200" dirty="0">
-                <a:solidFill>
-                  <a:srgbClr val="7ED3C0"/>
-                </a:solidFill>
-                <a:latin typeface="Consolas" pitchFamily="49" charset="0"/>
-                <a:ea typeface="Consolas" pitchFamily="49" charset="-122"/>
-                <a:cs typeface="Consolas" pitchFamily="49" charset="-120"/>
-              </a:rPr>
-              <a:t>lock_guard</a:t>
-            </a:r>
-            <a:r>
-              <a:rPr lang="en-US" sz="1200" dirty="0">
-                <a:solidFill>
-                  <a:srgbClr val="DCE3EE"/>
-                </a:solidFill>
-                <a:latin typeface="Consolas" pitchFamily="49" charset="0"/>
-                <a:ea typeface="Consolas" pitchFamily="49" charset="-122"/>
-                <a:cs typeface="Consolas" pitchFamily="49" charset="-120"/>
-              </a:rPr>
-              <a:t>&lt;</a:t>
-            </a:r>
-            <a:r>
-              <a:rPr lang="en-US" sz="1200" dirty="0">
-                <a:solidFill>
-                  <a:srgbClr val="7ED3C0"/>
-                </a:solidFill>
-                <a:latin typeface="Consolas" pitchFamily="49" charset="0"/>
-                <a:ea typeface="Consolas" pitchFamily="49" charset="-122"/>
-                <a:cs typeface="Consolas" pitchFamily="49" charset="-120"/>
-              </a:rPr>
-              <a:t>mutex</a:t>
-            </a:r>
-            <a:r>
-              <a:rPr lang="en-US" sz="1200" dirty="0">
-                <a:solidFill>
-                  <a:srgbClr val="DCE3EE"/>
-                </a:solidFill>
-                <a:latin typeface="Consolas" pitchFamily="49" charset="0"/>
-                <a:ea typeface="Consolas" pitchFamily="49" charset="-122"/>
-                <a:cs typeface="Consolas" pitchFamily="49" charset="-120"/>
-              </a:rPr>
-              <a:t>&gt; lock(mtx);</a:t>
-            </a:r>
-          </a:p>
-          <a:p>
-            <a:pPr marL="0" indent="0" algn="l">
-              <a:lnSpc>
-                <a:spcPts val="1400"/>
-              </a:lnSpc>
-              <a:spcBef>
-                <a:spcPts val="0"/>
-              </a:spcBef>
-              <a:spcAft>
-                <a:spcPts val="0"/>
-              </a:spcAft>
-              <a:buNone/>
-            </a:pPr>
-            <a:r>
-              <a:rPr lang="en-US" sz="1200" dirty="0">
-                <a:solidFill>
-                  <a:srgbClr val="DCE3EE"/>
-                </a:solidFill>
-                <a:latin typeface="Consolas" pitchFamily="49" charset="0"/>
-                <a:ea typeface="Consolas" pitchFamily="49" charset="-122"/>
-                <a:cs typeface="Consolas" pitchFamily="49" charset="-120"/>
-              </a:rPr>
-              <a:t>status[instance] = </a:t>
-            </a:r>
-            <a:r>
-              <a:rPr lang="en-US" sz="1200" dirty="0">
-                <a:solidFill>
-                  <a:srgbClr val="B5DCA0"/>
-                </a:solidFill>
-                <a:latin typeface="Consolas" pitchFamily="49" charset="0"/>
-                <a:ea typeface="Consolas" pitchFamily="49" charset="-122"/>
-                <a:cs typeface="Consolas" pitchFamily="49" charset="-120"/>
-              </a:rPr>
-              <a:t>"empty"</a:t>
-            </a:r>
-            <a:r>
-              <a:rPr lang="en-US" sz="1200" dirty="0">
-                <a:solidFill>
-                  <a:srgbClr val="DCE3EE"/>
-                </a:solidFill>
-                <a:latin typeface="Consolas" pitchFamily="49" charset="0"/>
-                <a:ea typeface="Consolas" pitchFamily="49" charset="-122"/>
-                <a:cs typeface="Consolas" pitchFamily="49" charset="-120"/>
-              </a:rPr>
-              <a:t>;</a:t>
-            </a:r>
-          </a:p>
-          <a:p>
-            <a:pPr marL="0" indent="0" algn="l">
-              <a:lnSpc>
-                <a:spcPts val="1400"/>
-              </a:lnSpc>
-              <a:spcBef>
-                <a:spcPts val="0"/>
-              </a:spcBef>
-              <a:spcAft>
-                <a:spcPts val="0"/>
-              </a:spcAft>
-              <a:buNone/>
-            </a:pPr>
-            <a:r>
-              <a:rPr lang="en-US" sz="1200" dirty="0">
-                <a:solidFill>
-                  <a:srgbClr val="DCE3EE"/>
-                </a:solidFill>
-                <a:latin typeface="Consolas" pitchFamily="49" charset="0"/>
-                <a:ea typeface="Consolas" pitchFamily="49" charset="-122"/>
-                <a:cs typeface="Consolas" pitchFamily="49" charset="-120"/>
-              </a:rPr>
-              <a:t>partiesServed[instance]++;</a:t>
-            </a:r>
-          </a:p>
-          <a:p>
-            <a:pPr marL="0" indent="0" algn="l">
-              <a:lnSpc>
-                <a:spcPts val="1400"/>
-              </a:lnSpc>
-              <a:spcBef>
-                <a:spcPts val="0"/>
-              </a:spcBef>
-              <a:spcAft>
-                <a:spcPts val="0"/>
-              </a:spcAft>
-              <a:buNone/>
-            </a:pPr>
-            <a:r>
-              <a:rPr lang="en-US" sz="1200" dirty="0">
-                <a:solidFill>
-                  <a:srgbClr val="DCE3EE"/>
-                </a:solidFill>
-                <a:latin typeface="Consolas" pitchFamily="49" charset="0"/>
-                <a:ea typeface="Consolas" pitchFamily="49" charset="-122"/>
-                <a:cs typeface="Consolas" pitchFamily="49" charset="-120"/>
-              </a:rPr>
-              <a:t>timeServed[instance] += clearTime;</a:t>
-            </a:r>
-          </a:p>
-          <a:p>
-            <a:pPr marL="0" indent="0" algn="l">
-              <a:lnSpc>
-                <a:spcPts val="1400"/>
-              </a:lnSpc>
-              <a:spcBef>
-                <a:spcPts val="0"/>
-              </a:spcBef>
-              <a:spcAft>
-                <a:spcPts val="0"/>
-              </a:spcAft>
-              <a:buNone/>
-            </a:pPr>
-            <a:r>
-              <a:rPr lang="en-US" sz="1200" dirty="0">
-                <a:solidFill>
-                  <a:srgbClr val="DCE3EE"/>
-                </a:solidFill>
-                <a:latin typeface="Consolas" pitchFamily="49" charset="0"/>
-                <a:ea typeface="Consolas" pitchFamily="49" charset="-122"/>
-                <a:cs typeface="Consolas" pitchFamily="49" charset="-120"/>
-              </a:rPr>
-              <a:t>printEvent(</a:t>
-            </a:r>
-            <a:r>
-              <a:rPr lang="en-US" sz="1200" dirty="0">
-                <a:solidFill>
-                  <a:srgbClr val="B5DCA0"/>
-                </a:solidFill>
-                <a:latin typeface="Consolas" pitchFamily="49" charset="0"/>
-                <a:ea typeface="Consolas" pitchFamily="49" charset="-122"/>
-                <a:cs typeface="Consolas" pitchFamily="49" charset="-120"/>
-              </a:rPr>
-              <a:t>"Party "</a:t>
-            </a:r>
-            <a:r>
-              <a:rPr lang="en-US" sz="1200" dirty="0">
-                <a:solidFill>
-                  <a:srgbClr val="DCE3EE"/>
-                </a:solidFill>
-                <a:latin typeface="Consolas" pitchFamily="49" charset="0"/>
-                <a:ea typeface="Consolas" pitchFamily="49" charset="-122"/>
-                <a:cs typeface="Consolas" pitchFamily="49" charset="-120"/>
-              </a:rPr>
-              <a:t> + to_string(party) + </a:t>
-            </a:r>
-            <a:r>
-              <a:rPr lang="en-US" sz="1200" dirty="0">
-                <a:solidFill>
-                  <a:srgbClr val="B5DCA0"/>
-                </a:solidFill>
-                <a:latin typeface="Consolas" pitchFamily="49" charset="0"/>
-                <a:ea typeface="Consolas" pitchFamily="49" charset="-122"/>
-                <a:cs typeface="Consolas" pitchFamily="49" charset="-120"/>
-              </a:rPr>
-              <a:t>" cleared Instance "</a:t>
-            </a:r>
-          </a:p>
-          <a:p>
-            <a:pPr marL="0" indent="0" algn="l">
-              <a:lnSpc>
-                <a:spcPts val="1400"/>
-              </a:lnSpc>
-              <a:spcBef>
-                <a:spcPts val="0"/>
-              </a:spcBef>
-              <a:spcAft>
-                <a:spcPts val="0"/>
-              </a:spcAft>
-              <a:buNone/>
-            </a:pPr>
-            <a:r>
-              <a:rPr lang="en-US" sz="1200" dirty="0">
-                <a:solidFill>
-                  <a:srgbClr val="DCE3EE"/>
-                </a:solidFill>
-                <a:latin typeface="Consolas" pitchFamily="49" charset="0"/>
-                <a:ea typeface="Consolas" pitchFamily="49" charset="-122"/>
-                <a:cs typeface="Consolas" pitchFamily="49" charset="-120"/>
-              </a:rPr>
-              <a:t>           + to_string(instance + </a:t>
-            </a:r>
-            <a:r>
-              <a:rPr lang="en-US" sz="1200" dirty="0">
-                <a:solidFill>
-                  <a:srgbClr val="F4B26B"/>
-                </a:solidFill>
-                <a:latin typeface="Consolas" pitchFamily="49" charset="0"/>
-                <a:ea typeface="Consolas" pitchFamily="49" charset="-122"/>
-                <a:cs typeface="Consolas" pitchFamily="49" charset="-120"/>
-              </a:rPr>
-              <a:t>1</a:t>
-            </a:r>
-            <a:r>
-              <a:rPr lang="en-US" sz="1200" dirty="0">
-                <a:solidFill>
-                  <a:srgbClr val="DCE3EE"/>
-                </a:solidFill>
-                <a:latin typeface="Consolas" pitchFamily="49" charset="0"/>
-                <a:ea typeface="Consolas" pitchFamily="49" charset="-122"/>
-                <a:cs typeface="Consolas" pitchFamily="49" charset="-120"/>
-              </a:rPr>
-              <a:t>));</a:t>
-            </a:r>
-          </a:p>
-          <a:p>
-            <a:pPr marL="0" indent="0" algn="l">
-              <a:lnSpc>
-                <a:spcPts val="1400"/>
-              </a:lnSpc>
-              <a:spcBef>
-                <a:spcPts val="500"/>
-              </a:spcBef>
-              <a:spcAft>
-                <a:spcPts val="0"/>
-              </a:spcAft>
-              <a:buNone/>
-            </a:pPr>
-            <a:r>
-              <a:rPr lang="en-US" sz="1200" i="1" dirty="0">
-                <a:solidFill>
-                  <a:srgbClr val="A3B0C2"/>
-                </a:solidFill>
-                <a:latin typeface="Consolas" pitchFamily="49" charset="0"/>
-                <a:ea typeface="Consolas" pitchFamily="49" charset="-122"/>
-                <a:cs typeface="Consolas" pitchFamily="49" charset="-120"/>
-              </a:rPr>
-              <a:t>// printEvent(): only call this while holding mtx</a:t>
-            </a:r>
-          </a:p>
-          <a:p>
-            <a:pPr marL="0" indent="0" algn="l">
-              <a:lnSpc>
-                <a:spcPts val="1400"/>
-              </a:lnSpc>
-              <a:spcBef>
-                <a:spcPts val="0"/>
-              </a:spcBef>
-              <a:spcAft>
-                <a:spcPts val="0"/>
-              </a:spcAft>
-              <a:buNone/>
-            </a:pPr>
-            <a:r>
-              <a:rPr lang="en-US" sz="1200" dirty="0">
-                <a:solidFill>
-                  <a:srgbClr val="DCE3EE"/>
-                </a:solidFill>
-                <a:latin typeface="Consolas" pitchFamily="49" charset="0"/>
-                <a:ea typeface="Consolas" pitchFamily="49" charset="-122"/>
-                <a:cs typeface="Consolas" pitchFamily="49" charset="-120"/>
-              </a:rPr>
-              <a:t>cout &lt;&lt; </a:t>
-            </a:r>
-            <a:r>
-              <a:rPr lang="en-US" sz="1200" dirty="0">
-                <a:solidFill>
-                  <a:srgbClr val="B5DCA0"/>
-                </a:solidFill>
-                <a:latin typeface="Consolas" pitchFamily="49" charset="0"/>
-                <a:ea typeface="Consolas" pitchFamily="49" charset="-122"/>
-                <a:cs typeface="Consolas" pitchFamily="49" charset="-120"/>
-              </a:rPr>
-              <a:t>"["</a:t>
-            </a:r>
-            <a:r>
-              <a:rPr lang="en-US" sz="1200" dirty="0">
-                <a:solidFill>
-                  <a:srgbClr val="DCE3EE"/>
-                </a:solidFill>
-                <a:latin typeface="Consolas" pitchFamily="49" charset="0"/>
-                <a:ea typeface="Consolas" pitchFamily="49" charset="-122"/>
-                <a:cs typeface="Consolas" pitchFamily="49" charset="-120"/>
-              </a:rPr>
-              <a:t> &lt;&lt; fixed &lt;&lt; setprecision(</a:t>
-            </a:r>
-            <a:r>
-              <a:rPr lang="en-US" sz="1200" dirty="0">
-                <a:solidFill>
-                  <a:srgbClr val="F4B26B"/>
-                </a:solidFill>
-                <a:latin typeface="Consolas" pitchFamily="49" charset="0"/>
-                <a:ea typeface="Consolas" pitchFamily="49" charset="-122"/>
-                <a:cs typeface="Consolas" pitchFamily="49" charset="-120"/>
-              </a:rPr>
-              <a:t>1</a:t>
-            </a:r>
-            <a:r>
-              <a:rPr lang="en-US" sz="1200" dirty="0">
-                <a:solidFill>
-                  <a:srgbClr val="DCE3EE"/>
-                </a:solidFill>
-                <a:latin typeface="Consolas" pitchFamily="49" charset="0"/>
-                <a:ea typeface="Consolas" pitchFamily="49" charset="-122"/>
-                <a:cs typeface="Consolas" pitchFamily="49" charset="-120"/>
-              </a:rPr>
-              <a:t>) &lt;&lt; elapsed() &lt;&lt; </a:t>
-            </a:r>
-            <a:r>
-              <a:rPr lang="en-US" sz="1200" dirty="0">
-                <a:solidFill>
-                  <a:srgbClr val="B5DCA0"/>
-                </a:solidFill>
-                <a:latin typeface="Consolas" pitchFamily="49" charset="0"/>
-                <a:ea typeface="Consolas" pitchFamily="49" charset="-122"/>
-                <a:cs typeface="Consolas" pitchFamily="49" charset="-120"/>
-              </a:rPr>
-              <a:t>"s] "</a:t>
-            </a:r>
-          </a:p>
-          <a:p>
-            <a:pPr marL="0" indent="0" algn="l">
-              <a:lnSpc>
-                <a:spcPts val="1400"/>
-              </a:lnSpc>
-              <a:spcBef>
-                <a:spcPts val="0"/>
-              </a:spcBef>
-              <a:spcAft>
-                <a:spcPts val="0"/>
-              </a:spcAft>
-              <a:buNone/>
-            </a:pPr>
-            <a:r>
-              <a:rPr lang="en-US" sz="1200" dirty="0">
-                <a:solidFill>
-                  <a:srgbClr val="DCE3EE"/>
-                </a:solidFill>
-                <a:latin typeface="Consolas" pitchFamily="49" charset="0"/>
-                <a:ea typeface="Consolas" pitchFamily="49" charset="-122"/>
-                <a:cs typeface="Consolas" pitchFamily="49" charset="-120"/>
-              </a:rPr>
-              <a:t>     &lt;&lt; message &lt;&lt; </a:t>
-            </a:r>
-            <a:r>
-              <a:rPr lang="en-US" sz="1200" dirty="0">
-                <a:solidFill>
-                  <a:srgbClr val="B5DCA0"/>
-                </a:solidFill>
-                <a:latin typeface="Consolas" pitchFamily="49" charset="0"/>
-                <a:ea typeface="Consolas" pitchFamily="49" charset="-122"/>
-                <a:cs typeface="Consolas" pitchFamily="49" charset="-120"/>
-              </a:rPr>
-              <a:t>"\n"</a:t>
-            </a:r>
-            <a:r>
-              <a:rPr lang="en-US" sz="1200" dirty="0">
-                <a:solidFill>
-                  <a:srgbClr val="DCE3EE"/>
-                </a:solidFill>
-                <a:latin typeface="Consolas" pitchFamily="49" charset="0"/>
-                <a:ea typeface="Consolas" pitchFamily="49" charset="-122"/>
-                <a:cs typeface="Consolas" pitchFamily="49" charset="-120"/>
-              </a:rPr>
-              <a:t>;</a:t>
-            </a:r>
-          </a:p>
-          <a:p>
-            <a:pPr marL="0" indent="0" algn="l">
-              <a:lnSpc>
-                <a:spcPts val="1400"/>
-              </a:lnSpc>
-              <a:spcBef>
-                <a:spcPts val="0"/>
-              </a:spcBef>
-              <a:spcAft>
-                <a:spcPts val="0"/>
-              </a:spcAft>
-              <a:buNone/>
-            </a:pPr>
-            <a:r>
-              <a:rPr lang="en-US" sz="1200" dirty="0">
-                <a:solidFill>
-                  <a:srgbClr val="DCE3EE"/>
-                </a:solidFill>
-                <a:latin typeface="Consolas" pitchFamily="49" charset="0"/>
-                <a:ea typeface="Consolas" pitchFamily="49" charset="-122"/>
-                <a:cs typeface="Consolas" pitchFamily="49" charset="-120"/>
-              </a:rPr>
-              <a:t>printStatus();</a:t>
-            </a:r>
-          </a:p>
-          <a:p>
-            <a:pPr marL="0" indent="0" algn="l">
-              <a:lnSpc>
-                <a:spcPts val="1400"/>
-              </a:lnSpc>
-              <a:spcBef>
-                <a:spcPts val="500"/>
-              </a:spcBef>
-              <a:spcAft>
-                <a:spcPts val="0"/>
-              </a:spcAft>
-              <a:buNone/>
-            </a:pPr>
-            <a:r>
-              <a:rPr lang="en-US" sz="1200" i="1" dirty="0">
-                <a:solidFill>
-                  <a:srgbClr val="A3B0C2"/>
-                </a:solidFill>
-                <a:latin typeface="Consolas" pitchFamily="49" charset="0"/>
-                <a:ea typeface="Consolas" pitchFamily="49" charset="-122"/>
-                <a:cs typeface="Consolas" pitchFamily="49" charset="-120"/>
-              </a:rPr>
-              <a:t>// pickInstance(): the empty instance with the fewest parties</a:t>
-            </a:r>
-          </a:p>
-          <a:p>
-            <a:pPr marL="0" indent="0" algn="l">
-              <a:lnSpc>
-                <a:spcPts val="1400"/>
-              </a:lnSpc>
-              <a:spcBef>
-                <a:spcPts val="0"/>
-              </a:spcBef>
-              <a:spcAft>
-                <a:spcPts val="0"/>
-              </a:spcAft>
-              <a:buNone/>
-            </a:pPr>
-            <a:r>
-              <a:rPr lang="en-US" sz="1200" dirty="0">
-                <a:solidFill>
-                  <a:srgbClr val="8EC1F5"/>
-                </a:solidFill>
-                <a:latin typeface="Consolas" pitchFamily="49" charset="0"/>
-                <a:ea typeface="Consolas" pitchFamily="49" charset="-122"/>
-                <a:cs typeface="Consolas" pitchFamily="49" charset="-120"/>
-              </a:rPr>
-              <a:t>for</a:t>
-            </a:r>
-            <a:r>
-              <a:rPr lang="en-US" sz="1200" dirty="0">
-                <a:solidFill>
-                  <a:srgbClr val="DCE3EE"/>
-                </a:solidFill>
-                <a:latin typeface="Consolas" pitchFamily="49" charset="0"/>
-                <a:ea typeface="Consolas" pitchFamily="49" charset="-122"/>
-                <a:cs typeface="Consolas" pitchFamily="49" charset="-120"/>
-              </a:rPr>
-              <a:t> (</a:t>
-            </a:r>
-            <a:r>
-              <a:rPr lang="en-US" sz="1200" dirty="0">
-                <a:solidFill>
-                  <a:srgbClr val="7ED3C0"/>
-                </a:solidFill>
-                <a:latin typeface="Consolas" pitchFamily="49" charset="0"/>
-                <a:ea typeface="Consolas" pitchFamily="49" charset="-122"/>
-                <a:cs typeface="Consolas" pitchFamily="49" charset="-120"/>
-              </a:rPr>
-              <a:t>int</a:t>
-            </a:r>
-            <a:r>
-              <a:rPr lang="en-US" sz="1200" dirty="0">
-                <a:solidFill>
-                  <a:srgbClr val="DCE3EE"/>
-                </a:solidFill>
-                <a:latin typeface="Consolas" pitchFamily="49" charset="0"/>
-                <a:ea typeface="Consolas" pitchFamily="49" charset="-122"/>
-                <a:cs typeface="Consolas" pitchFamily="49" charset="-120"/>
-              </a:rPr>
-              <a:t> i = </a:t>
-            </a:r>
-            <a:r>
-              <a:rPr lang="en-US" sz="1200" dirty="0">
-                <a:solidFill>
-                  <a:srgbClr val="F4B26B"/>
-                </a:solidFill>
-                <a:latin typeface="Consolas" pitchFamily="49" charset="0"/>
-                <a:ea typeface="Consolas" pitchFamily="49" charset="-122"/>
-                <a:cs typeface="Consolas" pitchFamily="49" charset="-120"/>
-              </a:rPr>
-              <a:t>0</a:t>
-            </a:r>
-            <a:r>
-              <a:rPr lang="en-US" sz="1200" dirty="0">
-                <a:solidFill>
-                  <a:srgbClr val="DCE3EE"/>
-                </a:solidFill>
-                <a:latin typeface="Consolas" pitchFamily="49" charset="0"/>
-                <a:ea typeface="Consolas" pitchFamily="49" charset="-122"/>
-                <a:cs typeface="Consolas" pitchFamily="49" charset="-120"/>
-              </a:rPr>
-              <a:t>; i &lt; maxInstances; i++) {</a:t>
-            </a:r>
-          </a:p>
-          <a:p>
-            <a:pPr marL="0" indent="0" algn="l">
-              <a:lnSpc>
-                <a:spcPts val="1400"/>
-              </a:lnSpc>
-              <a:spcBef>
-                <a:spcPts val="0"/>
-              </a:spcBef>
-              <a:spcAft>
-                <a:spcPts val="0"/>
-              </a:spcAft>
-              <a:buNone/>
-            </a:pPr>
-            <a:r>
-              <a:rPr lang="en-US" sz="1200" dirty="0">
-                <a:solidFill>
-                  <a:srgbClr val="DCE3EE"/>
-                </a:solidFill>
-                <a:latin typeface="Consolas" pitchFamily="49" charset="0"/>
-                <a:ea typeface="Consolas" pitchFamily="49" charset="-122"/>
-                <a:cs typeface="Consolas" pitchFamily="49" charset="-120"/>
-              </a:rPr>
-              <a:t>  </a:t>
-            </a:r>
-            <a:r>
-              <a:rPr lang="en-US" sz="1200" dirty="0">
-                <a:solidFill>
-                  <a:srgbClr val="8EC1F5"/>
-                </a:solidFill>
-                <a:latin typeface="Consolas" pitchFamily="49" charset="0"/>
-                <a:ea typeface="Consolas" pitchFamily="49" charset="-122"/>
-                <a:cs typeface="Consolas" pitchFamily="49" charset="-120"/>
-              </a:rPr>
-              <a:t>if</a:t>
-            </a:r>
-            <a:r>
-              <a:rPr lang="en-US" sz="1200" dirty="0">
-                <a:solidFill>
-                  <a:srgbClr val="DCE3EE"/>
-                </a:solidFill>
-                <a:latin typeface="Consolas" pitchFamily="49" charset="0"/>
-                <a:ea typeface="Consolas" pitchFamily="49" charset="-122"/>
-                <a:cs typeface="Consolas" pitchFamily="49" charset="-120"/>
-              </a:rPr>
-              <a:t> (status[i] == </a:t>
-            </a:r>
-            <a:r>
-              <a:rPr lang="en-US" sz="1200" dirty="0">
-                <a:solidFill>
-                  <a:srgbClr val="B5DCA0"/>
-                </a:solidFill>
-                <a:latin typeface="Consolas" pitchFamily="49" charset="0"/>
-                <a:ea typeface="Consolas" pitchFamily="49" charset="-122"/>
-                <a:cs typeface="Consolas" pitchFamily="49" charset="-120"/>
-              </a:rPr>
-              <a:t>"empty"</a:t>
-            </a:r>
-            <a:r>
-              <a:rPr lang="en-US" sz="1200" dirty="0">
-                <a:solidFill>
-                  <a:srgbClr val="DCE3EE"/>
-                </a:solidFill>
-                <a:latin typeface="Consolas" pitchFamily="49" charset="0"/>
-                <a:ea typeface="Consolas" pitchFamily="49" charset="-122"/>
-                <a:cs typeface="Consolas" pitchFamily="49" charset="-120"/>
-              </a:rPr>
-              <a:t> &amp;&amp; (best == -</a:t>
-            </a:r>
-            <a:r>
-              <a:rPr lang="en-US" sz="1200" dirty="0">
-                <a:solidFill>
-                  <a:srgbClr val="F4B26B"/>
-                </a:solidFill>
-                <a:latin typeface="Consolas" pitchFamily="49" charset="0"/>
-                <a:ea typeface="Consolas" pitchFamily="49" charset="-122"/>
-                <a:cs typeface="Consolas" pitchFamily="49" charset="-120"/>
-              </a:rPr>
-              <a:t>1</a:t>
-            </a:r>
-            <a:r>
-              <a:rPr lang="en-US" sz="1200" dirty="0">
-                <a:solidFill>
-                  <a:srgbClr val="DCE3EE"/>
-                </a:solidFill>
-                <a:latin typeface="Consolas" pitchFamily="49" charset="0"/>
-                <a:ea typeface="Consolas" pitchFamily="49" charset="-122"/>
-                <a:cs typeface="Consolas" pitchFamily="49" charset="-120"/>
-              </a:rPr>
-              <a:t> ||</a:t>
-            </a:r>
-          </a:p>
-          <a:p>
-            <a:pPr marL="0" indent="0" algn="l">
-              <a:lnSpc>
-                <a:spcPts val="1400"/>
-              </a:lnSpc>
-              <a:spcBef>
-                <a:spcPts val="0"/>
-              </a:spcBef>
-              <a:spcAft>
-                <a:spcPts val="0"/>
-              </a:spcAft>
-              <a:buNone/>
-            </a:pPr>
-            <a:r>
-              <a:rPr lang="en-US" sz="1200" dirty="0">
-                <a:solidFill>
-                  <a:srgbClr val="DCE3EE"/>
-                </a:solidFill>
-                <a:latin typeface="Consolas" pitchFamily="49" charset="0"/>
-                <a:ea typeface="Consolas" pitchFamily="49" charset="-122"/>
-                <a:cs typeface="Consolas" pitchFamily="49" charset="-120"/>
-              </a:rPr>
-              <a:t>      partiesServed[i] &lt; partiesServed[best])) {</a:t>
-            </a:r>
-          </a:p>
-          <a:p>
-            <a:pPr marL="0" indent="0" algn="l">
-              <a:lnSpc>
-                <a:spcPts val="1400"/>
-              </a:lnSpc>
-              <a:spcBef>
-                <a:spcPts val="0"/>
-              </a:spcBef>
-              <a:spcAft>
-                <a:spcPts val="0"/>
-              </a:spcAft>
-              <a:buNone/>
-            </a:pPr>
-            <a:r>
-              <a:rPr lang="en-US" sz="1200" dirty="0">
-                <a:solidFill>
-                  <a:srgbClr val="DCE3EE"/>
-                </a:solidFill>
-                <a:latin typeface="Consolas" pitchFamily="49" charset="0"/>
-                <a:ea typeface="Consolas" pitchFamily="49" charset="-122"/>
-                <a:cs typeface="Consolas" pitchFamily="49" charset="-120"/>
-              </a:rPr>
-              <a:t>    best = i;</a:t>
-            </a:r>
-          </a:p>
-          <a:p>
-            <a:pPr marL="0" indent="0" algn="l">
-              <a:lnSpc>
-                <a:spcPts val="1400"/>
-              </a:lnSpc>
-              <a:spcBef>
-                <a:spcPts val="0"/>
-              </a:spcBef>
-              <a:spcAft>
-                <a:spcPts val="0"/>
-              </a:spcAft>
-              <a:buNone/>
-            </a:pPr>
-            <a:r>
-              <a:rPr lang="en-US" sz="1200" dirty="0">
-                <a:solidFill>
-                  <a:srgbClr val="DCE3EE"/>
-                </a:solidFill>
-                <a:latin typeface="Consolas" pitchFamily="49" charset="0"/>
-                <a:ea typeface="Consolas" pitchFamily="49" charset="-122"/>
-                <a:cs typeface="Consolas" pitchFamily="49" charset="-120"/>
-              </a:rPr>
-              <a:t>  }</a:t>
-            </a:r>
-          </a:p>
-          <a:p>
-            <a:pPr marL="0" indent="0" algn="l">
-              <a:lnSpc>
-                <a:spcPts val="1400"/>
-              </a:lnSpc>
-              <a:spcBef>
-                <a:spcPts val="0"/>
-              </a:spcBef>
-              <a:spcAft>
-                <a:spcPts val="0"/>
-              </a:spcAft>
-              <a:buNone/>
-            </a:pPr>
-            <a:r>
-              <a:rPr lang="en-US" sz="1200" dirty="0">
-                <a:solidFill>
-                  <a:srgbClr val="DCE3EE"/>
-                </a:solidFill>
-                <a:latin typeface="Consolas" pitchFamily="49" charset="0"/>
-                <a:ea typeface="Consolas" pitchFamily="49" charset="-122"/>
-                <a:cs typeface="Consolas" pitchFamily="49" charset="-120"/>
-              </a:rPr>
-              <a:t>}</a:t>
-            </a:r>
-          </a:p>
-        </p:txBody>
-      </p:sp>
-      <p:sp>
-        <p:nvSpPr>
-          <p:cNvPr id="13" name="Code badge 1"/>
-          <p:cNvSpPr/>
-          <p:nvPr/>
-        </p:nvSpPr>
-        <p:spPr>
-          <a:xfrm>
-            <a:off x="5623560" y="1868677"/>
-            <a:ext cx="160020" cy="160020"/>
-          </a:xfrm>
-          <a:prstGeom prst="ellipse">
-            <a:avLst/>
-          </a:prstGeom>
-          <a:solidFill>
-            <a:srgbClr val="C2410C"/>
-          </a:solidFill>
-          <a:ln>
-            <a:noFill/>
-          </a:ln>
-        </p:spPr>
-        <p:txBody>
-          <a:bodyPr wrap="none" lIns="0" tIns="0" rIns="0" bIns="0" rtlCol="0" anchor="ctr"/>
-          <a:lstStyle/>
-          <a:p>
-            <a:pPr algn="ctr"/>
-            <a:r>
-              <a:rPr lang="en-US" sz="881" b="1" dirty="0">
-                <a:solidFill>
-                  <a:srgbClr val="FFFFFF"/>
-                </a:solidFill>
-                <a:latin typeface="Arial" pitchFamily="34" charset="0"/>
-                <a:ea typeface="Arial" pitchFamily="34" charset="-122"/>
-                <a:cs typeface="Arial" pitchFamily="34" charset="-120"/>
-              </a:rPr>
-              <a:t>1</a:t>
-            </a:r>
-          </a:p>
-        </p:txBody>
-      </p:sp>
-      <p:sp>
-        <p:nvSpPr>
-          <p:cNvPr id="14" name="Code badge 3"/>
-          <p:cNvSpPr/>
-          <p:nvPr/>
-        </p:nvSpPr>
-        <p:spPr>
-          <a:xfrm>
-            <a:off x="5623560" y="2287777"/>
-            <a:ext cx="160020" cy="160020"/>
-          </a:xfrm>
-          <a:prstGeom prst="ellipse">
-            <a:avLst/>
-          </a:prstGeom>
-          <a:solidFill>
-            <a:srgbClr val="C2410C"/>
-          </a:solidFill>
-          <a:ln>
-            <a:noFill/>
-          </a:ln>
-        </p:spPr>
-        <p:txBody>
-          <a:bodyPr wrap="none" lIns="0" tIns="0" rIns="0" bIns="0" rtlCol="0" anchor="ctr"/>
-          <a:lstStyle/>
-          <a:p>
-            <a:pPr algn="ctr"/>
-            <a:r>
-              <a:rPr lang="en-US" sz="881" b="1" dirty="0">
-                <a:solidFill>
-                  <a:srgbClr val="FFFFFF"/>
-                </a:solidFill>
-                <a:latin typeface="Arial" pitchFamily="34" charset="0"/>
-                <a:ea typeface="Arial" pitchFamily="34" charset="-122"/>
-                <a:cs typeface="Arial" pitchFamily="34" charset="-120"/>
-              </a:rPr>
               <a:t>3</a:t>
             </a:r>
           </a:p>
@@ -13042,7 +11536,7 @@
 </p:sld>
 </file>
 
-<file path=ppt/slides/slide9.xml><?xml version="1.0" encoding="utf-8"?>
+<file path=ppt/slides/slide8.xml><?xml version="1.0" encoding="utf-8"?>
 <p:sld xmlns:a="http://schemas.openxmlformats.org/drawingml/2006/main" xmlns:p="http://schemas.openxmlformats.org/presentationml/2006/main" xmlns:r="http://schemas.openxmlformats.org/officeDocument/2006/relationships">
   <p:cSld>
     <p:bg>
@@ -13609,7 +12103,7 @@
                           <a:ea typeface="Arial" pitchFamily="34" charset="-122"/>
                           <a:cs typeface="Arial" pitchFamily="34" charset="-120"/>
                         </a:rPr>
-                        <a:t>Instance before lock, never the reverse; only full parties; lock_guard; no lost permits</a:t>
+                        <a:t>Wait for an instance before locking, never the reverse, so no circular wait can form</a:t>
                       </a:r>
                     </a:p>
                   </a:txBody>
